--- a/cartones/villancicos-infantil/cartones-villancicos-infantil.pptx
+++ b/cartones/villancicos-infantil/cartones-villancicos-infantil.pptx
@@ -3239,7 +3239,7 @@
         <p:spPr>
           <a:xfrm>
             <a:off x="594360" y="1737360"/>
-            <a:ext cx="274320" cy="548640"/>
+            <a:ext cx="274320" cy="594359"/>
           </a:xfrm>
           <a:prstGeom prst="rect">
             <a:avLst/>
@@ -3274,7 +3274,7 @@
         <p:spPr>
           <a:xfrm>
             <a:off x="868680" y="1737360"/>
-            <a:ext cx="2194560" cy="548640"/>
+            <a:ext cx="2194560" cy="594359"/>
           </a:xfrm>
           <a:prstGeom prst="rect">
             <a:avLst/>
@@ -3289,7 +3289,7 @@
           <a:p>
             <a:pPr>
               <a:lnSpc>
-                <a:spcPct val="100000"/>
+                <a:spcPct val="90000"/>
               </a:lnSpc>
               <a:defRPr sz="1100">
                 <a:solidFill>
@@ -3312,7 +3312,7 @@
         <p:spPr>
           <a:xfrm>
             <a:off x="594360" y="2377439"/>
-            <a:ext cx="274320" cy="548640"/>
+            <a:ext cx="274320" cy="594359"/>
           </a:xfrm>
           <a:prstGeom prst="rect">
             <a:avLst/>
@@ -3347,7 +3347,7 @@
         <p:spPr>
           <a:xfrm>
             <a:off x="868680" y="2377439"/>
-            <a:ext cx="2194560" cy="548640"/>
+            <a:ext cx="2194560" cy="594359"/>
           </a:xfrm>
           <a:prstGeom prst="rect">
             <a:avLst/>
@@ -3362,7 +3362,7 @@
           <a:p>
             <a:pPr>
               <a:lnSpc>
-                <a:spcPct val="100000"/>
+                <a:spcPct val="90000"/>
               </a:lnSpc>
               <a:defRPr sz="1100">
                 <a:solidFill>
@@ -3385,7 +3385,7 @@
         <p:spPr>
           <a:xfrm>
             <a:off x="594360" y="3017520"/>
-            <a:ext cx="274320" cy="548640"/>
+            <a:ext cx="274320" cy="594359"/>
           </a:xfrm>
           <a:prstGeom prst="rect">
             <a:avLst/>
@@ -3420,7 +3420,7 @@
         <p:spPr>
           <a:xfrm>
             <a:off x="868680" y="3017520"/>
-            <a:ext cx="2194560" cy="548640"/>
+            <a:ext cx="2194560" cy="594359"/>
           </a:xfrm>
           <a:prstGeom prst="rect">
             <a:avLst/>
@@ -3435,7 +3435,7 @@
           <a:p>
             <a:pPr>
               <a:lnSpc>
-                <a:spcPct val="100000"/>
+                <a:spcPct val="90000"/>
               </a:lnSpc>
               <a:defRPr sz="1100">
                 <a:solidFill>
@@ -3458,7 +3458,7 @@
         <p:spPr>
           <a:xfrm>
             <a:off x="594360" y="3657599"/>
-            <a:ext cx="274320" cy="548640"/>
+            <a:ext cx="274320" cy="594359"/>
           </a:xfrm>
           <a:prstGeom prst="rect">
             <a:avLst/>
@@ -3493,7 +3493,7 @@
         <p:spPr>
           <a:xfrm>
             <a:off x="868680" y="3657599"/>
-            <a:ext cx="2194560" cy="548640"/>
+            <a:ext cx="2194560" cy="594359"/>
           </a:xfrm>
           <a:prstGeom prst="rect">
             <a:avLst/>
@@ -3508,7 +3508,7 @@
           <a:p>
             <a:pPr>
               <a:lnSpc>
-                <a:spcPct val="100000"/>
+                <a:spcPct val="90000"/>
               </a:lnSpc>
               <a:defRPr sz="1100">
                 <a:solidFill>
@@ -3531,7 +3531,7 @@
         <p:spPr>
           <a:xfrm>
             <a:off x="594360" y="4297679"/>
-            <a:ext cx="274320" cy="548640"/>
+            <a:ext cx="274320" cy="594359"/>
           </a:xfrm>
           <a:prstGeom prst="rect">
             <a:avLst/>
@@ -3566,7 +3566,7 @@
         <p:spPr>
           <a:xfrm>
             <a:off x="868680" y="4297679"/>
-            <a:ext cx="2194560" cy="548640"/>
+            <a:ext cx="2194560" cy="594359"/>
           </a:xfrm>
           <a:prstGeom prst="rect">
             <a:avLst/>
@@ -3581,7 +3581,7 @@
           <a:p>
             <a:pPr>
               <a:lnSpc>
-                <a:spcPct val="100000"/>
+                <a:spcPct val="90000"/>
               </a:lnSpc>
               <a:defRPr sz="1100">
                 <a:solidFill>
@@ -3604,7 +3604,7 @@
         <p:spPr>
           <a:xfrm>
             <a:off x="594360" y="4937760"/>
-            <a:ext cx="274320" cy="548640"/>
+            <a:ext cx="274320" cy="594359"/>
           </a:xfrm>
           <a:prstGeom prst="rect">
             <a:avLst/>
@@ -3639,7 +3639,7 @@
         <p:spPr>
           <a:xfrm>
             <a:off x="868680" y="4937760"/>
-            <a:ext cx="2194560" cy="548640"/>
+            <a:ext cx="2194560" cy="594359"/>
           </a:xfrm>
           <a:prstGeom prst="rect">
             <a:avLst/>
@@ -3654,7 +3654,7 @@
           <a:p>
             <a:pPr>
               <a:lnSpc>
-                <a:spcPct val="100000"/>
+                <a:spcPct val="90000"/>
               </a:lnSpc>
               <a:defRPr sz="1100">
                 <a:solidFill>
@@ -3757,7 +3757,7 @@
         <p:spPr>
           <a:xfrm>
             <a:off x="3520440" y="1737360"/>
-            <a:ext cx="274320" cy="548640"/>
+            <a:ext cx="274320" cy="594359"/>
           </a:xfrm>
           <a:prstGeom prst="rect">
             <a:avLst/>
@@ -3792,7 +3792,7 @@
         <p:spPr>
           <a:xfrm>
             <a:off x="3794760" y="1737360"/>
-            <a:ext cx="2194560" cy="548640"/>
+            <a:ext cx="2194560" cy="594359"/>
           </a:xfrm>
           <a:prstGeom prst="rect">
             <a:avLst/>
@@ -3807,7 +3807,7 @@
           <a:p>
             <a:pPr>
               <a:lnSpc>
-                <a:spcPct val="100000"/>
+                <a:spcPct val="90000"/>
               </a:lnSpc>
               <a:defRPr sz="1100">
                 <a:solidFill>
@@ -3830,7 +3830,7 @@
         <p:spPr>
           <a:xfrm>
             <a:off x="3520440" y="2377439"/>
-            <a:ext cx="274320" cy="548640"/>
+            <a:ext cx="274320" cy="594359"/>
           </a:xfrm>
           <a:prstGeom prst="rect">
             <a:avLst/>
@@ -3865,7 +3865,7 @@
         <p:spPr>
           <a:xfrm>
             <a:off x="3794760" y="2377439"/>
-            <a:ext cx="2194560" cy="548640"/>
+            <a:ext cx="2194560" cy="594359"/>
           </a:xfrm>
           <a:prstGeom prst="rect">
             <a:avLst/>
@@ -3880,7 +3880,7 @@
           <a:p>
             <a:pPr>
               <a:lnSpc>
-                <a:spcPct val="100000"/>
+                <a:spcPct val="90000"/>
               </a:lnSpc>
               <a:defRPr sz="1100">
                 <a:solidFill>
@@ -3903,7 +3903,7 @@
         <p:spPr>
           <a:xfrm>
             <a:off x="3520440" y="3017520"/>
-            <a:ext cx="274320" cy="548640"/>
+            <a:ext cx="274320" cy="594359"/>
           </a:xfrm>
           <a:prstGeom prst="rect">
             <a:avLst/>
@@ -3938,7 +3938,7 @@
         <p:spPr>
           <a:xfrm>
             <a:off x="3794760" y="3017520"/>
-            <a:ext cx="2194560" cy="548640"/>
+            <a:ext cx="2194560" cy="594359"/>
           </a:xfrm>
           <a:prstGeom prst="rect">
             <a:avLst/>
@@ -3953,7 +3953,7 @@
           <a:p>
             <a:pPr>
               <a:lnSpc>
-                <a:spcPct val="100000"/>
+                <a:spcPct val="90000"/>
               </a:lnSpc>
               <a:defRPr sz="1100">
                 <a:solidFill>
@@ -3976,7 +3976,7 @@
         <p:spPr>
           <a:xfrm>
             <a:off x="3520440" y="3657599"/>
-            <a:ext cx="274320" cy="548640"/>
+            <a:ext cx="274320" cy="594359"/>
           </a:xfrm>
           <a:prstGeom prst="rect">
             <a:avLst/>
@@ -4011,7 +4011,7 @@
         <p:spPr>
           <a:xfrm>
             <a:off x="3794760" y="3657599"/>
-            <a:ext cx="2194560" cy="548640"/>
+            <a:ext cx="2194560" cy="594359"/>
           </a:xfrm>
           <a:prstGeom prst="rect">
             <a:avLst/>
@@ -4026,7 +4026,7 @@
           <a:p>
             <a:pPr>
               <a:lnSpc>
-                <a:spcPct val="100000"/>
+                <a:spcPct val="90000"/>
               </a:lnSpc>
               <a:defRPr sz="1100">
                 <a:solidFill>
@@ -4049,7 +4049,7 @@
         <p:spPr>
           <a:xfrm>
             <a:off x="3520440" y="4297679"/>
-            <a:ext cx="274320" cy="548640"/>
+            <a:ext cx="274320" cy="594359"/>
           </a:xfrm>
           <a:prstGeom prst="rect">
             <a:avLst/>
@@ -4084,7 +4084,7 @@
         <p:spPr>
           <a:xfrm>
             <a:off x="3794760" y="4297679"/>
-            <a:ext cx="2194560" cy="548640"/>
+            <a:ext cx="2194560" cy="594359"/>
           </a:xfrm>
           <a:prstGeom prst="rect">
             <a:avLst/>
@@ -4099,7 +4099,7 @@
           <a:p>
             <a:pPr>
               <a:lnSpc>
-                <a:spcPct val="100000"/>
+                <a:spcPct val="90000"/>
               </a:lnSpc>
               <a:defRPr sz="1100">
                 <a:solidFill>
@@ -4122,7 +4122,7 @@
         <p:spPr>
           <a:xfrm>
             <a:off x="3520440" y="4937760"/>
-            <a:ext cx="274320" cy="548640"/>
+            <a:ext cx="274320" cy="594359"/>
           </a:xfrm>
           <a:prstGeom prst="rect">
             <a:avLst/>
@@ -4157,7 +4157,7 @@
         <p:spPr>
           <a:xfrm>
             <a:off x="3794760" y="4937760"/>
-            <a:ext cx="2194560" cy="548640"/>
+            <a:ext cx="2194560" cy="594359"/>
           </a:xfrm>
           <a:prstGeom prst="rect">
             <a:avLst/>
@@ -4172,7 +4172,7 @@
           <a:p>
             <a:pPr>
               <a:lnSpc>
-                <a:spcPct val="100000"/>
+                <a:spcPct val="90000"/>
               </a:lnSpc>
               <a:defRPr sz="1100">
                 <a:solidFill>
@@ -4275,7 +4275,7 @@
         <p:spPr>
           <a:xfrm>
             <a:off x="6446520" y="1737360"/>
-            <a:ext cx="274320" cy="548640"/>
+            <a:ext cx="274320" cy="594359"/>
           </a:xfrm>
           <a:prstGeom prst="rect">
             <a:avLst/>
@@ -4310,7 +4310,7 @@
         <p:spPr>
           <a:xfrm>
             <a:off x="6720840" y="1737360"/>
-            <a:ext cx="2194560" cy="548640"/>
+            <a:ext cx="2194560" cy="594359"/>
           </a:xfrm>
           <a:prstGeom prst="rect">
             <a:avLst/>
@@ -4325,7 +4325,7 @@
           <a:p>
             <a:pPr>
               <a:lnSpc>
-                <a:spcPct val="100000"/>
+                <a:spcPct val="90000"/>
               </a:lnSpc>
               <a:defRPr sz="1100">
                 <a:solidFill>
@@ -4348,7 +4348,7 @@
         <p:spPr>
           <a:xfrm>
             <a:off x="6446520" y="2377439"/>
-            <a:ext cx="274320" cy="548640"/>
+            <a:ext cx="274320" cy="594359"/>
           </a:xfrm>
           <a:prstGeom prst="rect">
             <a:avLst/>
@@ -4383,7 +4383,7 @@
         <p:spPr>
           <a:xfrm>
             <a:off x="6720840" y="2377439"/>
-            <a:ext cx="2194560" cy="548640"/>
+            <a:ext cx="2194560" cy="594359"/>
           </a:xfrm>
           <a:prstGeom prst="rect">
             <a:avLst/>
@@ -4398,7 +4398,7 @@
           <a:p>
             <a:pPr>
               <a:lnSpc>
-                <a:spcPct val="100000"/>
+                <a:spcPct val="90000"/>
               </a:lnSpc>
               <a:defRPr sz="1100">
                 <a:solidFill>
@@ -4421,7 +4421,7 @@
         <p:spPr>
           <a:xfrm>
             <a:off x="6446520" y="3017520"/>
-            <a:ext cx="274320" cy="548640"/>
+            <a:ext cx="274320" cy="594359"/>
           </a:xfrm>
           <a:prstGeom prst="rect">
             <a:avLst/>
@@ -4456,7 +4456,7 @@
         <p:spPr>
           <a:xfrm>
             <a:off x="6720840" y="3017520"/>
-            <a:ext cx="2194560" cy="548640"/>
+            <a:ext cx="2194560" cy="594359"/>
           </a:xfrm>
           <a:prstGeom prst="rect">
             <a:avLst/>
@@ -4471,7 +4471,7 @@
           <a:p>
             <a:pPr>
               <a:lnSpc>
-                <a:spcPct val="100000"/>
+                <a:spcPct val="90000"/>
               </a:lnSpc>
               <a:defRPr sz="1100">
                 <a:solidFill>
@@ -4494,7 +4494,7 @@
         <p:spPr>
           <a:xfrm>
             <a:off x="6446520" y="3657599"/>
-            <a:ext cx="274320" cy="548640"/>
+            <a:ext cx="274320" cy="594359"/>
           </a:xfrm>
           <a:prstGeom prst="rect">
             <a:avLst/>
@@ -4529,7 +4529,7 @@
         <p:spPr>
           <a:xfrm>
             <a:off x="6720840" y="3657599"/>
-            <a:ext cx="2194560" cy="548640"/>
+            <a:ext cx="2194560" cy="594359"/>
           </a:xfrm>
           <a:prstGeom prst="rect">
             <a:avLst/>
@@ -4544,7 +4544,7 @@
           <a:p>
             <a:pPr>
               <a:lnSpc>
-                <a:spcPct val="100000"/>
+                <a:spcPct val="90000"/>
               </a:lnSpc>
               <a:defRPr sz="1100">
                 <a:solidFill>
@@ -4567,7 +4567,7 @@
         <p:spPr>
           <a:xfrm>
             <a:off x="6446520" y="4297679"/>
-            <a:ext cx="274320" cy="548640"/>
+            <a:ext cx="274320" cy="594359"/>
           </a:xfrm>
           <a:prstGeom prst="rect">
             <a:avLst/>
@@ -4602,7 +4602,7 @@
         <p:spPr>
           <a:xfrm>
             <a:off x="6720840" y="4297679"/>
-            <a:ext cx="2194560" cy="548640"/>
+            <a:ext cx="2194560" cy="594359"/>
           </a:xfrm>
           <a:prstGeom prst="rect">
             <a:avLst/>
@@ -4617,7 +4617,7 @@
           <a:p>
             <a:pPr>
               <a:lnSpc>
-                <a:spcPct val="100000"/>
+                <a:spcPct val="90000"/>
               </a:lnSpc>
               <a:defRPr sz="1100">
                 <a:solidFill>
@@ -4640,7 +4640,7 @@
         <p:spPr>
           <a:xfrm>
             <a:off x="6446520" y="4937760"/>
-            <a:ext cx="274320" cy="548640"/>
+            <a:ext cx="274320" cy="594359"/>
           </a:xfrm>
           <a:prstGeom prst="rect">
             <a:avLst/>
@@ -4675,7 +4675,7 @@
         <p:spPr>
           <a:xfrm>
             <a:off x="6720840" y="4937760"/>
-            <a:ext cx="2194560" cy="548640"/>
+            <a:ext cx="2194560" cy="594359"/>
           </a:xfrm>
           <a:prstGeom prst="rect">
             <a:avLst/>
@@ -4690,7 +4690,7 @@
           <a:p>
             <a:pPr>
               <a:lnSpc>
-                <a:spcPct val="100000"/>
+                <a:spcPct val="90000"/>
               </a:lnSpc>
               <a:defRPr sz="1100">
                 <a:solidFill>
@@ -4889,7 +4889,7 @@
         <p:spPr>
           <a:xfrm>
             <a:off x="594360" y="1737360"/>
-            <a:ext cx="274320" cy="548640"/>
+            <a:ext cx="274320" cy="594359"/>
           </a:xfrm>
           <a:prstGeom prst="rect">
             <a:avLst/>
@@ -4924,7 +4924,7 @@
         <p:spPr>
           <a:xfrm>
             <a:off x="868680" y="1737360"/>
-            <a:ext cx="2194560" cy="548640"/>
+            <a:ext cx="2194560" cy="594359"/>
           </a:xfrm>
           <a:prstGeom prst="rect">
             <a:avLst/>
@@ -4939,7 +4939,7 @@
           <a:p>
             <a:pPr>
               <a:lnSpc>
-                <a:spcPct val="100000"/>
+                <a:spcPct val="90000"/>
               </a:lnSpc>
               <a:defRPr sz="1100">
                 <a:solidFill>
@@ -4962,7 +4962,7 @@
         <p:spPr>
           <a:xfrm>
             <a:off x="594360" y="2377439"/>
-            <a:ext cx="274320" cy="548640"/>
+            <a:ext cx="274320" cy="594359"/>
           </a:xfrm>
           <a:prstGeom prst="rect">
             <a:avLst/>
@@ -4997,7 +4997,7 @@
         <p:spPr>
           <a:xfrm>
             <a:off x="868680" y="2377439"/>
-            <a:ext cx="2194560" cy="548640"/>
+            <a:ext cx="2194560" cy="594359"/>
           </a:xfrm>
           <a:prstGeom prst="rect">
             <a:avLst/>
@@ -5012,7 +5012,7 @@
           <a:p>
             <a:pPr>
               <a:lnSpc>
-                <a:spcPct val="100000"/>
+                <a:spcPct val="90000"/>
               </a:lnSpc>
               <a:defRPr sz="1100">
                 <a:solidFill>
@@ -5035,7 +5035,7 @@
         <p:spPr>
           <a:xfrm>
             <a:off x="594360" y="3017520"/>
-            <a:ext cx="274320" cy="548640"/>
+            <a:ext cx="274320" cy="594359"/>
           </a:xfrm>
           <a:prstGeom prst="rect">
             <a:avLst/>
@@ -5070,7 +5070,7 @@
         <p:spPr>
           <a:xfrm>
             <a:off x="868680" y="3017520"/>
-            <a:ext cx="2194560" cy="548640"/>
+            <a:ext cx="2194560" cy="594359"/>
           </a:xfrm>
           <a:prstGeom prst="rect">
             <a:avLst/>
@@ -5085,7 +5085,7 @@
           <a:p>
             <a:pPr>
               <a:lnSpc>
-                <a:spcPct val="100000"/>
+                <a:spcPct val="90000"/>
               </a:lnSpc>
               <a:defRPr sz="1100">
                 <a:solidFill>
@@ -5108,7 +5108,7 @@
         <p:spPr>
           <a:xfrm>
             <a:off x="594360" y="3657599"/>
-            <a:ext cx="274320" cy="548640"/>
+            <a:ext cx="274320" cy="594359"/>
           </a:xfrm>
           <a:prstGeom prst="rect">
             <a:avLst/>
@@ -5143,7 +5143,7 @@
         <p:spPr>
           <a:xfrm>
             <a:off x="868680" y="3657599"/>
-            <a:ext cx="2194560" cy="548640"/>
+            <a:ext cx="2194560" cy="594359"/>
           </a:xfrm>
           <a:prstGeom prst="rect">
             <a:avLst/>
@@ -5158,7 +5158,7 @@
           <a:p>
             <a:pPr>
               <a:lnSpc>
-                <a:spcPct val="100000"/>
+                <a:spcPct val="90000"/>
               </a:lnSpc>
               <a:defRPr sz="1100">
                 <a:solidFill>
@@ -5181,7 +5181,7 @@
         <p:spPr>
           <a:xfrm>
             <a:off x="594360" y="4297679"/>
-            <a:ext cx="274320" cy="548640"/>
+            <a:ext cx="274320" cy="594359"/>
           </a:xfrm>
           <a:prstGeom prst="rect">
             <a:avLst/>
@@ -5216,7 +5216,7 @@
         <p:spPr>
           <a:xfrm>
             <a:off x="868680" y="4297679"/>
-            <a:ext cx="2194560" cy="548640"/>
+            <a:ext cx="2194560" cy="594359"/>
           </a:xfrm>
           <a:prstGeom prst="rect">
             <a:avLst/>
@@ -5231,7 +5231,7 @@
           <a:p>
             <a:pPr>
               <a:lnSpc>
-                <a:spcPct val="100000"/>
+                <a:spcPct val="90000"/>
               </a:lnSpc>
               <a:defRPr sz="1100">
                 <a:solidFill>
@@ -5254,7 +5254,7 @@
         <p:spPr>
           <a:xfrm>
             <a:off x="594360" y="4937760"/>
-            <a:ext cx="274320" cy="548640"/>
+            <a:ext cx="274320" cy="594359"/>
           </a:xfrm>
           <a:prstGeom prst="rect">
             <a:avLst/>
@@ -5289,7 +5289,7 @@
         <p:spPr>
           <a:xfrm>
             <a:off x="868680" y="4937760"/>
-            <a:ext cx="2194560" cy="548640"/>
+            <a:ext cx="2194560" cy="594359"/>
           </a:xfrm>
           <a:prstGeom prst="rect">
             <a:avLst/>
@@ -5304,7 +5304,7 @@
           <a:p>
             <a:pPr>
               <a:lnSpc>
-                <a:spcPct val="100000"/>
+                <a:spcPct val="90000"/>
               </a:lnSpc>
               <a:defRPr sz="1100">
                 <a:solidFill>
@@ -5407,7 +5407,7 @@
         <p:spPr>
           <a:xfrm>
             <a:off x="3520440" y="1737360"/>
-            <a:ext cx="274320" cy="548640"/>
+            <a:ext cx="274320" cy="594359"/>
           </a:xfrm>
           <a:prstGeom prst="rect">
             <a:avLst/>
@@ -5442,7 +5442,7 @@
         <p:spPr>
           <a:xfrm>
             <a:off x="3794760" y="1737360"/>
-            <a:ext cx="2194560" cy="548640"/>
+            <a:ext cx="2194560" cy="594359"/>
           </a:xfrm>
           <a:prstGeom prst="rect">
             <a:avLst/>
@@ -5457,7 +5457,7 @@
           <a:p>
             <a:pPr>
               <a:lnSpc>
-                <a:spcPct val="100000"/>
+                <a:spcPct val="90000"/>
               </a:lnSpc>
               <a:defRPr sz="1100">
                 <a:solidFill>
@@ -5480,7 +5480,7 @@
         <p:spPr>
           <a:xfrm>
             <a:off x="3520440" y="2377439"/>
-            <a:ext cx="274320" cy="548640"/>
+            <a:ext cx="274320" cy="594359"/>
           </a:xfrm>
           <a:prstGeom prst="rect">
             <a:avLst/>
@@ -5515,7 +5515,7 @@
         <p:spPr>
           <a:xfrm>
             <a:off x="3794760" y="2377439"/>
-            <a:ext cx="2194560" cy="548640"/>
+            <a:ext cx="2194560" cy="594359"/>
           </a:xfrm>
           <a:prstGeom prst="rect">
             <a:avLst/>
@@ -5530,7 +5530,7 @@
           <a:p>
             <a:pPr>
               <a:lnSpc>
-                <a:spcPct val="100000"/>
+                <a:spcPct val="90000"/>
               </a:lnSpc>
               <a:defRPr sz="1100">
                 <a:solidFill>
@@ -5553,7 +5553,7 @@
         <p:spPr>
           <a:xfrm>
             <a:off x="3520440" y="3017520"/>
-            <a:ext cx="274320" cy="548640"/>
+            <a:ext cx="274320" cy="594359"/>
           </a:xfrm>
           <a:prstGeom prst="rect">
             <a:avLst/>
@@ -5588,7 +5588,7 @@
         <p:spPr>
           <a:xfrm>
             <a:off x="3794760" y="3017520"/>
-            <a:ext cx="2194560" cy="548640"/>
+            <a:ext cx="2194560" cy="594359"/>
           </a:xfrm>
           <a:prstGeom prst="rect">
             <a:avLst/>
@@ -5603,7 +5603,7 @@
           <a:p>
             <a:pPr>
               <a:lnSpc>
-                <a:spcPct val="100000"/>
+                <a:spcPct val="90000"/>
               </a:lnSpc>
               <a:defRPr sz="1100">
                 <a:solidFill>
@@ -5626,7 +5626,7 @@
         <p:spPr>
           <a:xfrm>
             <a:off x="3520440" y="3657599"/>
-            <a:ext cx="274320" cy="548640"/>
+            <a:ext cx="274320" cy="594359"/>
           </a:xfrm>
           <a:prstGeom prst="rect">
             <a:avLst/>
@@ -5661,7 +5661,7 @@
         <p:spPr>
           <a:xfrm>
             <a:off x="3794760" y="3657599"/>
-            <a:ext cx="2194560" cy="548640"/>
+            <a:ext cx="2194560" cy="594359"/>
           </a:xfrm>
           <a:prstGeom prst="rect">
             <a:avLst/>
@@ -5676,7 +5676,7 @@
           <a:p>
             <a:pPr>
               <a:lnSpc>
-                <a:spcPct val="100000"/>
+                <a:spcPct val="90000"/>
               </a:lnSpc>
               <a:defRPr sz="1100">
                 <a:solidFill>
@@ -5699,7 +5699,7 @@
         <p:spPr>
           <a:xfrm>
             <a:off x="3520440" y="4297679"/>
-            <a:ext cx="274320" cy="548640"/>
+            <a:ext cx="274320" cy="594359"/>
           </a:xfrm>
           <a:prstGeom prst="rect">
             <a:avLst/>
@@ -5734,7 +5734,7 @@
         <p:spPr>
           <a:xfrm>
             <a:off x="3794760" y="4297679"/>
-            <a:ext cx="2194560" cy="548640"/>
+            <a:ext cx="2194560" cy="594359"/>
           </a:xfrm>
           <a:prstGeom prst="rect">
             <a:avLst/>
@@ -5749,7 +5749,7 @@
           <a:p>
             <a:pPr>
               <a:lnSpc>
-                <a:spcPct val="100000"/>
+                <a:spcPct val="90000"/>
               </a:lnSpc>
               <a:defRPr sz="1100">
                 <a:solidFill>
@@ -5772,7 +5772,7 @@
         <p:spPr>
           <a:xfrm>
             <a:off x="3520440" y="4937760"/>
-            <a:ext cx="274320" cy="548640"/>
+            <a:ext cx="274320" cy="594359"/>
           </a:xfrm>
           <a:prstGeom prst="rect">
             <a:avLst/>
@@ -5807,7 +5807,7 @@
         <p:spPr>
           <a:xfrm>
             <a:off x="3794760" y="4937760"/>
-            <a:ext cx="2194560" cy="548640"/>
+            <a:ext cx="2194560" cy="594359"/>
           </a:xfrm>
           <a:prstGeom prst="rect">
             <a:avLst/>
@@ -5822,7 +5822,7 @@
           <a:p>
             <a:pPr>
               <a:lnSpc>
-                <a:spcPct val="100000"/>
+                <a:spcPct val="90000"/>
               </a:lnSpc>
               <a:defRPr sz="1100">
                 <a:solidFill>
@@ -5925,7 +5925,7 @@
         <p:spPr>
           <a:xfrm>
             <a:off x="6446520" y="1737360"/>
-            <a:ext cx="274320" cy="548640"/>
+            <a:ext cx="274320" cy="594359"/>
           </a:xfrm>
           <a:prstGeom prst="rect">
             <a:avLst/>
@@ -5960,7 +5960,7 @@
         <p:spPr>
           <a:xfrm>
             <a:off x="6720840" y="1737360"/>
-            <a:ext cx="2194560" cy="548640"/>
+            <a:ext cx="2194560" cy="594359"/>
           </a:xfrm>
           <a:prstGeom prst="rect">
             <a:avLst/>
@@ -5975,7 +5975,7 @@
           <a:p>
             <a:pPr>
               <a:lnSpc>
-                <a:spcPct val="100000"/>
+                <a:spcPct val="90000"/>
               </a:lnSpc>
               <a:defRPr sz="1100">
                 <a:solidFill>
@@ -5998,7 +5998,7 @@
         <p:spPr>
           <a:xfrm>
             <a:off x="6446520" y="2377439"/>
-            <a:ext cx="274320" cy="548640"/>
+            <a:ext cx="274320" cy="594359"/>
           </a:xfrm>
           <a:prstGeom prst="rect">
             <a:avLst/>
@@ -6033,7 +6033,7 @@
         <p:spPr>
           <a:xfrm>
             <a:off x="6720840" y="2377439"/>
-            <a:ext cx="2194560" cy="548640"/>
+            <a:ext cx="2194560" cy="594359"/>
           </a:xfrm>
           <a:prstGeom prst="rect">
             <a:avLst/>
@@ -6048,7 +6048,7 @@
           <a:p>
             <a:pPr>
               <a:lnSpc>
-                <a:spcPct val="100000"/>
+                <a:spcPct val="90000"/>
               </a:lnSpc>
               <a:defRPr sz="1100">
                 <a:solidFill>
@@ -6071,7 +6071,7 @@
         <p:spPr>
           <a:xfrm>
             <a:off x="6446520" y="3017520"/>
-            <a:ext cx="274320" cy="548640"/>
+            <a:ext cx="274320" cy="594359"/>
           </a:xfrm>
           <a:prstGeom prst="rect">
             <a:avLst/>
@@ -6106,7 +6106,7 @@
         <p:spPr>
           <a:xfrm>
             <a:off x="6720840" y="3017520"/>
-            <a:ext cx="2194560" cy="548640"/>
+            <a:ext cx="2194560" cy="594359"/>
           </a:xfrm>
           <a:prstGeom prst="rect">
             <a:avLst/>
@@ -6121,7 +6121,7 @@
           <a:p>
             <a:pPr>
               <a:lnSpc>
-                <a:spcPct val="100000"/>
+                <a:spcPct val="90000"/>
               </a:lnSpc>
               <a:defRPr sz="1100">
                 <a:solidFill>
@@ -6144,7 +6144,7 @@
         <p:spPr>
           <a:xfrm>
             <a:off x="6446520" y="3657599"/>
-            <a:ext cx="274320" cy="548640"/>
+            <a:ext cx="274320" cy="594359"/>
           </a:xfrm>
           <a:prstGeom prst="rect">
             <a:avLst/>
@@ -6179,7 +6179,7 @@
         <p:spPr>
           <a:xfrm>
             <a:off x="6720840" y="3657599"/>
-            <a:ext cx="2194560" cy="548640"/>
+            <a:ext cx="2194560" cy="594359"/>
           </a:xfrm>
           <a:prstGeom prst="rect">
             <a:avLst/>
@@ -6194,7 +6194,7 @@
           <a:p>
             <a:pPr>
               <a:lnSpc>
-                <a:spcPct val="100000"/>
+                <a:spcPct val="90000"/>
               </a:lnSpc>
               <a:defRPr sz="1100">
                 <a:solidFill>
@@ -6217,7 +6217,7 @@
         <p:spPr>
           <a:xfrm>
             <a:off x="6446520" y="4297679"/>
-            <a:ext cx="274320" cy="548640"/>
+            <a:ext cx="274320" cy="594359"/>
           </a:xfrm>
           <a:prstGeom prst="rect">
             <a:avLst/>
@@ -6252,7 +6252,7 @@
         <p:spPr>
           <a:xfrm>
             <a:off x="6720840" y="4297679"/>
-            <a:ext cx="2194560" cy="548640"/>
+            <a:ext cx="2194560" cy="594359"/>
           </a:xfrm>
           <a:prstGeom prst="rect">
             <a:avLst/>
@@ -6267,7 +6267,7 @@
           <a:p>
             <a:pPr>
               <a:lnSpc>
-                <a:spcPct val="100000"/>
+                <a:spcPct val="90000"/>
               </a:lnSpc>
               <a:defRPr sz="1100">
                 <a:solidFill>
@@ -6290,7 +6290,7 @@
         <p:spPr>
           <a:xfrm>
             <a:off x="6446520" y="4937760"/>
-            <a:ext cx="274320" cy="548640"/>
+            <a:ext cx="274320" cy="594359"/>
           </a:xfrm>
           <a:prstGeom prst="rect">
             <a:avLst/>
@@ -6325,7 +6325,7 @@
         <p:spPr>
           <a:xfrm>
             <a:off x="6720840" y="4937760"/>
-            <a:ext cx="2194560" cy="548640"/>
+            <a:ext cx="2194560" cy="594359"/>
           </a:xfrm>
           <a:prstGeom prst="rect">
             <a:avLst/>
@@ -6340,7 +6340,7 @@
           <a:p>
             <a:pPr>
               <a:lnSpc>
-                <a:spcPct val="100000"/>
+                <a:spcPct val="90000"/>
               </a:lnSpc>
               <a:defRPr sz="1100">
                 <a:solidFill>
@@ -6539,7 +6539,7 @@
         <p:spPr>
           <a:xfrm>
             <a:off x="594360" y="1737360"/>
-            <a:ext cx="274320" cy="548640"/>
+            <a:ext cx="274320" cy="594359"/>
           </a:xfrm>
           <a:prstGeom prst="rect">
             <a:avLst/>
@@ -6574,7 +6574,7 @@
         <p:spPr>
           <a:xfrm>
             <a:off x="868680" y="1737360"/>
-            <a:ext cx="2194560" cy="548640"/>
+            <a:ext cx="2194560" cy="594359"/>
           </a:xfrm>
           <a:prstGeom prst="rect">
             <a:avLst/>
@@ -6589,7 +6589,7 @@
           <a:p>
             <a:pPr>
               <a:lnSpc>
-                <a:spcPct val="100000"/>
+                <a:spcPct val="90000"/>
               </a:lnSpc>
               <a:defRPr sz="1100">
                 <a:solidFill>
@@ -6612,7 +6612,7 @@
         <p:spPr>
           <a:xfrm>
             <a:off x="594360" y="2377439"/>
-            <a:ext cx="274320" cy="548640"/>
+            <a:ext cx="274320" cy="594359"/>
           </a:xfrm>
           <a:prstGeom prst="rect">
             <a:avLst/>
@@ -6647,7 +6647,7 @@
         <p:spPr>
           <a:xfrm>
             <a:off x="868680" y="2377439"/>
-            <a:ext cx="2194560" cy="548640"/>
+            <a:ext cx="2194560" cy="594359"/>
           </a:xfrm>
           <a:prstGeom prst="rect">
             <a:avLst/>
@@ -6662,7 +6662,7 @@
           <a:p>
             <a:pPr>
               <a:lnSpc>
-                <a:spcPct val="100000"/>
+                <a:spcPct val="90000"/>
               </a:lnSpc>
               <a:defRPr sz="1100">
                 <a:solidFill>
@@ -6685,7 +6685,7 @@
         <p:spPr>
           <a:xfrm>
             <a:off x="594360" y="3017520"/>
-            <a:ext cx="274320" cy="548640"/>
+            <a:ext cx="274320" cy="594359"/>
           </a:xfrm>
           <a:prstGeom prst="rect">
             <a:avLst/>
@@ -6720,7 +6720,7 @@
         <p:spPr>
           <a:xfrm>
             <a:off x="868680" y="3017520"/>
-            <a:ext cx="2194560" cy="548640"/>
+            <a:ext cx="2194560" cy="594359"/>
           </a:xfrm>
           <a:prstGeom prst="rect">
             <a:avLst/>
@@ -6735,7 +6735,7 @@
           <a:p>
             <a:pPr>
               <a:lnSpc>
-                <a:spcPct val="100000"/>
+                <a:spcPct val="90000"/>
               </a:lnSpc>
               <a:defRPr sz="1100">
                 <a:solidFill>
@@ -6758,7 +6758,7 @@
         <p:spPr>
           <a:xfrm>
             <a:off x="594360" y="3657599"/>
-            <a:ext cx="274320" cy="548640"/>
+            <a:ext cx="274320" cy="594359"/>
           </a:xfrm>
           <a:prstGeom prst="rect">
             <a:avLst/>
@@ -6793,7 +6793,7 @@
         <p:spPr>
           <a:xfrm>
             <a:off x="868680" y="3657599"/>
-            <a:ext cx="2194560" cy="548640"/>
+            <a:ext cx="2194560" cy="594359"/>
           </a:xfrm>
           <a:prstGeom prst="rect">
             <a:avLst/>
@@ -6808,7 +6808,7 @@
           <a:p>
             <a:pPr>
               <a:lnSpc>
-                <a:spcPct val="100000"/>
+                <a:spcPct val="90000"/>
               </a:lnSpc>
               <a:defRPr sz="1100">
                 <a:solidFill>
@@ -6831,7 +6831,7 @@
         <p:spPr>
           <a:xfrm>
             <a:off x="594360" y="4297679"/>
-            <a:ext cx="274320" cy="548640"/>
+            <a:ext cx="274320" cy="594359"/>
           </a:xfrm>
           <a:prstGeom prst="rect">
             <a:avLst/>
@@ -6866,7 +6866,7 @@
         <p:spPr>
           <a:xfrm>
             <a:off x="868680" y="4297679"/>
-            <a:ext cx="2194560" cy="548640"/>
+            <a:ext cx="2194560" cy="594359"/>
           </a:xfrm>
           <a:prstGeom prst="rect">
             <a:avLst/>
@@ -6881,7 +6881,7 @@
           <a:p>
             <a:pPr>
               <a:lnSpc>
-                <a:spcPct val="100000"/>
+                <a:spcPct val="90000"/>
               </a:lnSpc>
               <a:defRPr sz="1100">
                 <a:solidFill>
@@ -6904,7 +6904,7 @@
         <p:spPr>
           <a:xfrm>
             <a:off x="594360" y="4937760"/>
-            <a:ext cx="274320" cy="548640"/>
+            <a:ext cx="274320" cy="594359"/>
           </a:xfrm>
           <a:prstGeom prst="rect">
             <a:avLst/>
@@ -6939,7 +6939,7 @@
         <p:spPr>
           <a:xfrm>
             <a:off x="868680" y="4937760"/>
-            <a:ext cx="2194560" cy="548640"/>
+            <a:ext cx="2194560" cy="594359"/>
           </a:xfrm>
           <a:prstGeom prst="rect">
             <a:avLst/>
@@ -6954,7 +6954,7 @@
           <a:p>
             <a:pPr>
               <a:lnSpc>
-                <a:spcPct val="100000"/>
+                <a:spcPct val="90000"/>
               </a:lnSpc>
               <a:defRPr sz="1100">
                 <a:solidFill>
@@ -7057,7 +7057,7 @@
         <p:spPr>
           <a:xfrm>
             <a:off x="3520440" y="1737360"/>
-            <a:ext cx="274320" cy="548640"/>
+            <a:ext cx="274320" cy="594359"/>
           </a:xfrm>
           <a:prstGeom prst="rect">
             <a:avLst/>
@@ -7092,7 +7092,7 @@
         <p:spPr>
           <a:xfrm>
             <a:off x="3794760" y="1737360"/>
-            <a:ext cx="2194560" cy="548640"/>
+            <a:ext cx="2194560" cy="594359"/>
           </a:xfrm>
           <a:prstGeom prst="rect">
             <a:avLst/>
@@ -7107,7 +7107,7 @@
           <a:p>
             <a:pPr>
               <a:lnSpc>
-                <a:spcPct val="100000"/>
+                <a:spcPct val="90000"/>
               </a:lnSpc>
               <a:defRPr sz="1100">
                 <a:solidFill>
@@ -7130,7 +7130,7 @@
         <p:spPr>
           <a:xfrm>
             <a:off x="3520440" y="2377439"/>
-            <a:ext cx="274320" cy="548640"/>
+            <a:ext cx="274320" cy="594359"/>
           </a:xfrm>
           <a:prstGeom prst="rect">
             <a:avLst/>
@@ -7165,7 +7165,7 @@
         <p:spPr>
           <a:xfrm>
             <a:off x="3794760" y="2377439"/>
-            <a:ext cx="2194560" cy="548640"/>
+            <a:ext cx="2194560" cy="594359"/>
           </a:xfrm>
           <a:prstGeom prst="rect">
             <a:avLst/>
@@ -7180,7 +7180,7 @@
           <a:p>
             <a:pPr>
               <a:lnSpc>
-                <a:spcPct val="100000"/>
+                <a:spcPct val="90000"/>
               </a:lnSpc>
               <a:defRPr sz="1100">
                 <a:solidFill>
@@ -7203,7 +7203,7 @@
         <p:spPr>
           <a:xfrm>
             <a:off x="3520440" y="3017520"/>
-            <a:ext cx="274320" cy="548640"/>
+            <a:ext cx="274320" cy="594359"/>
           </a:xfrm>
           <a:prstGeom prst="rect">
             <a:avLst/>
@@ -7238,7 +7238,7 @@
         <p:spPr>
           <a:xfrm>
             <a:off x="3794760" y="3017520"/>
-            <a:ext cx="2194560" cy="548640"/>
+            <a:ext cx="2194560" cy="594359"/>
           </a:xfrm>
           <a:prstGeom prst="rect">
             <a:avLst/>
@@ -7253,7 +7253,7 @@
           <a:p>
             <a:pPr>
               <a:lnSpc>
-                <a:spcPct val="100000"/>
+                <a:spcPct val="90000"/>
               </a:lnSpc>
               <a:defRPr sz="1100">
                 <a:solidFill>
@@ -7276,7 +7276,7 @@
         <p:spPr>
           <a:xfrm>
             <a:off x="3520440" y="3657599"/>
-            <a:ext cx="274320" cy="548640"/>
+            <a:ext cx="274320" cy="594359"/>
           </a:xfrm>
           <a:prstGeom prst="rect">
             <a:avLst/>
@@ -7311,7 +7311,7 @@
         <p:spPr>
           <a:xfrm>
             <a:off x="3794760" y="3657599"/>
-            <a:ext cx="2194560" cy="548640"/>
+            <a:ext cx="2194560" cy="594359"/>
           </a:xfrm>
           <a:prstGeom prst="rect">
             <a:avLst/>
@@ -7326,7 +7326,7 @@
           <a:p>
             <a:pPr>
               <a:lnSpc>
-                <a:spcPct val="100000"/>
+                <a:spcPct val="90000"/>
               </a:lnSpc>
               <a:defRPr sz="1100">
                 <a:solidFill>
@@ -7349,7 +7349,7 @@
         <p:spPr>
           <a:xfrm>
             <a:off x="3520440" y="4297679"/>
-            <a:ext cx="274320" cy="548640"/>
+            <a:ext cx="274320" cy="594359"/>
           </a:xfrm>
           <a:prstGeom prst="rect">
             <a:avLst/>
@@ -7384,7 +7384,7 @@
         <p:spPr>
           <a:xfrm>
             <a:off x="3794760" y="4297679"/>
-            <a:ext cx="2194560" cy="548640"/>
+            <a:ext cx="2194560" cy="594359"/>
           </a:xfrm>
           <a:prstGeom prst="rect">
             <a:avLst/>
@@ -7399,7 +7399,7 @@
           <a:p>
             <a:pPr>
               <a:lnSpc>
-                <a:spcPct val="100000"/>
+                <a:spcPct val="90000"/>
               </a:lnSpc>
               <a:defRPr sz="1100">
                 <a:solidFill>
@@ -7422,7 +7422,7 @@
         <p:spPr>
           <a:xfrm>
             <a:off x="3520440" y="4937760"/>
-            <a:ext cx="274320" cy="548640"/>
+            <a:ext cx="274320" cy="594359"/>
           </a:xfrm>
           <a:prstGeom prst="rect">
             <a:avLst/>
@@ -7457,7 +7457,7 @@
         <p:spPr>
           <a:xfrm>
             <a:off x="3794760" y="4937760"/>
-            <a:ext cx="2194560" cy="548640"/>
+            <a:ext cx="2194560" cy="594359"/>
           </a:xfrm>
           <a:prstGeom prst="rect">
             <a:avLst/>
@@ -7472,7 +7472,7 @@
           <a:p>
             <a:pPr>
               <a:lnSpc>
-                <a:spcPct val="100000"/>
+                <a:spcPct val="90000"/>
               </a:lnSpc>
               <a:defRPr sz="1100">
                 <a:solidFill>
@@ -7575,7 +7575,7 @@
         <p:spPr>
           <a:xfrm>
             <a:off x="6446520" y="1737360"/>
-            <a:ext cx="274320" cy="548640"/>
+            <a:ext cx="274320" cy="594359"/>
           </a:xfrm>
           <a:prstGeom prst="rect">
             <a:avLst/>
@@ -7610,7 +7610,7 @@
         <p:spPr>
           <a:xfrm>
             <a:off x="6720840" y="1737360"/>
-            <a:ext cx="2194560" cy="548640"/>
+            <a:ext cx="2194560" cy="594359"/>
           </a:xfrm>
           <a:prstGeom prst="rect">
             <a:avLst/>
@@ -7625,7 +7625,7 @@
           <a:p>
             <a:pPr>
               <a:lnSpc>
-                <a:spcPct val="100000"/>
+                <a:spcPct val="90000"/>
               </a:lnSpc>
               <a:defRPr sz="1100">
                 <a:solidFill>
@@ -7648,7 +7648,7 @@
         <p:spPr>
           <a:xfrm>
             <a:off x="6446520" y="2377439"/>
-            <a:ext cx="274320" cy="548640"/>
+            <a:ext cx="274320" cy="594359"/>
           </a:xfrm>
           <a:prstGeom prst="rect">
             <a:avLst/>
@@ -7683,7 +7683,7 @@
         <p:spPr>
           <a:xfrm>
             <a:off x="6720840" y="2377439"/>
-            <a:ext cx="2194560" cy="548640"/>
+            <a:ext cx="2194560" cy="594359"/>
           </a:xfrm>
           <a:prstGeom prst="rect">
             <a:avLst/>
@@ -7698,7 +7698,7 @@
           <a:p>
             <a:pPr>
               <a:lnSpc>
-                <a:spcPct val="100000"/>
+                <a:spcPct val="90000"/>
               </a:lnSpc>
               <a:defRPr sz="1100">
                 <a:solidFill>
@@ -7721,7 +7721,7 @@
         <p:spPr>
           <a:xfrm>
             <a:off x="6446520" y="3017520"/>
-            <a:ext cx="274320" cy="548640"/>
+            <a:ext cx="274320" cy="594359"/>
           </a:xfrm>
           <a:prstGeom prst="rect">
             <a:avLst/>
@@ -7756,7 +7756,7 @@
         <p:spPr>
           <a:xfrm>
             <a:off x="6720840" y="3017520"/>
-            <a:ext cx="2194560" cy="548640"/>
+            <a:ext cx="2194560" cy="594359"/>
           </a:xfrm>
           <a:prstGeom prst="rect">
             <a:avLst/>
@@ -7771,7 +7771,7 @@
           <a:p>
             <a:pPr>
               <a:lnSpc>
-                <a:spcPct val="100000"/>
+                <a:spcPct val="90000"/>
               </a:lnSpc>
               <a:defRPr sz="1100">
                 <a:solidFill>
@@ -7794,7 +7794,7 @@
         <p:spPr>
           <a:xfrm>
             <a:off x="6446520" y="3657599"/>
-            <a:ext cx="274320" cy="548640"/>
+            <a:ext cx="274320" cy="594359"/>
           </a:xfrm>
           <a:prstGeom prst="rect">
             <a:avLst/>
@@ -7829,7 +7829,7 @@
         <p:spPr>
           <a:xfrm>
             <a:off x="6720840" y="3657599"/>
-            <a:ext cx="2194560" cy="548640"/>
+            <a:ext cx="2194560" cy="594359"/>
           </a:xfrm>
           <a:prstGeom prst="rect">
             <a:avLst/>
@@ -7844,7 +7844,7 @@
           <a:p>
             <a:pPr>
               <a:lnSpc>
-                <a:spcPct val="100000"/>
+                <a:spcPct val="90000"/>
               </a:lnSpc>
               <a:defRPr sz="1100">
                 <a:solidFill>
@@ -7867,7 +7867,7 @@
         <p:spPr>
           <a:xfrm>
             <a:off x="6446520" y="4297679"/>
-            <a:ext cx="274320" cy="548640"/>
+            <a:ext cx="274320" cy="594359"/>
           </a:xfrm>
           <a:prstGeom prst="rect">
             <a:avLst/>
@@ -7902,7 +7902,7 @@
         <p:spPr>
           <a:xfrm>
             <a:off x="6720840" y="4297679"/>
-            <a:ext cx="2194560" cy="548640"/>
+            <a:ext cx="2194560" cy="594359"/>
           </a:xfrm>
           <a:prstGeom prst="rect">
             <a:avLst/>
@@ -7917,7 +7917,7 @@
           <a:p>
             <a:pPr>
               <a:lnSpc>
-                <a:spcPct val="100000"/>
+                <a:spcPct val="90000"/>
               </a:lnSpc>
               <a:defRPr sz="1100">
                 <a:solidFill>
@@ -7940,7 +7940,7 @@
         <p:spPr>
           <a:xfrm>
             <a:off x="6446520" y="4937760"/>
-            <a:ext cx="274320" cy="548640"/>
+            <a:ext cx="274320" cy="594359"/>
           </a:xfrm>
           <a:prstGeom prst="rect">
             <a:avLst/>
@@ -7975,7 +7975,7 @@
         <p:spPr>
           <a:xfrm>
             <a:off x="6720840" y="4937760"/>
-            <a:ext cx="2194560" cy="548640"/>
+            <a:ext cx="2194560" cy="594359"/>
           </a:xfrm>
           <a:prstGeom prst="rect">
             <a:avLst/>
@@ -7990,7 +7990,7 @@
           <a:p>
             <a:pPr>
               <a:lnSpc>
-                <a:spcPct val="100000"/>
+                <a:spcPct val="90000"/>
               </a:lnSpc>
               <a:defRPr sz="1100">
                 <a:solidFill>
@@ -8189,7 +8189,7 @@
         <p:spPr>
           <a:xfrm>
             <a:off x="594360" y="1737360"/>
-            <a:ext cx="274320" cy="548640"/>
+            <a:ext cx="274320" cy="594359"/>
           </a:xfrm>
           <a:prstGeom prst="rect">
             <a:avLst/>
@@ -8224,7 +8224,7 @@
         <p:spPr>
           <a:xfrm>
             <a:off x="868680" y="1737360"/>
-            <a:ext cx="2194560" cy="548640"/>
+            <a:ext cx="2194560" cy="594359"/>
           </a:xfrm>
           <a:prstGeom prst="rect">
             <a:avLst/>
@@ -8239,7 +8239,7 @@
           <a:p>
             <a:pPr>
               <a:lnSpc>
-                <a:spcPct val="100000"/>
+                <a:spcPct val="90000"/>
               </a:lnSpc>
               <a:defRPr sz="1100">
                 <a:solidFill>
@@ -8262,7 +8262,7 @@
         <p:spPr>
           <a:xfrm>
             <a:off x="594360" y="2377439"/>
-            <a:ext cx="274320" cy="548640"/>
+            <a:ext cx="274320" cy="594359"/>
           </a:xfrm>
           <a:prstGeom prst="rect">
             <a:avLst/>
@@ -8297,7 +8297,7 @@
         <p:spPr>
           <a:xfrm>
             <a:off x="868680" y="2377439"/>
-            <a:ext cx="2194560" cy="548640"/>
+            <a:ext cx="2194560" cy="594359"/>
           </a:xfrm>
           <a:prstGeom prst="rect">
             <a:avLst/>
@@ -8312,7 +8312,7 @@
           <a:p>
             <a:pPr>
               <a:lnSpc>
-                <a:spcPct val="100000"/>
+                <a:spcPct val="90000"/>
               </a:lnSpc>
               <a:defRPr sz="1100">
                 <a:solidFill>
@@ -8335,7 +8335,7 @@
         <p:spPr>
           <a:xfrm>
             <a:off x="594360" y="3017520"/>
-            <a:ext cx="274320" cy="548640"/>
+            <a:ext cx="274320" cy="594359"/>
           </a:xfrm>
           <a:prstGeom prst="rect">
             <a:avLst/>
@@ -8370,7 +8370,7 @@
         <p:spPr>
           <a:xfrm>
             <a:off x="868680" y="3017520"/>
-            <a:ext cx="2194560" cy="548640"/>
+            <a:ext cx="2194560" cy="594359"/>
           </a:xfrm>
           <a:prstGeom prst="rect">
             <a:avLst/>
@@ -8385,7 +8385,7 @@
           <a:p>
             <a:pPr>
               <a:lnSpc>
-                <a:spcPct val="100000"/>
+                <a:spcPct val="90000"/>
               </a:lnSpc>
               <a:defRPr sz="1100">
                 <a:solidFill>
@@ -8408,7 +8408,7 @@
         <p:spPr>
           <a:xfrm>
             <a:off x="594360" y="3657599"/>
-            <a:ext cx="274320" cy="548640"/>
+            <a:ext cx="274320" cy="594359"/>
           </a:xfrm>
           <a:prstGeom prst="rect">
             <a:avLst/>
@@ -8443,7 +8443,7 @@
         <p:spPr>
           <a:xfrm>
             <a:off x="868680" y="3657599"/>
-            <a:ext cx="2194560" cy="548640"/>
+            <a:ext cx="2194560" cy="594359"/>
           </a:xfrm>
           <a:prstGeom prst="rect">
             <a:avLst/>
@@ -8458,7 +8458,7 @@
           <a:p>
             <a:pPr>
               <a:lnSpc>
-                <a:spcPct val="100000"/>
+                <a:spcPct val="90000"/>
               </a:lnSpc>
               <a:defRPr sz="1100">
                 <a:solidFill>
@@ -8481,7 +8481,7 @@
         <p:spPr>
           <a:xfrm>
             <a:off x="594360" y="4297679"/>
-            <a:ext cx="274320" cy="548640"/>
+            <a:ext cx="274320" cy="594359"/>
           </a:xfrm>
           <a:prstGeom prst="rect">
             <a:avLst/>
@@ -8516,7 +8516,7 @@
         <p:spPr>
           <a:xfrm>
             <a:off x="868680" y="4297679"/>
-            <a:ext cx="2194560" cy="548640"/>
+            <a:ext cx="2194560" cy="594359"/>
           </a:xfrm>
           <a:prstGeom prst="rect">
             <a:avLst/>
@@ -8531,7 +8531,7 @@
           <a:p>
             <a:pPr>
               <a:lnSpc>
-                <a:spcPct val="100000"/>
+                <a:spcPct val="90000"/>
               </a:lnSpc>
               <a:defRPr sz="1100">
                 <a:solidFill>
@@ -8554,7 +8554,7 @@
         <p:spPr>
           <a:xfrm>
             <a:off x="594360" y="4937760"/>
-            <a:ext cx="274320" cy="548640"/>
+            <a:ext cx="274320" cy="594359"/>
           </a:xfrm>
           <a:prstGeom prst="rect">
             <a:avLst/>
@@ -8589,7 +8589,7 @@
         <p:spPr>
           <a:xfrm>
             <a:off x="868680" y="4937760"/>
-            <a:ext cx="2194560" cy="548640"/>
+            <a:ext cx="2194560" cy="594359"/>
           </a:xfrm>
           <a:prstGeom prst="rect">
             <a:avLst/>
@@ -8604,7 +8604,7 @@
           <a:p>
             <a:pPr>
               <a:lnSpc>
-                <a:spcPct val="100000"/>
+                <a:spcPct val="90000"/>
               </a:lnSpc>
               <a:defRPr sz="1100">
                 <a:solidFill>
@@ -8707,7 +8707,7 @@
         <p:spPr>
           <a:xfrm>
             <a:off x="3520440" y="1737360"/>
-            <a:ext cx="274320" cy="548640"/>
+            <a:ext cx="274320" cy="594359"/>
           </a:xfrm>
           <a:prstGeom prst="rect">
             <a:avLst/>
@@ -8742,7 +8742,7 @@
         <p:spPr>
           <a:xfrm>
             <a:off x="3794760" y="1737360"/>
-            <a:ext cx="2194560" cy="548640"/>
+            <a:ext cx="2194560" cy="594359"/>
           </a:xfrm>
           <a:prstGeom prst="rect">
             <a:avLst/>
@@ -8757,7 +8757,7 @@
           <a:p>
             <a:pPr>
               <a:lnSpc>
-                <a:spcPct val="100000"/>
+                <a:spcPct val="90000"/>
               </a:lnSpc>
               <a:defRPr sz="1100">
                 <a:solidFill>
@@ -8780,7 +8780,7 @@
         <p:spPr>
           <a:xfrm>
             <a:off x="3520440" y="2377439"/>
-            <a:ext cx="274320" cy="548640"/>
+            <a:ext cx="274320" cy="594359"/>
           </a:xfrm>
           <a:prstGeom prst="rect">
             <a:avLst/>
@@ -8815,7 +8815,7 @@
         <p:spPr>
           <a:xfrm>
             <a:off x="3794760" y="2377439"/>
-            <a:ext cx="2194560" cy="548640"/>
+            <a:ext cx="2194560" cy="594359"/>
           </a:xfrm>
           <a:prstGeom prst="rect">
             <a:avLst/>
@@ -8830,7 +8830,7 @@
           <a:p>
             <a:pPr>
               <a:lnSpc>
-                <a:spcPct val="100000"/>
+                <a:spcPct val="90000"/>
               </a:lnSpc>
               <a:defRPr sz="1100">
                 <a:solidFill>
@@ -8853,7 +8853,7 @@
         <p:spPr>
           <a:xfrm>
             <a:off x="3520440" y="3017520"/>
-            <a:ext cx="274320" cy="548640"/>
+            <a:ext cx="274320" cy="594359"/>
           </a:xfrm>
           <a:prstGeom prst="rect">
             <a:avLst/>
@@ -8888,7 +8888,7 @@
         <p:spPr>
           <a:xfrm>
             <a:off x="3794760" y="3017520"/>
-            <a:ext cx="2194560" cy="548640"/>
+            <a:ext cx="2194560" cy="594359"/>
           </a:xfrm>
           <a:prstGeom prst="rect">
             <a:avLst/>
@@ -8903,7 +8903,7 @@
           <a:p>
             <a:pPr>
               <a:lnSpc>
-                <a:spcPct val="100000"/>
+                <a:spcPct val="90000"/>
               </a:lnSpc>
               <a:defRPr sz="1100">
                 <a:solidFill>
@@ -8926,7 +8926,7 @@
         <p:spPr>
           <a:xfrm>
             <a:off x="3520440" y="3657599"/>
-            <a:ext cx="274320" cy="548640"/>
+            <a:ext cx="274320" cy="594359"/>
           </a:xfrm>
           <a:prstGeom prst="rect">
             <a:avLst/>
@@ -8961,7 +8961,7 @@
         <p:spPr>
           <a:xfrm>
             <a:off x="3794760" y="3657599"/>
-            <a:ext cx="2194560" cy="548640"/>
+            <a:ext cx="2194560" cy="594359"/>
           </a:xfrm>
           <a:prstGeom prst="rect">
             <a:avLst/>
@@ -8976,7 +8976,7 @@
           <a:p>
             <a:pPr>
               <a:lnSpc>
-                <a:spcPct val="100000"/>
+                <a:spcPct val="90000"/>
               </a:lnSpc>
               <a:defRPr sz="1100">
                 <a:solidFill>
@@ -8999,7 +8999,7 @@
         <p:spPr>
           <a:xfrm>
             <a:off x="3520440" y="4297679"/>
-            <a:ext cx="274320" cy="548640"/>
+            <a:ext cx="274320" cy="594359"/>
           </a:xfrm>
           <a:prstGeom prst="rect">
             <a:avLst/>
@@ -9034,7 +9034,7 @@
         <p:spPr>
           <a:xfrm>
             <a:off x="3794760" y="4297679"/>
-            <a:ext cx="2194560" cy="548640"/>
+            <a:ext cx="2194560" cy="594359"/>
           </a:xfrm>
           <a:prstGeom prst="rect">
             <a:avLst/>
@@ -9049,7 +9049,7 @@
           <a:p>
             <a:pPr>
               <a:lnSpc>
-                <a:spcPct val="100000"/>
+                <a:spcPct val="90000"/>
               </a:lnSpc>
               <a:defRPr sz="1100">
                 <a:solidFill>
@@ -9072,7 +9072,7 @@
         <p:spPr>
           <a:xfrm>
             <a:off x="3520440" y="4937760"/>
-            <a:ext cx="274320" cy="548640"/>
+            <a:ext cx="274320" cy="594359"/>
           </a:xfrm>
           <a:prstGeom prst="rect">
             <a:avLst/>
@@ -9107,7 +9107,7 @@
         <p:spPr>
           <a:xfrm>
             <a:off x="3794760" y="4937760"/>
-            <a:ext cx="2194560" cy="548640"/>
+            <a:ext cx="2194560" cy="594359"/>
           </a:xfrm>
           <a:prstGeom prst="rect">
             <a:avLst/>
@@ -9122,7 +9122,7 @@
           <a:p>
             <a:pPr>
               <a:lnSpc>
-                <a:spcPct val="100000"/>
+                <a:spcPct val="90000"/>
               </a:lnSpc>
               <a:defRPr sz="1100">
                 <a:solidFill>
@@ -9225,7 +9225,7 @@
         <p:spPr>
           <a:xfrm>
             <a:off x="6446520" y="1737360"/>
-            <a:ext cx="274320" cy="548640"/>
+            <a:ext cx="274320" cy="594359"/>
           </a:xfrm>
           <a:prstGeom prst="rect">
             <a:avLst/>
@@ -9260,7 +9260,7 @@
         <p:spPr>
           <a:xfrm>
             <a:off x="6720840" y="1737360"/>
-            <a:ext cx="2194560" cy="548640"/>
+            <a:ext cx="2194560" cy="594359"/>
           </a:xfrm>
           <a:prstGeom prst="rect">
             <a:avLst/>
@@ -9275,7 +9275,7 @@
           <a:p>
             <a:pPr>
               <a:lnSpc>
-                <a:spcPct val="100000"/>
+                <a:spcPct val="90000"/>
               </a:lnSpc>
               <a:defRPr sz="1100">
                 <a:solidFill>
@@ -9298,7 +9298,7 @@
         <p:spPr>
           <a:xfrm>
             <a:off x="6446520" y="2377439"/>
-            <a:ext cx="274320" cy="548640"/>
+            <a:ext cx="274320" cy="594359"/>
           </a:xfrm>
           <a:prstGeom prst="rect">
             <a:avLst/>
@@ -9333,7 +9333,7 @@
         <p:spPr>
           <a:xfrm>
             <a:off x="6720840" y="2377439"/>
-            <a:ext cx="2194560" cy="548640"/>
+            <a:ext cx="2194560" cy="594359"/>
           </a:xfrm>
           <a:prstGeom prst="rect">
             <a:avLst/>
@@ -9348,7 +9348,7 @@
           <a:p>
             <a:pPr>
               <a:lnSpc>
-                <a:spcPct val="100000"/>
+                <a:spcPct val="90000"/>
               </a:lnSpc>
               <a:defRPr sz="1100">
                 <a:solidFill>
@@ -9371,7 +9371,7 @@
         <p:spPr>
           <a:xfrm>
             <a:off x="6446520" y="3017520"/>
-            <a:ext cx="274320" cy="548640"/>
+            <a:ext cx="274320" cy="594359"/>
           </a:xfrm>
           <a:prstGeom prst="rect">
             <a:avLst/>
@@ -9406,7 +9406,7 @@
         <p:spPr>
           <a:xfrm>
             <a:off x="6720840" y="3017520"/>
-            <a:ext cx="2194560" cy="548640"/>
+            <a:ext cx="2194560" cy="594359"/>
           </a:xfrm>
           <a:prstGeom prst="rect">
             <a:avLst/>
@@ -9421,7 +9421,7 @@
           <a:p>
             <a:pPr>
               <a:lnSpc>
-                <a:spcPct val="100000"/>
+                <a:spcPct val="90000"/>
               </a:lnSpc>
               <a:defRPr sz="1100">
                 <a:solidFill>
@@ -9444,7 +9444,7 @@
         <p:spPr>
           <a:xfrm>
             <a:off x="6446520" y="3657599"/>
-            <a:ext cx="274320" cy="548640"/>
+            <a:ext cx="274320" cy="594359"/>
           </a:xfrm>
           <a:prstGeom prst="rect">
             <a:avLst/>
@@ -9479,7 +9479,7 @@
         <p:spPr>
           <a:xfrm>
             <a:off x="6720840" y="3657599"/>
-            <a:ext cx="2194560" cy="548640"/>
+            <a:ext cx="2194560" cy="594359"/>
           </a:xfrm>
           <a:prstGeom prst="rect">
             <a:avLst/>
@@ -9494,7 +9494,7 @@
           <a:p>
             <a:pPr>
               <a:lnSpc>
-                <a:spcPct val="100000"/>
+                <a:spcPct val="90000"/>
               </a:lnSpc>
               <a:defRPr sz="1100">
                 <a:solidFill>
@@ -9517,7 +9517,7 @@
         <p:spPr>
           <a:xfrm>
             <a:off x="6446520" y="4297679"/>
-            <a:ext cx="274320" cy="548640"/>
+            <a:ext cx="274320" cy="594359"/>
           </a:xfrm>
           <a:prstGeom prst="rect">
             <a:avLst/>
@@ -9552,7 +9552,7 @@
         <p:spPr>
           <a:xfrm>
             <a:off x="6720840" y="4297679"/>
-            <a:ext cx="2194560" cy="548640"/>
+            <a:ext cx="2194560" cy="594359"/>
           </a:xfrm>
           <a:prstGeom prst="rect">
             <a:avLst/>
@@ -9567,7 +9567,7 @@
           <a:p>
             <a:pPr>
               <a:lnSpc>
-                <a:spcPct val="100000"/>
+                <a:spcPct val="90000"/>
               </a:lnSpc>
               <a:defRPr sz="1100">
                 <a:solidFill>
@@ -9590,7 +9590,7 @@
         <p:spPr>
           <a:xfrm>
             <a:off x="6446520" y="4937760"/>
-            <a:ext cx="274320" cy="548640"/>
+            <a:ext cx="274320" cy="594359"/>
           </a:xfrm>
           <a:prstGeom prst="rect">
             <a:avLst/>
@@ -9625,7 +9625,7 @@
         <p:spPr>
           <a:xfrm>
             <a:off x="6720840" y="4937760"/>
-            <a:ext cx="2194560" cy="548640"/>
+            <a:ext cx="2194560" cy="594359"/>
           </a:xfrm>
           <a:prstGeom prst="rect">
             <a:avLst/>
@@ -9640,7 +9640,7 @@
           <a:p>
             <a:pPr>
               <a:lnSpc>
-                <a:spcPct val="100000"/>
+                <a:spcPct val="90000"/>
               </a:lnSpc>
               <a:defRPr sz="1100">
                 <a:solidFill>
@@ -9839,7 +9839,7 @@
         <p:spPr>
           <a:xfrm>
             <a:off x="594360" y="1737360"/>
-            <a:ext cx="274320" cy="548640"/>
+            <a:ext cx="274320" cy="594359"/>
           </a:xfrm>
           <a:prstGeom prst="rect">
             <a:avLst/>
@@ -9874,7 +9874,7 @@
         <p:spPr>
           <a:xfrm>
             <a:off x="868680" y="1737360"/>
-            <a:ext cx="2194560" cy="548640"/>
+            <a:ext cx="2194560" cy="594359"/>
           </a:xfrm>
           <a:prstGeom prst="rect">
             <a:avLst/>
@@ -9889,7 +9889,7 @@
           <a:p>
             <a:pPr>
               <a:lnSpc>
-                <a:spcPct val="100000"/>
+                <a:spcPct val="90000"/>
               </a:lnSpc>
               <a:defRPr sz="1100">
                 <a:solidFill>
@@ -9912,7 +9912,7 @@
         <p:spPr>
           <a:xfrm>
             <a:off x="594360" y="2377439"/>
-            <a:ext cx="274320" cy="548640"/>
+            <a:ext cx="274320" cy="594359"/>
           </a:xfrm>
           <a:prstGeom prst="rect">
             <a:avLst/>
@@ -9947,7 +9947,7 @@
         <p:spPr>
           <a:xfrm>
             <a:off x="868680" y="2377439"/>
-            <a:ext cx="2194560" cy="548640"/>
+            <a:ext cx="2194560" cy="594359"/>
           </a:xfrm>
           <a:prstGeom prst="rect">
             <a:avLst/>
@@ -9962,7 +9962,7 @@
           <a:p>
             <a:pPr>
               <a:lnSpc>
-                <a:spcPct val="100000"/>
+                <a:spcPct val="90000"/>
               </a:lnSpc>
               <a:defRPr sz="1100">
                 <a:solidFill>
@@ -9985,7 +9985,7 @@
         <p:spPr>
           <a:xfrm>
             <a:off x="594360" y="3017520"/>
-            <a:ext cx="274320" cy="548640"/>
+            <a:ext cx="274320" cy="594359"/>
           </a:xfrm>
           <a:prstGeom prst="rect">
             <a:avLst/>
@@ -10020,7 +10020,7 @@
         <p:spPr>
           <a:xfrm>
             <a:off x="868680" y="3017520"/>
-            <a:ext cx="2194560" cy="548640"/>
+            <a:ext cx="2194560" cy="594359"/>
           </a:xfrm>
           <a:prstGeom prst="rect">
             <a:avLst/>
@@ -10035,7 +10035,7 @@
           <a:p>
             <a:pPr>
               <a:lnSpc>
-                <a:spcPct val="100000"/>
+                <a:spcPct val="90000"/>
               </a:lnSpc>
               <a:defRPr sz="1100">
                 <a:solidFill>
@@ -10058,7 +10058,7 @@
         <p:spPr>
           <a:xfrm>
             <a:off x="594360" y="3657599"/>
-            <a:ext cx="274320" cy="548640"/>
+            <a:ext cx="274320" cy="594359"/>
           </a:xfrm>
           <a:prstGeom prst="rect">
             <a:avLst/>
@@ -10093,7 +10093,7 @@
         <p:spPr>
           <a:xfrm>
             <a:off x="868680" y="3657599"/>
-            <a:ext cx="2194560" cy="548640"/>
+            <a:ext cx="2194560" cy="594359"/>
           </a:xfrm>
           <a:prstGeom prst="rect">
             <a:avLst/>
@@ -10108,7 +10108,7 @@
           <a:p>
             <a:pPr>
               <a:lnSpc>
-                <a:spcPct val="100000"/>
+                <a:spcPct val="90000"/>
               </a:lnSpc>
               <a:defRPr sz="1100">
                 <a:solidFill>
@@ -10131,7 +10131,7 @@
         <p:spPr>
           <a:xfrm>
             <a:off x="594360" y="4297679"/>
-            <a:ext cx="274320" cy="548640"/>
+            <a:ext cx="274320" cy="594359"/>
           </a:xfrm>
           <a:prstGeom prst="rect">
             <a:avLst/>
@@ -10166,7 +10166,7 @@
         <p:spPr>
           <a:xfrm>
             <a:off x="868680" y="4297679"/>
-            <a:ext cx="2194560" cy="548640"/>
+            <a:ext cx="2194560" cy="594359"/>
           </a:xfrm>
           <a:prstGeom prst="rect">
             <a:avLst/>
@@ -10181,7 +10181,7 @@
           <a:p>
             <a:pPr>
               <a:lnSpc>
-                <a:spcPct val="100000"/>
+                <a:spcPct val="90000"/>
               </a:lnSpc>
               <a:defRPr sz="1100">
                 <a:solidFill>
@@ -10204,7 +10204,7 @@
         <p:spPr>
           <a:xfrm>
             <a:off x="594360" y="4937760"/>
-            <a:ext cx="274320" cy="548640"/>
+            <a:ext cx="274320" cy="594359"/>
           </a:xfrm>
           <a:prstGeom prst="rect">
             <a:avLst/>
@@ -10239,7 +10239,7 @@
         <p:spPr>
           <a:xfrm>
             <a:off x="868680" y="4937760"/>
-            <a:ext cx="2194560" cy="548640"/>
+            <a:ext cx="2194560" cy="594359"/>
           </a:xfrm>
           <a:prstGeom prst="rect">
             <a:avLst/>
@@ -10254,7 +10254,7 @@
           <a:p>
             <a:pPr>
               <a:lnSpc>
-                <a:spcPct val="100000"/>
+                <a:spcPct val="90000"/>
               </a:lnSpc>
               <a:defRPr sz="1100">
                 <a:solidFill>
@@ -10357,7 +10357,7 @@
         <p:spPr>
           <a:xfrm>
             <a:off x="3520440" y="1737360"/>
-            <a:ext cx="274320" cy="548640"/>
+            <a:ext cx="274320" cy="594359"/>
           </a:xfrm>
           <a:prstGeom prst="rect">
             <a:avLst/>
@@ -10392,7 +10392,7 @@
         <p:spPr>
           <a:xfrm>
             <a:off x="3794760" y="1737360"/>
-            <a:ext cx="2194560" cy="548640"/>
+            <a:ext cx="2194560" cy="594359"/>
           </a:xfrm>
           <a:prstGeom prst="rect">
             <a:avLst/>
@@ -10407,7 +10407,7 @@
           <a:p>
             <a:pPr>
               <a:lnSpc>
-                <a:spcPct val="100000"/>
+                <a:spcPct val="90000"/>
               </a:lnSpc>
               <a:defRPr sz="1100">
                 <a:solidFill>
@@ -10430,7 +10430,7 @@
         <p:spPr>
           <a:xfrm>
             <a:off x="3520440" y="2377439"/>
-            <a:ext cx="274320" cy="548640"/>
+            <a:ext cx="274320" cy="594359"/>
           </a:xfrm>
           <a:prstGeom prst="rect">
             <a:avLst/>
@@ -10465,7 +10465,7 @@
         <p:spPr>
           <a:xfrm>
             <a:off x="3794760" y="2377439"/>
-            <a:ext cx="2194560" cy="548640"/>
+            <a:ext cx="2194560" cy="594359"/>
           </a:xfrm>
           <a:prstGeom prst="rect">
             <a:avLst/>
@@ -10480,7 +10480,7 @@
           <a:p>
             <a:pPr>
               <a:lnSpc>
-                <a:spcPct val="100000"/>
+                <a:spcPct val="90000"/>
               </a:lnSpc>
               <a:defRPr sz="1100">
                 <a:solidFill>
@@ -10503,7 +10503,7 @@
         <p:spPr>
           <a:xfrm>
             <a:off x="3520440" y="3017520"/>
-            <a:ext cx="274320" cy="548640"/>
+            <a:ext cx="274320" cy="594359"/>
           </a:xfrm>
           <a:prstGeom prst="rect">
             <a:avLst/>
@@ -10538,7 +10538,7 @@
         <p:spPr>
           <a:xfrm>
             <a:off x="3794760" y="3017520"/>
-            <a:ext cx="2194560" cy="548640"/>
+            <a:ext cx="2194560" cy="594359"/>
           </a:xfrm>
           <a:prstGeom prst="rect">
             <a:avLst/>
@@ -10553,7 +10553,7 @@
           <a:p>
             <a:pPr>
               <a:lnSpc>
-                <a:spcPct val="100000"/>
+                <a:spcPct val="90000"/>
               </a:lnSpc>
               <a:defRPr sz="1100">
                 <a:solidFill>
@@ -10576,7 +10576,7 @@
         <p:spPr>
           <a:xfrm>
             <a:off x="3520440" y="3657599"/>
-            <a:ext cx="274320" cy="548640"/>
+            <a:ext cx="274320" cy="594359"/>
           </a:xfrm>
           <a:prstGeom prst="rect">
             <a:avLst/>
@@ -10611,7 +10611,7 @@
         <p:spPr>
           <a:xfrm>
             <a:off x="3794760" y="3657599"/>
-            <a:ext cx="2194560" cy="548640"/>
+            <a:ext cx="2194560" cy="594359"/>
           </a:xfrm>
           <a:prstGeom prst="rect">
             <a:avLst/>
@@ -10626,7 +10626,7 @@
           <a:p>
             <a:pPr>
               <a:lnSpc>
-                <a:spcPct val="100000"/>
+                <a:spcPct val="90000"/>
               </a:lnSpc>
               <a:defRPr sz="1100">
                 <a:solidFill>
@@ -10649,7 +10649,7 @@
         <p:spPr>
           <a:xfrm>
             <a:off x="3520440" y="4297679"/>
-            <a:ext cx="274320" cy="548640"/>
+            <a:ext cx="274320" cy="594359"/>
           </a:xfrm>
           <a:prstGeom prst="rect">
             <a:avLst/>
@@ -10684,7 +10684,7 @@
         <p:spPr>
           <a:xfrm>
             <a:off x="3794760" y="4297679"/>
-            <a:ext cx="2194560" cy="548640"/>
+            <a:ext cx="2194560" cy="594359"/>
           </a:xfrm>
           <a:prstGeom prst="rect">
             <a:avLst/>
@@ -10699,7 +10699,7 @@
           <a:p>
             <a:pPr>
               <a:lnSpc>
-                <a:spcPct val="100000"/>
+                <a:spcPct val="90000"/>
               </a:lnSpc>
               <a:defRPr sz="1100">
                 <a:solidFill>
@@ -10722,7 +10722,7 @@
         <p:spPr>
           <a:xfrm>
             <a:off x="3520440" y="4937760"/>
-            <a:ext cx="274320" cy="548640"/>
+            <a:ext cx="274320" cy="594359"/>
           </a:xfrm>
           <a:prstGeom prst="rect">
             <a:avLst/>
@@ -10757,7 +10757,7 @@
         <p:spPr>
           <a:xfrm>
             <a:off x="3794760" y="4937760"/>
-            <a:ext cx="2194560" cy="548640"/>
+            <a:ext cx="2194560" cy="594359"/>
           </a:xfrm>
           <a:prstGeom prst="rect">
             <a:avLst/>
@@ -10772,7 +10772,7 @@
           <a:p>
             <a:pPr>
               <a:lnSpc>
-                <a:spcPct val="100000"/>
+                <a:spcPct val="90000"/>
               </a:lnSpc>
               <a:defRPr sz="1100">
                 <a:solidFill>
@@ -10875,7 +10875,7 @@
         <p:spPr>
           <a:xfrm>
             <a:off x="6446520" y="1737360"/>
-            <a:ext cx="274320" cy="548640"/>
+            <a:ext cx="274320" cy="594359"/>
           </a:xfrm>
           <a:prstGeom prst="rect">
             <a:avLst/>
@@ -10910,7 +10910,7 @@
         <p:spPr>
           <a:xfrm>
             <a:off x="6720840" y="1737360"/>
-            <a:ext cx="2194560" cy="548640"/>
+            <a:ext cx="2194560" cy="594359"/>
           </a:xfrm>
           <a:prstGeom prst="rect">
             <a:avLst/>
@@ -10925,7 +10925,7 @@
           <a:p>
             <a:pPr>
               <a:lnSpc>
-                <a:spcPct val="100000"/>
+                <a:spcPct val="90000"/>
               </a:lnSpc>
               <a:defRPr sz="1100">
                 <a:solidFill>
@@ -10948,7 +10948,7 @@
         <p:spPr>
           <a:xfrm>
             <a:off x="6446520" y="2377439"/>
-            <a:ext cx="274320" cy="548640"/>
+            <a:ext cx="274320" cy="594359"/>
           </a:xfrm>
           <a:prstGeom prst="rect">
             <a:avLst/>
@@ -10983,7 +10983,7 @@
         <p:spPr>
           <a:xfrm>
             <a:off x="6720840" y="2377439"/>
-            <a:ext cx="2194560" cy="548640"/>
+            <a:ext cx="2194560" cy="594359"/>
           </a:xfrm>
           <a:prstGeom prst="rect">
             <a:avLst/>
@@ -10998,7 +10998,7 @@
           <a:p>
             <a:pPr>
               <a:lnSpc>
-                <a:spcPct val="100000"/>
+                <a:spcPct val="90000"/>
               </a:lnSpc>
               <a:defRPr sz="1100">
                 <a:solidFill>
@@ -11021,7 +11021,7 @@
         <p:spPr>
           <a:xfrm>
             <a:off x="6446520" y="3017520"/>
-            <a:ext cx="274320" cy="548640"/>
+            <a:ext cx="274320" cy="594359"/>
           </a:xfrm>
           <a:prstGeom prst="rect">
             <a:avLst/>
@@ -11056,7 +11056,7 @@
         <p:spPr>
           <a:xfrm>
             <a:off x="6720840" y="3017520"/>
-            <a:ext cx="2194560" cy="548640"/>
+            <a:ext cx="2194560" cy="594359"/>
           </a:xfrm>
           <a:prstGeom prst="rect">
             <a:avLst/>
@@ -11071,7 +11071,7 @@
           <a:p>
             <a:pPr>
               <a:lnSpc>
-                <a:spcPct val="100000"/>
+                <a:spcPct val="90000"/>
               </a:lnSpc>
               <a:defRPr sz="1100">
                 <a:solidFill>
@@ -11094,7 +11094,7 @@
         <p:spPr>
           <a:xfrm>
             <a:off x="6446520" y="3657599"/>
-            <a:ext cx="274320" cy="548640"/>
+            <a:ext cx="274320" cy="594359"/>
           </a:xfrm>
           <a:prstGeom prst="rect">
             <a:avLst/>
@@ -11129,7 +11129,7 @@
         <p:spPr>
           <a:xfrm>
             <a:off x="6720840" y="3657599"/>
-            <a:ext cx="2194560" cy="548640"/>
+            <a:ext cx="2194560" cy="594359"/>
           </a:xfrm>
           <a:prstGeom prst="rect">
             <a:avLst/>
@@ -11144,7 +11144,7 @@
           <a:p>
             <a:pPr>
               <a:lnSpc>
-                <a:spcPct val="100000"/>
+                <a:spcPct val="90000"/>
               </a:lnSpc>
               <a:defRPr sz="1100">
                 <a:solidFill>
@@ -11167,7 +11167,7 @@
         <p:spPr>
           <a:xfrm>
             <a:off x="6446520" y="4297679"/>
-            <a:ext cx="274320" cy="548640"/>
+            <a:ext cx="274320" cy="594359"/>
           </a:xfrm>
           <a:prstGeom prst="rect">
             <a:avLst/>
@@ -11202,7 +11202,7 @@
         <p:spPr>
           <a:xfrm>
             <a:off x="6720840" y="4297679"/>
-            <a:ext cx="2194560" cy="548640"/>
+            <a:ext cx="2194560" cy="594359"/>
           </a:xfrm>
           <a:prstGeom prst="rect">
             <a:avLst/>
@@ -11217,7 +11217,7 @@
           <a:p>
             <a:pPr>
               <a:lnSpc>
-                <a:spcPct val="100000"/>
+                <a:spcPct val="90000"/>
               </a:lnSpc>
               <a:defRPr sz="1100">
                 <a:solidFill>
@@ -11240,7 +11240,7 @@
         <p:spPr>
           <a:xfrm>
             <a:off x="6446520" y="4937760"/>
-            <a:ext cx="274320" cy="548640"/>
+            <a:ext cx="274320" cy="594359"/>
           </a:xfrm>
           <a:prstGeom prst="rect">
             <a:avLst/>
@@ -11275,7 +11275,7 @@
         <p:spPr>
           <a:xfrm>
             <a:off x="6720840" y="4937760"/>
-            <a:ext cx="2194560" cy="548640"/>
+            <a:ext cx="2194560" cy="594359"/>
           </a:xfrm>
           <a:prstGeom prst="rect">
             <a:avLst/>
@@ -11290,7 +11290,7 @@
           <a:p>
             <a:pPr>
               <a:lnSpc>
-                <a:spcPct val="100000"/>
+                <a:spcPct val="90000"/>
               </a:lnSpc>
               <a:defRPr sz="1100">
                 <a:solidFill>
@@ -11489,7 +11489,7 @@
         <p:spPr>
           <a:xfrm>
             <a:off x="594360" y="1737360"/>
-            <a:ext cx="274320" cy="548640"/>
+            <a:ext cx="274320" cy="594359"/>
           </a:xfrm>
           <a:prstGeom prst="rect">
             <a:avLst/>
@@ -11524,7 +11524,7 @@
         <p:spPr>
           <a:xfrm>
             <a:off x="868680" y="1737360"/>
-            <a:ext cx="2194560" cy="548640"/>
+            <a:ext cx="2194560" cy="594359"/>
           </a:xfrm>
           <a:prstGeom prst="rect">
             <a:avLst/>
@@ -11539,7 +11539,7 @@
           <a:p>
             <a:pPr>
               <a:lnSpc>
-                <a:spcPct val="100000"/>
+                <a:spcPct val="90000"/>
               </a:lnSpc>
               <a:defRPr sz="1100">
                 <a:solidFill>
@@ -11562,7 +11562,7 @@
         <p:spPr>
           <a:xfrm>
             <a:off x="594360" y="2377439"/>
-            <a:ext cx="274320" cy="548640"/>
+            <a:ext cx="274320" cy="594359"/>
           </a:xfrm>
           <a:prstGeom prst="rect">
             <a:avLst/>
@@ -11597,7 +11597,7 @@
         <p:spPr>
           <a:xfrm>
             <a:off x="868680" y="2377439"/>
-            <a:ext cx="2194560" cy="548640"/>
+            <a:ext cx="2194560" cy="594359"/>
           </a:xfrm>
           <a:prstGeom prst="rect">
             <a:avLst/>
@@ -11612,7 +11612,7 @@
           <a:p>
             <a:pPr>
               <a:lnSpc>
-                <a:spcPct val="100000"/>
+                <a:spcPct val="90000"/>
               </a:lnSpc>
               <a:defRPr sz="1100">
                 <a:solidFill>
@@ -11635,7 +11635,7 @@
         <p:spPr>
           <a:xfrm>
             <a:off x="594360" y="3017520"/>
-            <a:ext cx="274320" cy="548640"/>
+            <a:ext cx="274320" cy="594359"/>
           </a:xfrm>
           <a:prstGeom prst="rect">
             <a:avLst/>
@@ -11670,7 +11670,7 @@
         <p:spPr>
           <a:xfrm>
             <a:off x="868680" y="3017520"/>
-            <a:ext cx="2194560" cy="548640"/>
+            <a:ext cx="2194560" cy="594359"/>
           </a:xfrm>
           <a:prstGeom prst="rect">
             <a:avLst/>
@@ -11685,7 +11685,7 @@
           <a:p>
             <a:pPr>
               <a:lnSpc>
-                <a:spcPct val="100000"/>
+                <a:spcPct val="90000"/>
               </a:lnSpc>
               <a:defRPr sz="1100">
                 <a:solidFill>
@@ -11708,7 +11708,7 @@
         <p:spPr>
           <a:xfrm>
             <a:off x="594360" y="3657599"/>
-            <a:ext cx="274320" cy="548640"/>
+            <a:ext cx="274320" cy="594359"/>
           </a:xfrm>
           <a:prstGeom prst="rect">
             <a:avLst/>
@@ -11743,7 +11743,7 @@
         <p:spPr>
           <a:xfrm>
             <a:off x="868680" y="3657599"/>
-            <a:ext cx="2194560" cy="548640"/>
+            <a:ext cx="2194560" cy="594359"/>
           </a:xfrm>
           <a:prstGeom prst="rect">
             <a:avLst/>
@@ -11758,7 +11758,7 @@
           <a:p>
             <a:pPr>
               <a:lnSpc>
-                <a:spcPct val="100000"/>
+                <a:spcPct val="90000"/>
               </a:lnSpc>
               <a:defRPr sz="1100">
                 <a:solidFill>
@@ -11781,7 +11781,7 @@
         <p:spPr>
           <a:xfrm>
             <a:off x="594360" y="4297679"/>
-            <a:ext cx="274320" cy="548640"/>
+            <a:ext cx="274320" cy="594359"/>
           </a:xfrm>
           <a:prstGeom prst="rect">
             <a:avLst/>
@@ -11816,7 +11816,7 @@
         <p:spPr>
           <a:xfrm>
             <a:off x="868680" y="4297679"/>
-            <a:ext cx="2194560" cy="548640"/>
+            <a:ext cx="2194560" cy="594359"/>
           </a:xfrm>
           <a:prstGeom prst="rect">
             <a:avLst/>
@@ -11831,7 +11831,7 @@
           <a:p>
             <a:pPr>
               <a:lnSpc>
-                <a:spcPct val="100000"/>
+                <a:spcPct val="90000"/>
               </a:lnSpc>
               <a:defRPr sz="1100">
                 <a:solidFill>
@@ -11854,7 +11854,7 @@
         <p:spPr>
           <a:xfrm>
             <a:off x="594360" y="4937760"/>
-            <a:ext cx="274320" cy="548640"/>
+            <a:ext cx="274320" cy="594359"/>
           </a:xfrm>
           <a:prstGeom prst="rect">
             <a:avLst/>
@@ -11889,7 +11889,7 @@
         <p:spPr>
           <a:xfrm>
             <a:off x="868680" y="4937760"/>
-            <a:ext cx="2194560" cy="548640"/>
+            <a:ext cx="2194560" cy="594359"/>
           </a:xfrm>
           <a:prstGeom prst="rect">
             <a:avLst/>
@@ -11904,7 +11904,7 @@
           <a:p>
             <a:pPr>
               <a:lnSpc>
-                <a:spcPct val="100000"/>
+                <a:spcPct val="90000"/>
               </a:lnSpc>
               <a:defRPr sz="1100">
                 <a:solidFill>
@@ -12007,7 +12007,7 @@
         <p:spPr>
           <a:xfrm>
             <a:off x="3520440" y="1737360"/>
-            <a:ext cx="274320" cy="548640"/>
+            <a:ext cx="274320" cy="594359"/>
           </a:xfrm>
           <a:prstGeom prst="rect">
             <a:avLst/>
@@ -12042,7 +12042,7 @@
         <p:spPr>
           <a:xfrm>
             <a:off x="3794760" y="1737360"/>
-            <a:ext cx="2194560" cy="548640"/>
+            <a:ext cx="2194560" cy="594359"/>
           </a:xfrm>
           <a:prstGeom prst="rect">
             <a:avLst/>
@@ -12057,7 +12057,7 @@
           <a:p>
             <a:pPr>
               <a:lnSpc>
-                <a:spcPct val="100000"/>
+                <a:spcPct val="90000"/>
               </a:lnSpc>
               <a:defRPr sz="1100">
                 <a:solidFill>
@@ -12080,7 +12080,7 @@
         <p:spPr>
           <a:xfrm>
             <a:off x="3520440" y="2377439"/>
-            <a:ext cx="274320" cy="548640"/>
+            <a:ext cx="274320" cy="594359"/>
           </a:xfrm>
           <a:prstGeom prst="rect">
             <a:avLst/>
@@ -12115,7 +12115,7 @@
         <p:spPr>
           <a:xfrm>
             <a:off x="3794760" y="2377439"/>
-            <a:ext cx="2194560" cy="548640"/>
+            <a:ext cx="2194560" cy="594359"/>
           </a:xfrm>
           <a:prstGeom prst="rect">
             <a:avLst/>
@@ -12130,7 +12130,7 @@
           <a:p>
             <a:pPr>
               <a:lnSpc>
-                <a:spcPct val="100000"/>
+                <a:spcPct val="90000"/>
               </a:lnSpc>
               <a:defRPr sz="1100">
                 <a:solidFill>
@@ -12153,7 +12153,7 @@
         <p:spPr>
           <a:xfrm>
             <a:off x="3520440" y="3017520"/>
-            <a:ext cx="274320" cy="548640"/>
+            <a:ext cx="274320" cy="594359"/>
           </a:xfrm>
           <a:prstGeom prst="rect">
             <a:avLst/>
@@ -12188,7 +12188,7 @@
         <p:spPr>
           <a:xfrm>
             <a:off x="3794760" y="3017520"/>
-            <a:ext cx="2194560" cy="548640"/>
+            <a:ext cx="2194560" cy="594359"/>
           </a:xfrm>
           <a:prstGeom prst="rect">
             <a:avLst/>
@@ -12203,7 +12203,7 @@
           <a:p>
             <a:pPr>
               <a:lnSpc>
-                <a:spcPct val="100000"/>
+                <a:spcPct val="90000"/>
               </a:lnSpc>
               <a:defRPr sz="1100">
                 <a:solidFill>
@@ -12226,7 +12226,7 @@
         <p:spPr>
           <a:xfrm>
             <a:off x="3520440" y="3657599"/>
-            <a:ext cx="274320" cy="548640"/>
+            <a:ext cx="274320" cy="594359"/>
           </a:xfrm>
           <a:prstGeom prst="rect">
             <a:avLst/>
@@ -12261,7 +12261,7 @@
         <p:spPr>
           <a:xfrm>
             <a:off x="3794760" y="3657599"/>
-            <a:ext cx="2194560" cy="548640"/>
+            <a:ext cx="2194560" cy="594359"/>
           </a:xfrm>
           <a:prstGeom prst="rect">
             <a:avLst/>
@@ -12276,7 +12276,7 @@
           <a:p>
             <a:pPr>
               <a:lnSpc>
-                <a:spcPct val="100000"/>
+                <a:spcPct val="90000"/>
               </a:lnSpc>
               <a:defRPr sz="1100">
                 <a:solidFill>
@@ -12299,7 +12299,7 @@
         <p:spPr>
           <a:xfrm>
             <a:off x="3520440" y="4297679"/>
-            <a:ext cx="274320" cy="548640"/>
+            <a:ext cx="274320" cy="594359"/>
           </a:xfrm>
           <a:prstGeom prst="rect">
             <a:avLst/>
@@ -12334,7 +12334,7 @@
         <p:spPr>
           <a:xfrm>
             <a:off x="3794760" y="4297679"/>
-            <a:ext cx="2194560" cy="548640"/>
+            <a:ext cx="2194560" cy="594359"/>
           </a:xfrm>
           <a:prstGeom prst="rect">
             <a:avLst/>
@@ -12349,7 +12349,7 @@
           <a:p>
             <a:pPr>
               <a:lnSpc>
-                <a:spcPct val="100000"/>
+                <a:spcPct val="90000"/>
               </a:lnSpc>
               <a:defRPr sz="1100">
                 <a:solidFill>
@@ -12372,7 +12372,7 @@
         <p:spPr>
           <a:xfrm>
             <a:off x="3520440" y="4937760"/>
-            <a:ext cx="274320" cy="548640"/>
+            <a:ext cx="274320" cy="594359"/>
           </a:xfrm>
           <a:prstGeom prst="rect">
             <a:avLst/>
@@ -12407,7 +12407,7 @@
         <p:spPr>
           <a:xfrm>
             <a:off x="3794760" y="4937760"/>
-            <a:ext cx="2194560" cy="548640"/>
+            <a:ext cx="2194560" cy="594359"/>
           </a:xfrm>
           <a:prstGeom prst="rect">
             <a:avLst/>
@@ -12422,7 +12422,7 @@
           <a:p>
             <a:pPr>
               <a:lnSpc>
-                <a:spcPct val="100000"/>
+                <a:spcPct val="90000"/>
               </a:lnSpc>
               <a:defRPr sz="1100">
                 <a:solidFill>
@@ -12525,7 +12525,7 @@
         <p:spPr>
           <a:xfrm>
             <a:off x="6446520" y="1737360"/>
-            <a:ext cx="274320" cy="548640"/>
+            <a:ext cx="274320" cy="594359"/>
           </a:xfrm>
           <a:prstGeom prst="rect">
             <a:avLst/>
@@ -12560,7 +12560,7 @@
         <p:spPr>
           <a:xfrm>
             <a:off x="6720840" y="1737360"/>
-            <a:ext cx="2194560" cy="548640"/>
+            <a:ext cx="2194560" cy="594359"/>
           </a:xfrm>
           <a:prstGeom prst="rect">
             <a:avLst/>
@@ -12575,7 +12575,7 @@
           <a:p>
             <a:pPr>
               <a:lnSpc>
-                <a:spcPct val="100000"/>
+                <a:spcPct val="90000"/>
               </a:lnSpc>
               <a:defRPr sz="1100">
                 <a:solidFill>
@@ -12598,7 +12598,7 @@
         <p:spPr>
           <a:xfrm>
             <a:off x="6446520" y="2377439"/>
-            <a:ext cx="274320" cy="548640"/>
+            <a:ext cx="274320" cy="594359"/>
           </a:xfrm>
           <a:prstGeom prst="rect">
             <a:avLst/>
@@ -12633,7 +12633,7 @@
         <p:spPr>
           <a:xfrm>
             <a:off x="6720840" y="2377439"/>
-            <a:ext cx="2194560" cy="548640"/>
+            <a:ext cx="2194560" cy="594359"/>
           </a:xfrm>
           <a:prstGeom prst="rect">
             <a:avLst/>
@@ -12648,7 +12648,7 @@
           <a:p>
             <a:pPr>
               <a:lnSpc>
-                <a:spcPct val="100000"/>
+                <a:spcPct val="90000"/>
               </a:lnSpc>
               <a:defRPr sz="1100">
                 <a:solidFill>
@@ -12671,7 +12671,7 @@
         <p:spPr>
           <a:xfrm>
             <a:off x="6446520" y="3017520"/>
-            <a:ext cx="274320" cy="548640"/>
+            <a:ext cx="274320" cy="594359"/>
           </a:xfrm>
           <a:prstGeom prst="rect">
             <a:avLst/>
@@ -12706,7 +12706,7 @@
         <p:spPr>
           <a:xfrm>
             <a:off x="6720840" y="3017520"/>
-            <a:ext cx="2194560" cy="548640"/>
+            <a:ext cx="2194560" cy="594359"/>
           </a:xfrm>
           <a:prstGeom prst="rect">
             <a:avLst/>
@@ -12721,7 +12721,7 @@
           <a:p>
             <a:pPr>
               <a:lnSpc>
-                <a:spcPct val="100000"/>
+                <a:spcPct val="90000"/>
               </a:lnSpc>
               <a:defRPr sz="1100">
                 <a:solidFill>
@@ -12744,7 +12744,7 @@
         <p:spPr>
           <a:xfrm>
             <a:off x="6446520" y="3657599"/>
-            <a:ext cx="274320" cy="548640"/>
+            <a:ext cx="274320" cy="594359"/>
           </a:xfrm>
           <a:prstGeom prst="rect">
             <a:avLst/>
@@ -12779,7 +12779,7 @@
         <p:spPr>
           <a:xfrm>
             <a:off x="6720840" y="3657599"/>
-            <a:ext cx="2194560" cy="548640"/>
+            <a:ext cx="2194560" cy="594359"/>
           </a:xfrm>
           <a:prstGeom prst="rect">
             <a:avLst/>
@@ -12794,7 +12794,7 @@
           <a:p>
             <a:pPr>
               <a:lnSpc>
-                <a:spcPct val="100000"/>
+                <a:spcPct val="90000"/>
               </a:lnSpc>
               <a:defRPr sz="1100">
                 <a:solidFill>
@@ -12817,7 +12817,7 @@
         <p:spPr>
           <a:xfrm>
             <a:off x="6446520" y="4297679"/>
-            <a:ext cx="274320" cy="548640"/>
+            <a:ext cx="274320" cy="594359"/>
           </a:xfrm>
           <a:prstGeom prst="rect">
             <a:avLst/>
@@ -12852,7 +12852,7 @@
         <p:spPr>
           <a:xfrm>
             <a:off x="6720840" y="4297679"/>
-            <a:ext cx="2194560" cy="548640"/>
+            <a:ext cx="2194560" cy="594359"/>
           </a:xfrm>
           <a:prstGeom prst="rect">
             <a:avLst/>
@@ -12867,7 +12867,7 @@
           <a:p>
             <a:pPr>
               <a:lnSpc>
-                <a:spcPct val="100000"/>
+                <a:spcPct val="90000"/>
               </a:lnSpc>
               <a:defRPr sz="1100">
                 <a:solidFill>
@@ -12890,7 +12890,7 @@
         <p:spPr>
           <a:xfrm>
             <a:off x="6446520" y="4937760"/>
-            <a:ext cx="274320" cy="548640"/>
+            <a:ext cx="274320" cy="594359"/>
           </a:xfrm>
           <a:prstGeom prst="rect">
             <a:avLst/>
@@ -12925,7 +12925,7 @@
         <p:spPr>
           <a:xfrm>
             <a:off x="6720840" y="4937760"/>
-            <a:ext cx="2194560" cy="548640"/>
+            <a:ext cx="2194560" cy="594359"/>
           </a:xfrm>
           <a:prstGeom prst="rect">
             <a:avLst/>
@@ -12940,7 +12940,7 @@
           <a:p>
             <a:pPr>
               <a:lnSpc>
-                <a:spcPct val="100000"/>
+                <a:spcPct val="90000"/>
               </a:lnSpc>
               <a:defRPr sz="1100">
                 <a:solidFill>
@@ -13139,7 +13139,7 @@
         <p:spPr>
           <a:xfrm>
             <a:off x="594360" y="1737360"/>
-            <a:ext cx="274320" cy="548640"/>
+            <a:ext cx="274320" cy="594359"/>
           </a:xfrm>
           <a:prstGeom prst="rect">
             <a:avLst/>
@@ -13174,7 +13174,7 @@
         <p:spPr>
           <a:xfrm>
             <a:off x="868680" y="1737360"/>
-            <a:ext cx="2194560" cy="548640"/>
+            <a:ext cx="2194560" cy="594359"/>
           </a:xfrm>
           <a:prstGeom prst="rect">
             <a:avLst/>
@@ -13189,7 +13189,7 @@
           <a:p>
             <a:pPr>
               <a:lnSpc>
-                <a:spcPct val="100000"/>
+                <a:spcPct val="90000"/>
               </a:lnSpc>
               <a:defRPr sz="1100">
                 <a:solidFill>
@@ -13212,7 +13212,7 @@
         <p:spPr>
           <a:xfrm>
             <a:off x="594360" y="2377439"/>
-            <a:ext cx="274320" cy="548640"/>
+            <a:ext cx="274320" cy="594359"/>
           </a:xfrm>
           <a:prstGeom prst="rect">
             <a:avLst/>
@@ -13247,7 +13247,7 @@
         <p:spPr>
           <a:xfrm>
             <a:off x="868680" y="2377439"/>
-            <a:ext cx="2194560" cy="548640"/>
+            <a:ext cx="2194560" cy="594359"/>
           </a:xfrm>
           <a:prstGeom prst="rect">
             <a:avLst/>
@@ -13262,7 +13262,7 @@
           <a:p>
             <a:pPr>
               <a:lnSpc>
-                <a:spcPct val="100000"/>
+                <a:spcPct val="90000"/>
               </a:lnSpc>
               <a:defRPr sz="1100">
                 <a:solidFill>
@@ -13285,7 +13285,7 @@
         <p:spPr>
           <a:xfrm>
             <a:off x="594360" y="3017520"/>
-            <a:ext cx="274320" cy="548640"/>
+            <a:ext cx="274320" cy="594359"/>
           </a:xfrm>
           <a:prstGeom prst="rect">
             <a:avLst/>
@@ -13320,7 +13320,7 @@
         <p:spPr>
           <a:xfrm>
             <a:off x="868680" y="3017520"/>
-            <a:ext cx="2194560" cy="548640"/>
+            <a:ext cx="2194560" cy="594359"/>
           </a:xfrm>
           <a:prstGeom prst="rect">
             <a:avLst/>
@@ -13335,7 +13335,7 @@
           <a:p>
             <a:pPr>
               <a:lnSpc>
-                <a:spcPct val="100000"/>
+                <a:spcPct val="90000"/>
               </a:lnSpc>
               <a:defRPr sz="1100">
                 <a:solidFill>
@@ -13358,7 +13358,7 @@
         <p:spPr>
           <a:xfrm>
             <a:off x="594360" y="3657599"/>
-            <a:ext cx="274320" cy="548640"/>
+            <a:ext cx="274320" cy="594359"/>
           </a:xfrm>
           <a:prstGeom prst="rect">
             <a:avLst/>
@@ -13393,7 +13393,7 @@
         <p:spPr>
           <a:xfrm>
             <a:off x="868680" y="3657599"/>
-            <a:ext cx="2194560" cy="548640"/>
+            <a:ext cx="2194560" cy="594359"/>
           </a:xfrm>
           <a:prstGeom prst="rect">
             <a:avLst/>
@@ -13408,7 +13408,7 @@
           <a:p>
             <a:pPr>
               <a:lnSpc>
-                <a:spcPct val="100000"/>
+                <a:spcPct val="90000"/>
               </a:lnSpc>
               <a:defRPr sz="1100">
                 <a:solidFill>
@@ -13431,7 +13431,7 @@
         <p:spPr>
           <a:xfrm>
             <a:off x="594360" y="4297679"/>
-            <a:ext cx="274320" cy="548640"/>
+            <a:ext cx="274320" cy="594359"/>
           </a:xfrm>
           <a:prstGeom prst="rect">
             <a:avLst/>
@@ -13466,7 +13466,7 @@
         <p:spPr>
           <a:xfrm>
             <a:off x="868680" y="4297679"/>
-            <a:ext cx="2194560" cy="548640"/>
+            <a:ext cx="2194560" cy="594359"/>
           </a:xfrm>
           <a:prstGeom prst="rect">
             <a:avLst/>
@@ -13481,7 +13481,7 @@
           <a:p>
             <a:pPr>
               <a:lnSpc>
-                <a:spcPct val="100000"/>
+                <a:spcPct val="90000"/>
               </a:lnSpc>
               <a:defRPr sz="1100">
                 <a:solidFill>
@@ -13504,7 +13504,7 @@
         <p:spPr>
           <a:xfrm>
             <a:off x="594360" y="4937760"/>
-            <a:ext cx="274320" cy="548640"/>
+            <a:ext cx="274320" cy="594359"/>
           </a:xfrm>
           <a:prstGeom prst="rect">
             <a:avLst/>
@@ -13539,7 +13539,7 @@
         <p:spPr>
           <a:xfrm>
             <a:off x="868680" y="4937760"/>
-            <a:ext cx="2194560" cy="548640"/>
+            <a:ext cx="2194560" cy="594359"/>
           </a:xfrm>
           <a:prstGeom prst="rect">
             <a:avLst/>
@@ -13554,7 +13554,7 @@
           <a:p>
             <a:pPr>
               <a:lnSpc>
-                <a:spcPct val="100000"/>
+                <a:spcPct val="90000"/>
               </a:lnSpc>
               <a:defRPr sz="1100">
                 <a:solidFill>
@@ -13657,7 +13657,7 @@
         <p:spPr>
           <a:xfrm>
             <a:off x="3520440" y="1737360"/>
-            <a:ext cx="274320" cy="548640"/>
+            <a:ext cx="274320" cy="594359"/>
           </a:xfrm>
           <a:prstGeom prst="rect">
             <a:avLst/>
@@ -13692,7 +13692,7 @@
         <p:spPr>
           <a:xfrm>
             <a:off x="3794760" y="1737360"/>
-            <a:ext cx="2194560" cy="548640"/>
+            <a:ext cx="2194560" cy="594359"/>
           </a:xfrm>
           <a:prstGeom prst="rect">
             <a:avLst/>
@@ -13707,7 +13707,7 @@
           <a:p>
             <a:pPr>
               <a:lnSpc>
-                <a:spcPct val="100000"/>
+                <a:spcPct val="90000"/>
               </a:lnSpc>
               <a:defRPr sz="1100">
                 <a:solidFill>
@@ -13730,7 +13730,7 @@
         <p:spPr>
           <a:xfrm>
             <a:off x="3520440" y="2377439"/>
-            <a:ext cx="274320" cy="548640"/>
+            <a:ext cx="274320" cy="594359"/>
           </a:xfrm>
           <a:prstGeom prst="rect">
             <a:avLst/>
@@ -13765,7 +13765,7 @@
         <p:spPr>
           <a:xfrm>
             <a:off x="3794760" y="2377439"/>
-            <a:ext cx="2194560" cy="548640"/>
+            <a:ext cx="2194560" cy="594359"/>
           </a:xfrm>
           <a:prstGeom prst="rect">
             <a:avLst/>
@@ -13780,7 +13780,7 @@
           <a:p>
             <a:pPr>
               <a:lnSpc>
-                <a:spcPct val="100000"/>
+                <a:spcPct val="90000"/>
               </a:lnSpc>
               <a:defRPr sz="1100">
                 <a:solidFill>
@@ -13803,7 +13803,7 @@
         <p:spPr>
           <a:xfrm>
             <a:off x="3520440" y="3017520"/>
-            <a:ext cx="274320" cy="548640"/>
+            <a:ext cx="274320" cy="594359"/>
           </a:xfrm>
           <a:prstGeom prst="rect">
             <a:avLst/>
@@ -13838,7 +13838,7 @@
         <p:spPr>
           <a:xfrm>
             <a:off x="3794760" y="3017520"/>
-            <a:ext cx="2194560" cy="548640"/>
+            <a:ext cx="2194560" cy="594359"/>
           </a:xfrm>
           <a:prstGeom prst="rect">
             <a:avLst/>
@@ -13853,7 +13853,7 @@
           <a:p>
             <a:pPr>
               <a:lnSpc>
-                <a:spcPct val="100000"/>
+                <a:spcPct val="90000"/>
               </a:lnSpc>
               <a:defRPr sz="1100">
                 <a:solidFill>
@@ -13876,7 +13876,7 @@
         <p:spPr>
           <a:xfrm>
             <a:off x="3520440" y="3657599"/>
-            <a:ext cx="274320" cy="548640"/>
+            <a:ext cx="274320" cy="594359"/>
           </a:xfrm>
           <a:prstGeom prst="rect">
             <a:avLst/>
@@ -13911,7 +13911,7 @@
         <p:spPr>
           <a:xfrm>
             <a:off x="3794760" y="3657599"/>
-            <a:ext cx="2194560" cy="548640"/>
+            <a:ext cx="2194560" cy="594359"/>
           </a:xfrm>
           <a:prstGeom prst="rect">
             <a:avLst/>
@@ -13926,7 +13926,7 @@
           <a:p>
             <a:pPr>
               <a:lnSpc>
-                <a:spcPct val="100000"/>
+                <a:spcPct val="90000"/>
               </a:lnSpc>
               <a:defRPr sz="1100">
                 <a:solidFill>
@@ -13949,7 +13949,7 @@
         <p:spPr>
           <a:xfrm>
             <a:off x="3520440" y="4297679"/>
-            <a:ext cx="274320" cy="548640"/>
+            <a:ext cx="274320" cy="594359"/>
           </a:xfrm>
           <a:prstGeom prst="rect">
             <a:avLst/>
@@ -13984,7 +13984,7 @@
         <p:spPr>
           <a:xfrm>
             <a:off x="3794760" y="4297679"/>
-            <a:ext cx="2194560" cy="548640"/>
+            <a:ext cx="2194560" cy="594359"/>
           </a:xfrm>
           <a:prstGeom prst="rect">
             <a:avLst/>
@@ -13999,7 +13999,7 @@
           <a:p>
             <a:pPr>
               <a:lnSpc>
-                <a:spcPct val="100000"/>
+                <a:spcPct val="90000"/>
               </a:lnSpc>
               <a:defRPr sz="1100">
                 <a:solidFill>
@@ -14022,7 +14022,7 @@
         <p:spPr>
           <a:xfrm>
             <a:off x="3520440" y="4937760"/>
-            <a:ext cx="274320" cy="548640"/>
+            <a:ext cx="274320" cy="594359"/>
           </a:xfrm>
           <a:prstGeom prst="rect">
             <a:avLst/>
@@ -14057,7 +14057,7 @@
         <p:spPr>
           <a:xfrm>
             <a:off x="3794760" y="4937760"/>
-            <a:ext cx="2194560" cy="548640"/>
+            <a:ext cx="2194560" cy="594359"/>
           </a:xfrm>
           <a:prstGeom prst="rect">
             <a:avLst/>
@@ -14072,7 +14072,7 @@
           <a:p>
             <a:pPr>
               <a:lnSpc>
-                <a:spcPct val="100000"/>
+                <a:spcPct val="90000"/>
               </a:lnSpc>
               <a:defRPr sz="1100">
                 <a:solidFill>
@@ -14175,7 +14175,7 @@
         <p:spPr>
           <a:xfrm>
             <a:off x="6446520" y="1737360"/>
-            <a:ext cx="274320" cy="548640"/>
+            <a:ext cx="274320" cy="594359"/>
           </a:xfrm>
           <a:prstGeom prst="rect">
             <a:avLst/>
@@ -14210,7 +14210,7 @@
         <p:spPr>
           <a:xfrm>
             <a:off x="6720840" y="1737360"/>
-            <a:ext cx="2194560" cy="548640"/>
+            <a:ext cx="2194560" cy="594359"/>
           </a:xfrm>
           <a:prstGeom prst="rect">
             <a:avLst/>
@@ -14225,7 +14225,7 @@
           <a:p>
             <a:pPr>
               <a:lnSpc>
-                <a:spcPct val="100000"/>
+                <a:spcPct val="90000"/>
               </a:lnSpc>
               <a:defRPr sz="1100">
                 <a:solidFill>
@@ -14248,7 +14248,7 @@
         <p:spPr>
           <a:xfrm>
             <a:off x="6446520" y="2377439"/>
-            <a:ext cx="274320" cy="548640"/>
+            <a:ext cx="274320" cy="594359"/>
           </a:xfrm>
           <a:prstGeom prst="rect">
             <a:avLst/>
@@ -14283,7 +14283,7 @@
         <p:spPr>
           <a:xfrm>
             <a:off x="6720840" y="2377439"/>
-            <a:ext cx="2194560" cy="548640"/>
+            <a:ext cx="2194560" cy="594359"/>
           </a:xfrm>
           <a:prstGeom prst="rect">
             <a:avLst/>
@@ -14298,7 +14298,7 @@
           <a:p>
             <a:pPr>
               <a:lnSpc>
-                <a:spcPct val="100000"/>
+                <a:spcPct val="90000"/>
               </a:lnSpc>
               <a:defRPr sz="1100">
                 <a:solidFill>
@@ -14321,7 +14321,7 @@
         <p:spPr>
           <a:xfrm>
             <a:off x="6446520" y="3017520"/>
-            <a:ext cx="274320" cy="548640"/>
+            <a:ext cx="274320" cy="594359"/>
           </a:xfrm>
           <a:prstGeom prst="rect">
             <a:avLst/>
@@ -14356,7 +14356,7 @@
         <p:spPr>
           <a:xfrm>
             <a:off x="6720840" y="3017520"/>
-            <a:ext cx="2194560" cy="548640"/>
+            <a:ext cx="2194560" cy="594359"/>
           </a:xfrm>
           <a:prstGeom prst="rect">
             <a:avLst/>
@@ -14371,7 +14371,7 @@
           <a:p>
             <a:pPr>
               <a:lnSpc>
-                <a:spcPct val="100000"/>
+                <a:spcPct val="90000"/>
               </a:lnSpc>
               <a:defRPr sz="1100">
                 <a:solidFill>
@@ -14394,7 +14394,7 @@
         <p:spPr>
           <a:xfrm>
             <a:off x="6446520" y="3657599"/>
-            <a:ext cx="274320" cy="548640"/>
+            <a:ext cx="274320" cy="594359"/>
           </a:xfrm>
           <a:prstGeom prst="rect">
             <a:avLst/>
@@ -14429,7 +14429,7 @@
         <p:spPr>
           <a:xfrm>
             <a:off x="6720840" y="3657599"/>
-            <a:ext cx="2194560" cy="548640"/>
+            <a:ext cx="2194560" cy="594359"/>
           </a:xfrm>
           <a:prstGeom prst="rect">
             <a:avLst/>
@@ -14444,7 +14444,7 @@
           <a:p>
             <a:pPr>
               <a:lnSpc>
-                <a:spcPct val="100000"/>
+                <a:spcPct val="90000"/>
               </a:lnSpc>
               <a:defRPr sz="1100">
                 <a:solidFill>
@@ -14467,7 +14467,7 @@
         <p:spPr>
           <a:xfrm>
             <a:off x="6446520" y="4297679"/>
-            <a:ext cx="274320" cy="548640"/>
+            <a:ext cx="274320" cy="594359"/>
           </a:xfrm>
           <a:prstGeom prst="rect">
             <a:avLst/>
@@ -14502,7 +14502,7 @@
         <p:spPr>
           <a:xfrm>
             <a:off x="6720840" y="4297679"/>
-            <a:ext cx="2194560" cy="548640"/>
+            <a:ext cx="2194560" cy="594359"/>
           </a:xfrm>
           <a:prstGeom prst="rect">
             <a:avLst/>
@@ -14517,7 +14517,7 @@
           <a:p>
             <a:pPr>
               <a:lnSpc>
-                <a:spcPct val="100000"/>
+                <a:spcPct val="90000"/>
               </a:lnSpc>
               <a:defRPr sz="1100">
                 <a:solidFill>
@@ -14540,7 +14540,7 @@
         <p:spPr>
           <a:xfrm>
             <a:off x="6446520" y="4937760"/>
-            <a:ext cx="274320" cy="548640"/>
+            <a:ext cx="274320" cy="594359"/>
           </a:xfrm>
           <a:prstGeom prst="rect">
             <a:avLst/>
@@ -14575,7 +14575,7 @@
         <p:spPr>
           <a:xfrm>
             <a:off x="6720840" y="4937760"/>
-            <a:ext cx="2194560" cy="548640"/>
+            <a:ext cx="2194560" cy="594359"/>
           </a:xfrm>
           <a:prstGeom prst="rect">
             <a:avLst/>
@@ -14590,7 +14590,7 @@
           <a:p>
             <a:pPr>
               <a:lnSpc>
-                <a:spcPct val="100000"/>
+                <a:spcPct val="90000"/>
               </a:lnSpc>
               <a:defRPr sz="1100">
                 <a:solidFill>
@@ -14789,7 +14789,7 @@
         <p:spPr>
           <a:xfrm>
             <a:off x="594360" y="1737360"/>
-            <a:ext cx="274320" cy="548640"/>
+            <a:ext cx="274320" cy="594359"/>
           </a:xfrm>
           <a:prstGeom prst="rect">
             <a:avLst/>
@@ -14824,7 +14824,7 @@
         <p:spPr>
           <a:xfrm>
             <a:off x="868680" y="1737360"/>
-            <a:ext cx="2194560" cy="548640"/>
+            <a:ext cx="2194560" cy="594359"/>
           </a:xfrm>
           <a:prstGeom prst="rect">
             <a:avLst/>
@@ -14839,7 +14839,7 @@
           <a:p>
             <a:pPr>
               <a:lnSpc>
-                <a:spcPct val="100000"/>
+                <a:spcPct val="90000"/>
               </a:lnSpc>
               <a:defRPr sz="1100">
                 <a:solidFill>
@@ -14862,7 +14862,7 @@
         <p:spPr>
           <a:xfrm>
             <a:off x="594360" y="2377439"/>
-            <a:ext cx="274320" cy="548640"/>
+            <a:ext cx="274320" cy="594359"/>
           </a:xfrm>
           <a:prstGeom prst="rect">
             <a:avLst/>
@@ -14897,7 +14897,7 @@
         <p:spPr>
           <a:xfrm>
             <a:off x="868680" y="2377439"/>
-            <a:ext cx="2194560" cy="548640"/>
+            <a:ext cx="2194560" cy="594359"/>
           </a:xfrm>
           <a:prstGeom prst="rect">
             <a:avLst/>
@@ -14912,7 +14912,7 @@
           <a:p>
             <a:pPr>
               <a:lnSpc>
-                <a:spcPct val="100000"/>
+                <a:spcPct val="90000"/>
               </a:lnSpc>
               <a:defRPr sz="1100">
                 <a:solidFill>
@@ -14935,7 +14935,7 @@
         <p:spPr>
           <a:xfrm>
             <a:off x="594360" y="3017520"/>
-            <a:ext cx="274320" cy="548640"/>
+            <a:ext cx="274320" cy="594359"/>
           </a:xfrm>
           <a:prstGeom prst="rect">
             <a:avLst/>
@@ -14970,7 +14970,7 @@
         <p:spPr>
           <a:xfrm>
             <a:off x="868680" y="3017520"/>
-            <a:ext cx="2194560" cy="548640"/>
+            <a:ext cx="2194560" cy="594359"/>
           </a:xfrm>
           <a:prstGeom prst="rect">
             <a:avLst/>
@@ -14985,7 +14985,7 @@
           <a:p>
             <a:pPr>
               <a:lnSpc>
-                <a:spcPct val="100000"/>
+                <a:spcPct val="90000"/>
               </a:lnSpc>
               <a:defRPr sz="1100">
                 <a:solidFill>
@@ -15008,7 +15008,7 @@
         <p:spPr>
           <a:xfrm>
             <a:off x="594360" y="3657599"/>
-            <a:ext cx="274320" cy="548640"/>
+            <a:ext cx="274320" cy="594359"/>
           </a:xfrm>
           <a:prstGeom prst="rect">
             <a:avLst/>
@@ -15043,7 +15043,7 @@
         <p:spPr>
           <a:xfrm>
             <a:off x="868680" y="3657599"/>
-            <a:ext cx="2194560" cy="548640"/>
+            <a:ext cx="2194560" cy="594359"/>
           </a:xfrm>
           <a:prstGeom prst="rect">
             <a:avLst/>
@@ -15058,7 +15058,7 @@
           <a:p>
             <a:pPr>
               <a:lnSpc>
-                <a:spcPct val="100000"/>
+                <a:spcPct val="90000"/>
               </a:lnSpc>
               <a:defRPr sz="1100">
                 <a:solidFill>
@@ -15081,7 +15081,7 @@
         <p:spPr>
           <a:xfrm>
             <a:off x="594360" y="4297679"/>
-            <a:ext cx="274320" cy="548640"/>
+            <a:ext cx="274320" cy="594359"/>
           </a:xfrm>
           <a:prstGeom prst="rect">
             <a:avLst/>
@@ -15116,7 +15116,7 @@
         <p:spPr>
           <a:xfrm>
             <a:off x="868680" y="4297679"/>
-            <a:ext cx="2194560" cy="548640"/>
+            <a:ext cx="2194560" cy="594359"/>
           </a:xfrm>
           <a:prstGeom prst="rect">
             <a:avLst/>
@@ -15131,7 +15131,7 @@
           <a:p>
             <a:pPr>
               <a:lnSpc>
-                <a:spcPct val="100000"/>
+                <a:spcPct val="90000"/>
               </a:lnSpc>
               <a:defRPr sz="1100">
                 <a:solidFill>
@@ -15154,7 +15154,7 @@
         <p:spPr>
           <a:xfrm>
             <a:off x="594360" y="4937760"/>
-            <a:ext cx="274320" cy="548640"/>
+            <a:ext cx="274320" cy="594359"/>
           </a:xfrm>
           <a:prstGeom prst="rect">
             <a:avLst/>
@@ -15189,7 +15189,7 @@
         <p:spPr>
           <a:xfrm>
             <a:off x="868680" y="4937760"/>
-            <a:ext cx="2194560" cy="548640"/>
+            <a:ext cx="2194560" cy="594359"/>
           </a:xfrm>
           <a:prstGeom prst="rect">
             <a:avLst/>
@@ -15204,7 +15204,7 @@
           <a:p>
             <a:pPr>
               <a:lnSpc>
-                <a:spcPct val="100000"/>
+                <a:spcPct val="90000"/>
               </a:lnSpc>
               <a:defRPr sz="1100">
                 <a:solidFill>
@@ -15307,7 +15307,7 @@
         <p:spPr>
           <a:xfrm>
             <a:off x="3520440" y="1737360"/>
-            <a:ext cx="274320" cy="548640"/>
+            <a:ext cx="274320" cy="594359"/>
           </a:xfrm>
           <a:prstGeom prst="rect">
             <a:avLst/>
@@ -15342,7 +15342,7 @@
         <p:spPr>
           <a:xfrm>
             <a:off x="3794760" y="1737360"/>
-            <a:ext cx="2194560" cy="548640"/>
+            <a:ext cx="2194560" cy="594359"/>
           </a:xfrm>
           <a:prstGeom prst="rect">
             <a:avLst/>
@@ -15357,7 +15357,7 @@
           <a:p>
             <a:pPr>
               <a:lnSpc>
-                <a:spcPct val="100000"/>
+                <a:spcPct val="90000"/>
               </a:lnSpc>
               <a:defRPr sz="1100">
                 <a:solidFill>
@@ -15380,7 +15380,7 @@
         <p:spPr>
           <a:xfrm>
             <a:off x="3520440" y="2377439"/>
-            <a:ext cx="274320" cy="548640"/>
+            <a:ext cx="274320" cy="594359"/>
           </a:xfrm>
           <a:prstGeom prst="rect">
             <a:avLst/>
@@ -15415,7 +15415,7 @@
         <p:spPr>
           <a:xfrm>
             <a:off x="3794760" y="2377439"/>
-            <a:ext cx="2194560" cy="548640"/>
+            <a:ext cx="2194560" cy="594359"/>
           </a:xfrm>
           <a:prstGeom prst="rect">
             <a:avLst/>
@@ -15430,7 +15430,7 @@
           <a:p>
             <a:pPr>
               <a:lnSpc>
-                <a:spcPct val="100000"/>
+                <a:spcPct val="90000"/>
               </a:lnSpc>
               <a:defRPr sz="1100">
                 <a:solidFill>
@@ -15453,7 +15453,7 @@
         <p:spPr>
           <a:xfrm>
             <a:off x="3520440" y="3017520"/>
-            <a:ext cx="274320" cy="548640"/>
+            <a:ext cx="274320" cy="594359"/>
           </a:xfrm>
           <a:prstGeom prst="rect">
             <a:avLst/>
@@ -15488,7 +15488,7 @@
         <p:spPr>
           <a:xfrm>
             <a:off x="3794760" y="3017520"/>
-            <a:ext cx="2194560" cy="548640"/>
+            <a:ext cx="2194560" cy="594359"/>
           </a:xfrm>
           <a:prstGeom prst="rect">
             <a:avLst/>
@@ -15503,7 +15503,7 @@
           <a:p>
             <a:pPr>
               <a:lnSpc>
-                <a:spcPct val="100000"/>
+                <a:spcPct val="90000"/>
               </a:lnSpc>
               <a:defRPr sz="1100">
                 <a:solidFill>
@@ -15526,7 +15526,7 @@
         <p:spPr>
           <a:xfrm>
             <a:off x="3520440" y="3657599"/>
-            <a:ext cx="274320" cy="548640"/>
+            <a:ext cx="274320" cy="594359"/>
           </a:xfrm>
           <a:prstGeom prst="rect">
             <a:avLst/>
@@ -15561,7 +15561,7 @@
         <p:spPr>
           <a:xfrm>
             <a:off x="3794760" y="3657599"/>
-            <a:ext cx="2194560" cy="548640"/>
+            <a:ext cx="2194560" cy="594359"/>
           </a:xfrm>
           <a:prstGeom prst="rect">
             <a:avLst/>
@@ -15576,7 +15576,7 @@
           <a:p>
             <a:pPr>
               <a:lnSpc>
-                <a:spcPct val="100000"/>
+                <a:spcPct val="90000"/>
               </a:lnSpc>
               <a:defRPr sz="1100">
                 <a:solidFill>
@@ -15599,7 +15599,7 @@
         <p:spPr>
           <a:xfrm>
             <a:off x="3520440" y="4297679"/>
-            <a:ext cx="274320" cy="548640"/>
+            <a:ext cx="274320" cy="594359"/>
           </a:xfrm>
           <a:prstGeom prst="rect">
             <a:avLst/>
@@ -15634,7 +15634,7 @@
         <p:spPr>
           <a:xfrm>
             <a:off x="3794760" y="4297679"/>
-            <a:ext cx="2194560" cy="548640"/>
+            <a:ext cx="2194560" cy="594359"/>
           </a:xfrm>
           <a:prstGeom prst="rect">
             <a:avLst/>
@@ -15649,7 +15649,7 @@
           <a:p>
             <a:pPr>
               <a:lnSpc>
-                <a:spcPct val="100000"/>
+                <a:spcPct val="90000"/>
               </a:lnSpc>
               <a:defRPr sz="1100">
                 <a:solidFill>
@@ -15672,7 +15672,7 @@
         <p:spPr>
           <a:xfrm>
             <a:off x="3520440" y="4937760"/>
-            <a:ext cx="274320" cy="548640"/>
+            <a:ext cx="274320" cy="594359"/>
           </a:xfrm>
           <a:prstGeom prst="rect">
             <a:avLst/>
@@ -15707,7 +15707,7 @@
         <p:spPr>
           <a:xfrm>
             <a:off x="3794760" y="4937760"/>
-            <a:ext cx="2194560" cy="548640"/>
+            <a:ext cx="2194560" cy="594359"/>
           </a:xfrm>
           <a:prstGeom prst="rect">
             <a:avLst/>
@@ -15722,7 +15722,7 @@
           <a:p>
             <a:pPr>
               <a:lnSpc>
-                <a:spcPct val="100000"/>
+                <a:spcPct val="90000"/>
               </a:lnSpc>
               <a:defRPr sz="1100">
                 <a:solidFill>
@@ -15825,7 +15825,7 @@
         <p:spPr>
           <a:xfrm>
             <a:off x="6446520" y="1737360"/>
-            <a:ext cx="274320" cy="548640"/>
+            <a:ext cx="274320" cy="594359"/>
           </a:xfrm>
           <a:prstGeom prst="rect">
             <a:avLst/>
@@ -15860,7 +15860,7 @@
         <p:spPr>
           <a:xfrm>
             <a:off x="6720840" y="1737360"/>
-            <a:ext cx="2194560" cy="548640"/>
+            <a:ext cx="2194560" cy="594359"/>
           </a:xfrm>
           <a:prstGeom prst="rect">
             <a:avLst/>
@@ -15875,7 +15875,7 @@
           <a:p>
             <a:pPr>
               <a:lnSpc>
-                <a:spcPct val="100000"/>
+                <a:spcPct val="90000"/>
               </a:lnSpc>
               <a:defRPr sz="1100">
                 <a:solidFill>
@@ -15898,7 +15898,7 @@
         <p:spPr>
           <a:xfrm>
             <a:off x="6446520" y="2377439"/>
-            <a:ext cx="274320" cy="548640"/>
+            <a:ext cx="274320" cy="594359"/>
           </a:xfrm>
           <a:prstGeom prst="rect">
             <a:avLst/>
@@ -15933,7 +15933,7 @@
         <p:spPr>
           <a:xfrm>
             <a:off x="6720840" y="2377439"/>
-            <a:ext cx="2194560" cy="548640"/>
+            <a:ext cx="2194560" cy="594359"/>
           </a:xfrm>
           <a:prstGeom prst="rect">
             <a:avLst/>
@@ -15948,7 +15948,7 @@
           <a:p>
             <a:pPr>
               <a:lnSpc>
-                <a:spcPct val="100000"/>
+                <a:spcPct val="90000"/>
               </a:lnSpc>
               <a:defRPr sz="1100">
                 <a:solidFill>
@@ -15971,7 +15971,7 @@
         <p:spPr>
           <a:xfrm>
             <a:off x="6446520" y="3017520"/>
-            <a:ext cx="274320" cy="548640"/>
+            <a:ext cx="274320" cy="594359"/>
           </a:xfrm>
           <a:prstGeom prst="rect">
             <a:avLst/>
@@ -16006,7 +16006,7 @@
         <p:spPr>
           <a:xfrm>
             <a:off x="6720840" y="3017520"/>
-            <a:ext cx="2194560" cy="548640"/>
+            <a:ext cx="2194560" cy="594359"/>
           </a:xfrm>
           <a:prstGeom prst="rect">
             <a:avLst/>
@@ -16021,7 +16021,7 @@
           <a:p>
             <a:pPr>
               <a:lnSpc>
-                <a:spcPct val="100000"/>
+                <a:spcPct val="90000"/>
               </a:lnSpc>
               <a:defRPr sz="1100">
                 <a:solidFill>
@@ -16044,7 +16044,7 @@
         <p:spPr>
           <a:xfrm>
             <a:off x="6446520" y="3657599"/>
-            <a:ext cx="274320" cy="548640"/>
+            <a:ext cx="274320" cy="594359"/>
           </a:xfrm>
           <a:prstGeom prst="rect">
             <a:avLst/>
@@ -16079,7 +16079,7 @@
         <p:spPr>
           <a:xfrm>
             <a:off x="6720840" y="3657599"/>
-            <a:ext cx="2194560" cy="548640"/>
+            <a:ext cx="2194560" cy="594359"/>
           </a:xfrm>
           <a:prstGeom prst="rect">
             <a:avLst/>
@@ -16094,7 +16094,7 @@
           <a:p>
             <a:pPr>
               <a:lnSpc>
-                <a:spcPct val="100000"/>
+                <a:spcPct val="90000"/>
               </a:lnSpc>
               <a:defRPr sz="1100">
                 <a:solidFill>
@@ -16117,7 +16117,7 @@
         <p:spPr>
           <a:xfrm>
             <a:off x="6446520" y="4297679"/>
-            <a:ext cx="274320" cy="548640"/>
+            <a:ext cx="274320" cy="594359"/>
           </a:xfrm>
           <a:prstGeom prst="rect">
             <a:avLst/>
@@ -16152,7 +16152,7 @@
         <p:spPr>
           <a:xfrm>
             <a:off x="6720840" y="4297679"/>
-            <a:ext cx="2194560" cy="548640"/>
+            <a:ext cx="2194560" cy="594359"/>
           </a:xfrm>
           <a:prstGeom prst="rect">
             <a:avLst/>
@@ -16167,7 +16167,7 @@
           <a:p>
             <a:pPr>
               <a:lnSpc>
-                <a:spcPct val="100000"/>
+                <a:spcPct val="90000"/>
               </a:lnSpc>
               <a:defRPr sz="1100">
                 <a:solidFill>
@@ -16190,7 +16190,7 @@
         <p:spPr>
           <a:xfrm>
             <a:off x="6446520" y="4937760"/>
-            <a:ext cx="274320" cy="548640"/>
+            <a:ext cx="274320" cy="594359"/>
           </a:xfrm>
           <a:prstGeom prst="rect">
             <a:avLst/>
@@ -16225,7 +16225,7 @@
         <p:spPr>
           <a:xfrm>
             <a:off x="6720840" y="4937760"/>
-            <a:ext cx="2194560" cy="548640"/>
+            <a:ext cx="2194560" cy="594359"/>
           </a:xfrm>
           <a:prstGeom prst="rect">
             <a:avLst/>
@@ -16240,7 +16240,7 @@
           <a:p>
             <a:pPr>
               <a:lnSpc>
-                <a:spcPct val="100000"/>
+                <a:spcPct val="90000"/>
               </a:lnSpc>
               <a:defRPr sz="1100">
                 <a:solidFill>
@@ -16439,7 +16439,7 @@
         <p:spPr>
           <a:xfrm>
             <a:off x="594360" y="1737360"/>
-            <a:ext cx="274320" cy="548640"/>
+            <a:ext cx="274320" cy="594359"/>
           </a:xfrm>
           <a:prstGeom prst="rect">
             <a:avLst/>
@@ -16474,7 +16474,7 @@
         <p:spPr>
           <a:xfrm>
             <a:off x="868680" y="1737360"/>
-            <a:ext cx="2194560" cy="548640"/>
+            <a:ext cx="2194560" cy="594359"/>
           </a:xfrm>
           <a:prstGeom prst="rect">
             <a:avLst/>
@@ -16489,7 +16489,7 @@
           <a:p>
             <a:pPr>
               <a:lnSpc>
-                <a:spcPct val="100000"/>
+                <a:spcPct val="90000"/>
               </a:lnSpc>
               <a:defRPr sz="1100">
                 <a:solidFill>
@@ -16512,7 +16512,7 @@
         <p:spPr>
           <a:xfrm>
             <a:off x="594360" y="2377439"/>
-            <a:ext cx="274320" cy="548640"/>
+            <a:ext cx="274320" cy="594359"/>
           </a:xfrm>
           <a:prstGeom prst="rect">
             <a:avLst/>
@@ -16547,7 +16547,7 @@
         <p:spPr>
           <a:xfrm>
             <a:off x="868680" y="2377439"/>
-            <a:ext cx="2194560" cy="548640"/>
+            <a:ext cx="2194560" cy="594359"/>
           </a:xfrm>
           <a:prstGeom prst="rect">
             <a:avLst/>
@@ -16562,7 +16562,7 @@
           <a:p>
             <a:pPr>
               <a:lnSpc>
-                <a:spcPct val="100000"/>
+                <a:spcPct val="90000"/>
               </a:lnSpc>
               <a:defRPr sz="1100">
                 <a:solidFill>
@@ -16585,7 +16585,7 @@
         <p:spPr>
           <a:xfrm>
             <a:off x="594360" y="3017520"/>
-            <a:ext cx="274320" cy="548640"/>
+            <a:ext cx="274320" cy="594359"/>
           </a:xfrm>
           <a:prstGeom prst="rect">
             <a:avLst/>
@@ -16620,7 +16620,7 @@
         <p:spPr>
           <a:xfrm>
             <a:off x="868680" y="3017520"/>
-            <a:ext cx="2194560" cy="548640"/>
+            <a:ext cx="2194560" cy="594359"/>
           </a:xfrm>
           <a:prstGeom prst="rect">
             <a:avLst/>
@@ -16635,7 +16635,7 @@
           <a:p>
             <a:pPr>
               <a:lnSpc>
-                <a:spcPct val="100000"/>
+                <a:spcPct val="90000"/>
               </a:lnSpc>
               <a:defRPr sz="1100">
                 <a:solidFill>
@@ -16658,7 +16658,7 @@
         <p:spPr>
           <a:xfrm>
             <a:off x="594360" y="3657599"/>
-            <a:ext cx="274320" cy="548640"/>
+            <a:ext cx="274320" cy="594359"/>
           </a:xfrm>
           <a:prstGeom prst="rect">
             <a:avLst/>
@@ -16693,7 +16693,7 @@
         <p:spPr>
           <a:xfrm>
             <a:off x="868680" y="3657599"/>
-            <a:ext cx="2194560" cy="548640"/>
+            <a:ext cx="2194560" cy="594359"/>
           </a:xfrm>
           <a:prstGeom prst="rect">
             <a:avLst/>
@@ -16708,7 +16708,7 @@
           <a:p>
             <a:pPr>
               <a:lnSpc>
-                <a:spcPct val="100000"/>
+                <a:spcPct val="90000"/>
               </a:lnSpc>
               <a:defRPr sz="1100">
                 <a:solidFill>
@@ -16731,7 +16731,7 @@
         <p:spPr>
           <a:xfrm>
             <a:off x="594360" y="4297679"/>
-            <a:ext cx="274320" cy="548640"/>
+            <a:ext cx="274320" cy="594359"/>
           </a:xfrm>
           <a:prstGeom prst="rect">
             <a:avLst/>
@@ -16766,7 +16766,7 @@
         <p:spPr>
           <a:xfrm>
             <a:off x="868680" y="4297679"/>
-            <a:ext cx="2194560" cy="548640"/>
+            <a:ext cx="2194560" cy="594359"/>
           </a:xfrm>
           <a:prstGeom prst="rect">
             <a:avLst/>
@@ -16781,7 +16781,7 @@
           <a:p>
             <a:pPr>
               <a:lnSpc>
-                <a:spcPct val="100000"/>
+                <a:spcPct val="90000"/>
               </a:lnSpc>
               <a:defRPr sz="1100">
                 <a:solidFill>
@@ -16804,7 +16804,7 @@
         <p:spPr>
           <a:xfrm>
             <a:off x="594360" y="4937760"/>
-            <a:ext cx="274320" cy="548640"/>
+            <a:ext cx="274320" cy="594359"/>
           </a:xfrm>
           <a:prstGeom prst="rect">
             <a:avLst/>
@@ -16839,7 +16839,7 @@
         <p:spPr>
           <a:xfrm>
             <a:off x="868680" y="4937760"/>
-            <a:ext cx="2194560" cy="548640"/>
+            <a:ext cx="2194560" cy="594359"/>
           </a:xfrm>
           <a:prstGeom prst="rect">
             <a:avLst/>
@@ -16854,7 +16854,7 @@
           <a:p>
             <a:pPr>
               <a:lnSpc>
-                <a:spcPct val="100000"/>
+                <a:spcPct val="90000"/>
               </a:lnSpc>
               <a:defRPr sz="1100">
                 <a:solidFill>
@@ -16957,7 +16957,7 @@
         <p:spPr>
           <a:xfrm>
             <a:off x="3520440" y="1737360"/>
-            <a:ext cx="274320" cy="548640"/>
+            <a:ext cx="274320" cy="594359"/>
           </a:xfrm>
           <a:prstGeom prst="rect">
             <a:avLst/>
@@ -16992,7 +16992,7 @@
         <p:spPr>
           <a:xfrm>
             <a:off x="3794760" y="1737360"/>
-            <a:ext cx="2194560" cy="548640"/>
+            <a:ext cx="2194560" cy="594359"/>
           </a:xfrm>
           <a:prstGeom prst="rect">
             <a:avLst/>
@@ -17007,7 +17007,7 @@
           <a:p>
             <a:pPr>
               <a:lnSpc>
-                <a:spcPct val="100000"/>
+                <a:spcPct val="90000"/>
               </a:lnSpc>
               <a:defRPr sz="1100">
                 <a:solidFill>
@@ -17030,7 +17030,7 @@
         <p:spPr>
           <a:xfrm>
             <a:off x="3520440" y="2377439"/>
-            <a:ext cx="274320" cy="548640"/>
+            <a:ext cx="274320" cy="594359"/>
           </a:xfrm>
           <a:prstGeom prst="rect">
             <a:avLst/>
@@ -17065,7 +17065,7 @@
         <p:spPr>
           <a:xfrm>
             <a:off x="3794760" y="2377439"/>
-            <a:ext cx="2194560" cy="548640"/>
+            <a:ext cx="2194560" cy="594359"/>
           </a:xfrm>
           <a:prstGeom prst="rect">
             <a:avLst/>
@@ -17080,7 +17080,7 @@
           <a:p>
             <a:pPr>
               <a:lnSpc>
-                <a:spcPct val="100000"/>
+                <a:spcPct val="90000"/>
               </a:lnSpc>
               <a:defRPr sz="1100">
                 <a:solidFill>
@@ -17103,7 +17103,7 @@
         <p:spPr>
           <a:xfrm>
             <a:off x="3520440" y="3017520"/>
-            <a:ext cx="274320" cy="548640"/>
+            <a:ext cx="274320" cy="594359"/>
           </a:xfrm>
           <a:prstGeom prst="rect">
             <a:avLst/>
@@ -17138,7 +17138,7 @@
         <p:spPr>
           <a:xfrm>
             <a:off x="3794760" y="3017520"/>
-            <a:ext cx="2194560" cy="548640"/>
+            <a:ext cx="2194560" cy="594359"/>
           </a:xfrm>
           <a:prstGeom prst="rect">
             <a:avLst/>
@@ -17153,7 +17153,7 @@
           <a:p>
             <a:pPr>
               <a:lnSpc>
-                <a:spcPct val="100000"/>
+                <a:spcPct val="90000"/>
               </a:lnSpc>
               <a:defRPr sz="1100">
                 <a:solidFill>
@@ -17176,7 +17176,7 @@
         <p:spPr>
           <a:xfrm>
             <a:off x="3520440" y="3657599"/>
-            <a:ext cx="274320" cy="548640"/>
+            <a:ext cx="274320" cy="594359"/>
           </a:xfrm>
           <a:prstGeom prst="rect">
             <a:avLst/>
@@ -17211,7 +17211,7 @@
         <p:spPr>
           <a:xfrm>
             <a:off x="3794760" y="3657599"/>
-            <a:ext cx="2194560" cy="548640"/>
+            <a:ext cx="2194560" cy="594359"/>
           </a:xfrm>
           <a:prstGeom prst="rect">
             <a:avLst/>
@@ -17226,7 +17226,7 @@
           <a:p>
             <a:pPr>
               <a:lnSpc>
-                <a:spcPct val="100000"/>
+                <a:spcPct val="90000"/>
               </a:lnSpc>
               <a:defRPr sz="1100">
                 <a:solidFill>
@@ -17249,7 +17249,7 @@
         <p:spPr>
           <a:xfrm>
             <a:off x="3520440" y="4297679"/>
-            <a:ext cx="274320" cy="548640"/>
+            <a:ext cx="274320" cy="594359"/>
           </a:xfrm>
           <a:prstGeom prst="rect">
             <a:avLst/>
@@ -17284,7 +17284,7 @@
         <p:spPr>
           <a:xfrm>
             <a:off x="3794760" y="4297679"/>
-            <a:ext cx="2194560" cy="548640"/>
+            <a:ext cx="2194560" cy="594359"/>
           </a:xfrm>
           <a:prstGeom prst="rect">
             <a:avLst/>
@@ -17299,7 +17299,7 @@
           <a:p>
             <a:pPr>
               <a:lnSpc>
-                <a:spcPct val="100000"/>
+                <a:spcPct val="90000"/>
               </a:lnSpc>
               <a:defRPr sz="1100">
                 <a:solidFill>
@@ -17322,7 +17322,7 @@
         <p:spPr>
           <a:xfrm>
             <a:off x="3520440" y="4937760"/>
-            <a:ext cx="274320" cy="548640"/>
+            <a:ext cx="274320" cy="594359"/>
           </a:xfrm>
           <a:prstGeom prst="rect">
             <a:avLst/>
@@ -17357,7 +17357,7 @@
         <p:spPr>
           <a:xfrm>
             <a:off x="3794760" y="4937760"/>
-            <a:ext cx="2194560" cy="548640"/>
+            <a:ext cx="2194560" cy="594359"/>
           </a:xfrm>
           <a:prstGeom prst="rect">
             <a:avLst/>
@@ -17372,7 +17372,7 @@
           <a:p>
             <a:pPr>
               <a:lnSpc>
-                <a:spcPct val="100000"/>
+                <a:spcPct val="90000"/>
               </a:lnSpc>
               <a:defRPr sz="1100">
                 <a:solidFill>
@@ -17475,7 +17475,7 @@
         <p:spPr>
           <a:xfrm>
             <a:off x="6446520" y="1737360"/>
-            <a:ext cx="274320" cy="548640"/>
+            <a:ext cx="274320" cy="594359"/>
           </a:xfrm>
           <a:prstGeom prst="rect">
             <a:avLst/>
@@ -17510,7 +17510,7 @@
         <p:spPr>
           <a:xfrm>
             <a:off x="6720840" y="1737360"/>
-            <a:ext cx="2194560" cy="548640"/>
+            <a:ext cx="2194560" cy="594359"/>
           </a:xfrm>
           <a:prstGeom prst="rect">
             <a:avLst/>
@@ -17525,7 +17525,7 @@
           <a:p>
             <a:pPr>
               <a:lnSpc>
-                <a:spcPct val="100000"/>
+                <a:spcPct val="90000"/>
               </a:lnSpc>
               <a:defRPr sz="1100">
                 <a:solidFill>
@@ -17548,7 +17548,7 @@
         <p:spPr>
           <a:xfrm>
             <a:off x="6446520" y="2377439"/>
-            <a:ext cx="274320" cy="548640"/>
+            <a:ext cx="274320" cy="594359"/>
           </a:xfrm>
           <a:prstGeom prst="rect">
             <a:avLst/>
@@ -17583,7 +17583,7 @@
         <p:spPr>
           <a:xfrm>
             <a:off x="6720840" y="2377439"/>
-            <a:ext cx="2194560" cy="548640"/>
+            <a:ext cx="2194560" cy="594359"/>
           </a:xfrm>
           <a:prstGeom prst="rect">
             <a:avLst/>
@@ -17598,7 +17598,7 @@
           <a:p>
             <a:pPr>
               <a:lnSpc>
-                <a:spcPct val="100000"/>
+                <a:spcPct val="90000"/>
               </a:lnSpc>
               <a:defRPr sz="1100">
                 <a:solidFill>
@@ -17621,7 +17621,7 @@
         <p:spPr>
           <a:xfrm>
             <a:off x="6446520" y="3017520"/>
-            <a:ext cx="274320" cy="548640"/>
+            <a:ext cx="274320" cy="594359"/>
           </a:xfrm>
           <a:prstGeom prst="rect">
             <a:avLst/>
@@ -17656,7 +17656,7 @@
         <p:spPr>
           <a:xfrm>
             <a:off x="6720840" y="3017520"/>
-            <a:ext cx="2194560" cy="548640"/>
+            <a:ext cx="2194560" cy="594359"/>
           </a:xfrm>
           <a:prstGeom prst="rect">
             <a:avLst/>
@@ -17671,7 +17671,7 @@
           <a:p>
             <a:pPr>
               <a:lnSpc>
-                <a:spcPct val="100000"/>
+                <a:spcPct val="90000"/>
               </a:lnSpc>
               <a:defRPr sz="1100">
                 <a:solidFill>
@@ -17694,7 +17694,7 @@
         <p:spPr>
           <a:xfrm>
             <a:off x="6446520" y="3657599"/>
-            <a:ext cx="274320" cy="548640"/>
+            <a:ext cx="274320" cy="594359"/>
           </a:xfrm>
           <a:prstGeom prst="rect">
             <a:avLst/>
@@ -17729,7 +17729,7 @@
         <p:spPr>
           <a:xfrm>
             <a:off x="6720840" y="3657599"/>
-            <a:ext cx="2194560" cy="548640"/>
+            <a:ext cx="2194560" cy="594359"/>
           </a:xfrm>
           <a:prstGeom prst="rect">
             <a:avLst/>
@@ -17744,7 +17744,7 @@
           <a:p>
             <a:pPr>
               <a:lnSpc>
-                <a:spcPct val="100000"/>
+                <a:spcPct val="90000"/>
               </a:lnSpc>
               <a:defRPr sz="1100">
                 <a:solidFill>
@@ -17767,7 +17767,7 @@
         <p:spPr>
           <a:xfrm>
             <a:off x="6446520" y="4297679"/>
-            <a:ext cx="274320" cy="548640"/>
+            <a:ext cx="274320" cy="594359"/>
           </a:xfrm>
           <a:prstGeom prst="rect">
             <a:avLst/>
@@ -17802,7 +17802,7 @@
         <p:spPr>
           <a:xfrm>
             <a:off x="6720840" y="4297679"/>
-            <a:ext cx="2194560" cy="548640"/>
+            <a:ext cx="2194560" cy="594359"/>
           </a:xfrm>
           <a:prstGeom prst="rect">
             <a:avLst/>
@@ -17817,7 +17817,7 @@
           <a:p>
             <a:pPr>
               <a:lnSpc>
-                <a:spcPct val="100000"/>
+                <a:spcPct val="90000"/>
               </a:lnSpc>
               <a:defRPr sz="1100">
                 <a:solidFill>
@@ -17840,7 +17840,7 @@
         <p:spPr>
           <a:xfrm>
             <a:off x="6446520" y="4937760"/>
-            <a:ext cx="274320" cy="548640"/>
+            <a:ext cx="274320" cy="594359"/>
           </a:xfrm>
           <a:prstGeom prst="rect">
             <a:avLst/>
@@ -17875,7 +17875,7 @@
         <p:spPr>
           <a:xfrm>
             <a:off x="6720840" y="4937760"/>
-            <a:ext cx="2194560" cy="548640"/>
+            <a:ext cx="2194560" cy="594359"/>
           </a:xfrm>
           <a:prstGeom prst="rect">
             <a:avLst/>
@@ -17890,7 +17890,7 @@
           <a:p>
             <a:pPr>
               <a:lnSpc>
-                <a:spcPct val="100000"/>
+                <a:spcPct val="90000"/>
               </a:lnSpc>
               <a:defRPr sz="1100">
                 <a:solidFill>
@@ -18089,7 +18089,7 @@
         <p:spPr>
           <a:xfrm>
             <a:off x="594360" y="1737360"/>
-            <a:ext cx="274320" cy="548640"/>
+            <a:ext cx="274320" cy="594359"/>
           </a:xfrm>
           <a:prstGeom prst="rect">
             <a:avLst/>
@@ -18124,7 +18124,7 @@
         <p:spPr>
           <a:xfrm>
             <a:off x="868680" y="1737360"/>
-            <a:ext cx="2194560" cy="548640"/>
+            <a:ext cx="2194560" cy="594359"/>
           </a:xfrm>
           <a:prstGeom prst="rect">
             <a:avLst/>
@@ -18139,7 +18139,7 @@
           <a:p>
             <a:pPr>
               <a:lnSpc>
-                <a:spcPct val="100000"/>
+                <a:spcPct val="90000"/>
               </a:lnSpc>
               <a:defRPr sz="1100">
                 <a:solidFill>
@@ -18162,7 +18162,7 @@
         <p:spPr>
           <a:xfrm>
             <a:off x="594360" y="2377439"/>
-            <a:ext cx="274320" cy="548640"/>
+            <a:ext cx="274320" cy="594359"/>
           </a:xfrm>
           <a:prstGeom prst="rect">
             <a:avLst/>
@@ -18197,7 +18197,7 @@
         <p:spPr>
           <a:xfrm>
             <a:off x="868680" y="2377439"/>
-            <a:ext cx="2194560" cy="548640"/>
+            <a:ext cx="2194560" cy="594359"/>
           </a:xfrm>
           <a:prstGeom prst="rect">
             <a:avLst/>
@@ -18212,7 +18212,7 @@
           <a:p>
             <a:pPr>
               <a:lnSpc>
-                <a:spcPct val="100000"/>
+                <a:spcPct val="90000"/>
               </a:lnSpc>
               <a:defRPr sz="1100">
                 <a:solidFill>
@@ -18235,7 +18235,7 @@
         <p:spPr>
           <a:xfrm>
             <a:off x="594360" y="3017520"/>
-            <a:ext cx="274320" cy="548640"/>
+            <a:ext cx="274320" cy="594359"/>
           </a:xfrm>
           <a:prstGeom prst="rect">
             <a:avLst/>
@@ -18270,7 +18270,7 @@
         <p:spPr>
           <a:xfrm>
             <a:off x="868680" y="3017520"/>
-            <a:ext cx="2194560" cy="548640"/>
+            <a:ext cx="2194560" cy="594359"/>
           </a:xfrm>
           <a:prstGeom prst="rect">
             <a:avLst/>
@@ -18285,7 +18285,7 @@
           <a:p>
             <a:pPr>
               <a:lnSpc>
-                <a:spcPct val="100000"/>
+                <a:spcPct val="90000"/>
               </a:lnSpc>
               <a:defRPr sz="1100">
                 <a:solidFill>
@@ -18308,7 +18308,7 @@
         <p:spPr>
           <a:xfrm>
             <a:off x="594360" y="3657599"/>
-            <a:ext cx="274320" cy="548640"/>
+            <a:ext cx="274320" cy="594359"/>
           </a:xfrm>
           <a:prstGeom prst="rect">
             <a:avLst/>
@@ -18343,7 +18343,7 @@
         <p:spPr>
           <a:xfrm>
             <a:off x="868680" y="3657599"/>
-            <a:ext cx="2194560" cy="548640"/>
+            <a:ext cx="2194560" cy="594359"/>
           </a:xfrm>
           <a:prstGeom prst="rect">
             <a:avLst/>
@@ -18358,7 +18358,7 @@
           <a:p>
             <a:pPr>
               <a:lnSpc>
-                <a:spcPct val="100000"/>
+                <a:spcPct val="90000"/>
               </a:lnSpc>
               <a:defRPr sz="1100">
                 <a:solidFill>
@@ -18381,7 +18381,7 @@
         <p:spPr>
           <a:xfrm>
             <a:off x="594360" y="4297679"/>
-            <a:ext cx="274320" cy="548640"/>
+            <a:ext cx="274320" cy="594359"/>
           </a:xfrm>
           <a:prstGeom prst="rect">
             <a:avLst/>
@@ -18416,7 +18416,7 @@
         <p:spPr>
           <a:xfrm>
             <a:off x="868680" y="4297679"/>
-            <a:ext cx="2194560" cy="548640"/>
+            <a:ext cx="2194560" cy="594359"/>
           </a:xfrm>
           <a:prstGeom prst="rect">
             <a:avLst/>
@@ -18431,7 +18431,7 @@
           <a:p>
             <a:pPr>
               <a:lnSpc>
-                <a:spcPct val="100000"/>
+                <a:spcPct val="90000"/>
               </a:lnSpc>
               <a:defRPr sz="1100">
                 <a:solidFill>
@@ -18454,7 +18454,7 @@
         <p:spPr>
           <a:xfrm>
             <a:off x="594360" y="4937760"/>
-            <a:ext cx="274320" cy="548640"/>
+            <a:ext cx="274320" cy="594359"/>
           </a:xfrm>
           <a:prstGeom prst="rect">
             <a:avLst/>
@@ -18489,7 +18489,7 @@
         <p:spPr>
           <a:xfrm>
             <a:off x="868680" y="4937760"/>
-            <a:ext cx="2194560" cy="548640"/>
+            <a:ext cx="2194560" cy="594359"/>
           </a:xfrm>
           <a:prstGeom prst="rect">
             <a:avLst/>
@@ -18504,7 +18504,7 @@
           <a:p>
             <a:pPr>
               <a:lnSpc>
-                <a:spcPct val="100000"/>
+                <a:spcPct val="90000"/>
               </a:lnSpc>
               <a:defRPr sz="1100">
                 <a:solidFill>
@@ -18607,7 +18607,7 @@
         <p:spPr>
           <a:xfrm>
             <a:off x="3520440" y="1737360"/>
-            <a:ext cx="274320" cy="548640"/>
+            <a:ext cx="274320" cy="594359"/>
           </a:xfrm>
           <a:prstGeom prst="rect">
             <a:avLst/>
@@ -18642,7 +18642,7 @@
         <p:spPr>
           <a:xfrm>
             <a:off x="3794760" y="1737360"/>
-            <a:ext cx="2194560" cy="548640"/>
+            <a:ext cx="2194560" cy="594359"/>
           </a:xfrm>
           <a:prstGeom prst="rect">
             <a:avLst/>
@@ -18657,7 +18657,7 @@
           <a:p>
             <a:pPr>
               <a:lnSpc>
-                <a:spcPct val="100000"/>
+                <a:spcPct val="90000"/>
               </a:lnSpc>
               <a:defRPr sz="1100">
                 <a:solidFill>
@@ -18680,7 +18680,7 @@
         <p:spPr>
           <a:xfrm>
             <a:off x="3520440" y="2377439"/>
-            <a:ext cx="274320" cy="548640"/>
+            <a:ext cx="274320" cy="594359"/>
           </a:xfrm>
           <a:prstGeom prst="rect">
             <a:avLst/>
@@ -18715,7 +18715,7 @@
         <p:spPr>
           <a:xfrm>
             <a:off x="3794760" y="2377439"/>
-            <a:ext cx="2194560" cy="548640"/>
+            <a:ext cx="2194560" cy="594359"/>
           </a:xfrm>
           <a:prstGeom prst="rect">
             <a:avLst/>
@@ -18730,7 +18730,7 @@
           <a:p>
             <a:pPr>
               <a:lnSpc>
-                <a:spcPct val="100000"/>
+                <a:spcPct val="90000"/>
               </a:lnSpc>
               <a:defRPr sz="1100">
                 <a:solidFill>
@@ -18753,7 +18753,7 @@
         <p:spPr>
           <a:xfrm>
             <a:off x="3520440" y="3017520"/>
-            <a:ext cx="274320" cy="548640"/>
+            <a:ext cx="274320" cy="594359"/>
           </a:xfrm>
           <a:prstGeom prst="rect">
             <a:avLst/>
@@ -18788,7 +18788,7 @@
         <p:spPr>
           <a:xfrm>
             <a:off x="3794760" y="3017520"/>
-            <a:ext cx="2194560" cy="548640"/>
+            <a:ext cx="2194560" cy="594359"/>
           </a:xfrm>
           <a:prstGeom prst="rect">
             <a:avLst/>
@@ -18803,7 +18803,7 @@
           <a:p>
             <a:pPr>
               <a:lnSpc>
-                <a:spcPct val="100000"/>
+                <a:spcPct val="90000"/>
               </a:lnSpc>
               <a:defRPr sz="1100">
                 <a:solidFill>
@@ -18826,7 +18826,7 @@
         <p:spPr>
           <a:xfrm>
             <a:off x="3520440" y="3657599"/>
-            <a:ext cx="274320" cy="548640"/>
+            <a:ext cx="274320" cy="594359"/>
           </a:xfrm>
           <a:prstGeom prst="rect">
             <a:avLst/>
@@ -18861,7 +18861,7 @@
         <p:spPr>
           <a:xfrm>
             <a:off x="3794760" y="3657599"/>
-            <a:ext cx="2194560" cy="548640"/>
+            <a:ext cx="2194560" cy="594359"/>
           </a:xfrm>
           <a:prstGeom prst="rect">
             <a:avLst/>
@@ -18876,7 +18876,7 @@
           <a:p>
             <a:pPr>
               <a:lnSpc>
-                <a:spcPct val="100000"/>
+                <a:spcPct val="90000"/>
               </a:lnSpc>
               <a:defRPr sz="1100">
                 <a:solidFill>
@@ -18899,7 +18899,7 @@
         <p:spPr>
           <a:xfrm>
             <a:off x="3520440" y="4297679"/>
-            <a:ext cx="274320" cy="548640"/>
+            <a:ext cx="274320" cy="594359"/>
           </a:xfrm>
           <a:prstGeom prst="rect">
             <a:avLst/>
@@ -18934,7 +18934,7 @@
         <p:spPr>
           <a:xfrm>
             <a:off x="3794760" y="4297679"/>
-            <a:ext cx="2194560" cy="548640"/>
+            <a:ext cx="2194560" cy="594359"/>
           </a:xfrm>
           <a:prstGeom prst="rect">
             <a:avLst/>
@@ -18949,7 +18949,7 @@
           <a:p>
             <a:pPr>
               <a:lnSpc>
-                <a:spcPct val="100000"/>
+                <a:spcPct val="90000"/>
               </a:lnSpc>
               <a:defRPr sz="1100">
                 <a:solidFill>
@@ -18972,7 +18972,7 @@
         <p:spPr>
           <a:xfrm>
             <a:off x="3520440" y="4937760"/>
-            <a:ext cx="274320" cy="548640"/>
+            <a:ext cx="274320" cy="594359"/>
           </a:xfrm>
           <a:prstGeom prst="rect">
             <a:avLst/>
@@ -19007,7 +19007,7 @@
         <p:spPr>
           <a:xfrm>
             <a:off x="3794760" y="4937760"/>
-            <a:ext cx="2194560" cy="548640"/>
+            <a:ext cx="2194560" cy="594359"/>
           </a:xfrm>
           <a:prstGeom prst="rect">
             <a:avLst/>
@@ -19022,7 +19022,7 @@
           <a:p>
             <a:pPr>
               <a:lnSpc>
-                <a:spcPct val="100000"/>
+                <a:spcPct val="90000"/>
               </a:lnSpc>
               <a:defRPr sz="1100">
                 <a:solidFill>
@@ -19125,7 +19125,7 @@
         <p:spPr>
           <a:xfrm>
             <a:off x="6446520" y="1737360"/>
-            <a:ext cx="274320" cy="548640"/>
+            <a:ext cx="274320" cy="594359"/>
           </a:xfrm>
           <a:prstGeom prst="rect">
             <a:avLst/>
@@ -19160,7 +19160,7 @@
         <p:spPr>
           <a:xfrm>
             <a:off x="6720840" y="1737360"/>
-            <a:ext cx="2194560" cy="548640"/>
+            <a:ext cx="2194560" cy="594359"/>
           </a:xfrm>
           <a:prstGeom prst="rect">
             <a:avLst/>
@@ -19175,7 +19175,7 @@
           <a:p>
             <a:pPr>
               <a:lnSpc>
-                <a:spcPct val="100000"/>
+                <a:spcPct val="90000"/>
               </a:lnSpc>
               <a:defRPr sz="1100">
                 <a:solidFill>
@@ -19198,7 +19198,7 @@
         <p:spPr>
           <a:xfrm>
             <a:off x="6446520" y="2377439"/>
-            <a:ext cx="274320" cy="548640"/>
+            <a:ext cx="274320" cy="594359"/>
           </a:xfrm>
           <a:prstGeom prst="rect">
             <a:avLst/>
@@ -19233,7 +19233,7 @@
         <p:spPr>
           <a:xfrm>
             <a:off x="6720840" y="2377439"/>
-            <a:ext cx="2194560" cy="548640"/>
+            <a:ext cx="2194560" cy="594359"/>
           </a:xfrm>
           <a:prstGeom prst="rect">
             <a:avLst/>
@@ -19248,7 +19248,7 @@
           <a:p>
             <a:pPr>
               <a:lnSpc>
-                <a:spcPct val="100000"/>
+                <a:spcPct val="90000"/>
               </a:lnSpc>
               <a:defRPr sz="1100">
                 <a:solidFill>
@@ -19271,7 +19271,7 @@
         <p:spPr>
           <a:xfrm>
             <a:off x="6446520" y="3017520"/>
-            <a:ext cx="274320" cy="548640"/>
+            <a:ext cx="274320" cy="594359"/>
           </a:xfrm>
           <a:prstGeom prst="rect">
             <a:avLst/>
@@ -19306,7 +19306,7 @@
         <p:spPr>
           <a:xfrm>
             <a:off x="6720840" y="3017520"/>
-            <a:ext cx="2194560" cy="548640"/>
+            <a:ext cx="2194560" cy="594359"/>
           </a:xfrm>
           <a:prstGeom prst="rect">
             <a:avLst/>
@@ -19321,7 +19321,7 @@
           <a:p>
             <a:pPr>
               <a:lnSpc>
-                <a:spcPct val="100000"/>
+                <a:spcPct val="90000"/>
               </a:lnSpc>
               <a:defRPr sz="1100">
                 <a:solidFill>
@@ -19344,7 +19344,7 @@
         <p:spPr>
           <a:xfrm>
             <a:off x="6446520" y="3657599"/>
-            <a:ext cx="274320" cy="548640"/>
+            <a:ext cx="274320" cy="594359"/>
           </a:xfrm>
           <a:prstGeom prst="rect">
             <a:avLst/>
@@ -19379,7 +19379,7 @@
         <p:spPr>
           <a:xfrm>
             <a:off x="6720840" y="3657599"/>
-            <a:ext cx="2194560" cy="548640"/>
+            <a:ext cx="2194560" cy="594359"/>
           </a:xfrm>
           <a:prstGeom prst="rect">
             <a:avLst/>
@@ -19394,7 +19394,7 @@
           <a:p>
             <a:pPr>
               <a:lnSpc>
-                <a:spcPct val="100000"/>
+                <a:spcPct val="90000"/>
               </a:lnSpc>
               <a:defRPr sz="1100">
                 <a:solidFill>
@@ -19417,7 +19417,7 @@
         <p:spPr>
           <a:xfrm>
             <a:off x="6446520" y="4297679"/>
-            <a:ext cx="274320" cy="548640"/>
+            <a:ext cx="274320" cy="594359"/>
           </a:xfrm>
           <a:prstGeom prst="rect">
             <a:avLst/>
@@ -19452,7 +19452,7 @@
         <p:spPr>
           <a:xfrm>
             <a:off x="6720840" y="4297679"/>
-            <a:ext cx="2194560" cy="548640"/>
+            <a:ext cx="2194560" cy="594359"/>
           </a:xfrm>
           <a:prstGeom prst="rect">
             <a:avLst/>
@@ -19467,7 +19467,7 @@
           <a:p>
             <a:pPr>
               <a:lnSpc>
-                <a:spcPct val="100000"/>
+                <a:spcPct val="90000"/>
               </a:lnSpc>
               <a:defRPr sz="1100">
                 <a:solidFill>
@@ -19490,7 +19490,7 @@
         <p:spPr>
           <a:xfrm>
             <a:off x="6446520" y="4937760"/>
-            <a:ext cx="274320" cy="548640"/>
+            <a:ext cx="274320" cy="594359"/>
           </a:xfrm>
           <a:prstGeom prst="rect">
             <a:avLst/>
@@ -19525,7 +19525,7 @@
         <p:spPr>
           <a:xfrm>
             <a:off x="6720840" y="4937760"/>
-            <a:ext cx="2194560" cy="548640"/>
+            <a:ext cx="2194560" cy="594359"/>
           </a:xfrm>
           <a:prstGeom prst="rect">
             <a:avLst/>
@@ -19540,7 +19540,7 @@
           <a:p>
             <a:pPr>
               <a:lnSpc>
-                <a:spcPct val="100000"/>
+                <a:spcPct val="90000"/>
               </a:lnSpc>
               <a:defRPr sz="1100">
                 <a:solidFill>
@@ -19739,7 +19739,7 @@
         <p:spPr>
           <a:xfrm>
             <a:off x="594360" y="1737360"/>
-            <a:ext cx="274320" cy="548640"/>
+            <a:ext cx="274320" cy="594359"/>
           </a:xfrm>
           <a:prstGeom prst="rect">
             <a:avLst/>
@@ -19774,7 +19774,7 @@
         <p:spPr>
           <a:xfrm>
             <a:off x="868680" y="1737360"/>
-            <a:ext cx="2194560" cy="548640"/>
+            <a:ext cx="2194560" cy="594359"/>
           </a:xfrm>
           <a:prstGeom prst="rect">
             <a:avLst/>
@@ -19789,7 +19789,7 @@
           <a:p>
             <a:pPr>
               <a:lnSpc>
-                <a:spcPct val="100000"/>
+                <a:spcPct val="90000"/>
               </a:lnSpc>
               <a:defRPr sz="1100">
                 <a:solidFill>
@@ -19812,7 +19812,7 @@
         <p:spPr>
           <a:xfrm>
             <a:off x="594360" y="2377439"/>
-            <a:ext cx="274320" cy="548640"/>
+            <a:ext cx="274320" cy="594359"/>
           </a:xfrm>
           <a:prstGeom prst="rect">
             <a:avLst/>
@@ -19847,7 +19847,7 @@
         <p:spPr>
           <a:xfrm>
             <a:off x="868680" y="2377439"/>
-            <a:ext cx="2194560" cy="548640"/>
+            <a:ext cx="2194560" cy="594359"/>
           </a:xfrm>
           <a:prstGeom prst="rect">
             <a:avLst/>
@@ -19862,7 +19862,7 @@
           <a:p>
             <a:pPr>
               <a:lnSpc>
-                <a:spcPct val="100000"/>
+                <a:spcPct val="90000"/>
               </a:lnSpc>
               <a:defRPr sz="1100">
                 <a:solidFill>
@@ -19885,7 +19885,7 @@
         <p:spPr>
           <a:xfrm>
             <a:off x="594360" y="3017520"/>
-            <a:ext cx="274320" cy="548640"/>
+            <a:ext cx="274320" cy="594359"/>
           </a:xfrm>
           <a:prstGeom prst="rect">
             <a:avLst/>
@@ -19920,7 +19920,7 @@
         <p:spPr>
           <a:xfrm>
             <a:off x="868680" y="3017520"/>
-            <a:ext cx="2194560" cy="548640"/>
+            <a:ext cx="2194560" cy="594359"/>
           </a:xfrm>
           <a:prstGeom prst="rect">
             <a:avLst/>
@@ -19935,7 +19935,7 @@
           <a:p>
             <a:pPr>
               <a:lnSpc>
-                <a:spcPct val="100000"/>
+                <a:spcPct val="90000"/>
               </a:lnSpc>
               <a:defRPr sz="1100">
                 <a:solidFill>
@@ -19958,7 +19958,7 @@
         <p:spPr>
           <a:xfrm>
             <a:off x="594360" y="3657599"/>
-            <a:ext cx="274320" cy="548640"/>
+            <a:ext cx="274320" cy="594359"/>
           </a:xfrm>
           <a:prstGeom prst="rect">
             <a:avLst/>
@@ -19993,7 +19993,7 @@
         <p:spPr>
           <a:xfrm>
             <a:off x="868680" y="3657599"/>
-            <a:ext cx="2194560" cy="548640"/>
+            <a:ext cx="2194560" cy="594359"/>
           </a:xfrm>
           <a:prstGeom prst="rect">
             <a:avLst/>
@@ -20008,7 +20008,7 @@
           <a:p>
             <a:pPr>
               <a:lnSpc>
-                <a:spcPct val="100000"/>
+                <a:spcPct val="90000"/>
               </a:lnSpc>
               <a:defRPr sz="1100">
                 <a:solidFill>
@@ -20031,7 +20031,7 @@
         <p:spPr>
           <a:xfrm>
             <a:off x="594360" y="4297679"/>
-            <a:ext cx="274320" cy="548640"/>
+            <a:ext cx="274320" cy="594359"/>
           </a:xfrm>
           <a:prstGeom prst="rect">
             <a:avLst/>
@@ -20066,7 +20066,7 @@
         <p:spPr>
           <a:xfrm>
             <a:off x="868680" y="4297679"/>
-            <a:ext cx="2194560" cy="548640"/>
+            <a:ext cx="2194560" cy="594359"/>
           </a:xfrm>
           <a:prstGeom prst="rect">
             <a:avLst/>
@@ -20081,7 +20081,7 @@
           <a:p>
             <a:pPr>
               <a:lnSpc>
-                <a:spcPct val="100000"/>
+                <a:spcPct val="90000"/>
               </a:lnSpc>
               <a:defRPr sz="1100">
                 <a:solidFill>
@@ -20104,7 +20104,7 @@
         <p:spPr>
           <a:xfrm>
             <a:off x="594360" y="4937760"/>
-            <a:ext cx="274320" cy="548640"/>
+            <a:ext cx="274320" cy="594359"/>
           </a:xfrm>
           <a:prstGeom prst="rect">
             <a:avLst/>
@@ -20139,7 +20139,7 @@
         <p:spPr>
           <a:xfrm>
             <a:off x="868680" y="4937760"/>
-            <a:ext cx="2194560" cy="548640"/>
+            <a:ext cx="2194560" cy="594359"/>
           </a:xfrm>
           <a:prstGeom prst="rect">
             <a:avLst/>
@@ -20154,7 +20154,7 @@
           <a:p>
             <a:pPr>
               <a:lnSpc>
-                <a:spcPct val="100000"/>
+                <a:spcPct val="90000"/>
               </a:lnSpc>
               <a:defRPr sz="1100">
                 <a:solidFill>
@@ -20257,7 +20257,7 @@
         <p:spPr>
           <a:xfrm>
             <a:off x="3520440" y="1737360"/>
-            <a:ext cx="274320" cy="548640"/>
+            <a:ext cx="274320" cy="594359"/>
           </a:xfrm>
           <a:prstGeom prst="rect">
             <a:avLst/>
@@ -20292,7 +20292,7 @@
         <p:spPr>
           <a:xfrm>
             <a:off x="3794760" y="1737360"/>
-            <a:ext cx="2194560" cy="548640"/>
+            <a:ext cx="2194560" cy="594359"/>
           </a:xfrm>
           <a:prstGeom prst="rect">
             <a:avLst/>
@@ -20307,7 +20307,7 @@
           <a:p>
             <a:pPr>
               <a:lnSpc>
-                <a:spcPct val="100000"/>
+                <a:spcPct val="90000"/>
               </a:lnSpc>
               <a:defRPr sz="1100">
                 <a:solidFill>
@@ -20330,7 +20330,7 @@
         <p:spPr>
           <a:xfrm>
             <a:off x="3520440" y="2377439"/>
-            <a:ext cx="274320" cy="548640"/>
+            <a:ext cx="274320" cy="594359"/>
           </a:xfrm>
           <a:prstGeom prst="rect">
             <a:avLst/>
@@ -20365,7 +20365,7 @@
         <p:spPr>
           <a:xfrm>
             <a:off x="3794760" y="2377439"/>
-            <a:ext cx="2194560" cy="548640"/>
+            <a:ext cx="2194560" cy="594359"/>
           </a:xfrm>
           <a:prstGeom prst="rect">
             <a:avLst/>
@@ -20380,7 +20380,7 @@
           <a:p>
             <a:pPr>
               <a:lnSpc>
-                <a:spcPct val="100000"/>
+                <a:spcPct val="90000"/>
               </a:lnSpc>
               <a:defRPr sz="1100">
                 <a:solidFill>
@@ -20403,7 +20403,7 @@
         <p:spPr>
           <a:xfrm>
             <a:off x="3520440" y="3017520"/>
-            <a:ext cx="274320" cy="548640"/>
+            <a:ext cx="274320" cy="594359"/>
           </a:xfrm>
           <a:prstGeom prst="rect">
             <a:avLst/>
@@ -20438,7 +20438,7 @@
         <p:spPr>
           <a:xfrm>
             <a:off x="3794760" y="3017520"/>
-            <a:ext cx="2194560" cy="548640"/>
+            <a:ext cx="2194560" cy="594359"/>
           </a:xfrm>
           <a:prstGeom prst="rect">
             <a:avLst/>
@@ -20453,7 +20453,7 @@
           <a:p>
             <a:pPr>
               <a:lnSpc>
-                <a:spcPct val="100000"/>
+                <a:spcPct val="90000"/>
               </a:lnSpc>
               <a:defRPr sz="1100">
                 <a:solidFill>
@@ -20476,7 +20476,7 @@
         <p:spPr>
           <a:xfrm>
             <a:off x="3520440" y="3657599"/>
-            <a:ext cx="274320" cy="548640"/>
+            <a:ext cx="274320" cy="594359"/>
           </a:xfrm>
           <a:prstGeom prst="rect">
             <a:avLst/>
@@ -20511,7 +20511,7 @@
         <p:spPr>
           <a:xfrm>
             <a:off x="3794760" y="3657599"/>
-            <a:ext cx="2194560" cy="548640"/>
+            <a:ext cx="2194560" cy="594359"/>
           </a:xfrm>
           <a:prstGeom prst="rect">
             <a:avLst/>
@@ -20526,7 +20526,7 @@
           <a:p>
             <a:pPr>
               <a:lnSpc>
-                <a:spcPct val="100000"/>
+                <a:spcPct val="90000"/>
               </a:lnSpc>
               <a:defRPr sz="1100">
                 <a:solidFill>
@@ -20549,7 +20549,7 @@
         <p:spPr>
           <a:xfrm>
             <a:off x="3520440" y="4297679"/>
-            <a:ext cx="274320" cy="548640"/>
+            <a:ext cx="274320" cy="594359"/>
           </a:xfrm>
           <a:prstGeom prst="rect">
             <a:avLst/>
@@ -20584,7 +20584,7 @@
         <p:spPr>
           <a:xfrm>
             <a:off x="3794760" y="4297679"/>
-            <a:ext cx="2194560" cy="548640"/>
+            <a:ext cx="2194560" cy="594359"/>
           </a:xfrm>
           <a:prstGeom prst="rect">
             <a:avLst/>
@@ -20599,7 +20599,7 @@
           <a:p>
             <a:pPr>
               <a:lnSpc>
-                <a:spcPct val="100000"/>
+                <a:spcPct val="90000"/>
               </a:lnSpc>
               <a:defRPr sz="1100">
                 <a:solidFill>
@@ -20622,7 +20622,7 @@
         <p:spPr>
           <a:xfrm>
             <a:off x="3520440" y="4937760"/>
-            <a:ext cx="274320" cy="548640"/>
+            <a:ext cx="274320" cy="594359"/>
           </a:xfrm>
           <a:prstGeom prst="rect">
             <a:avLst/>
@@ -20657,7 +20657,7 @@
         <p:spPr>
           <a:xfrm>
             <a:off x="3794760" y="4937760"/>
-            <a:ext cx="2194560" cy="548640"/>
+            <a:ext cx="2194560" cy="594359"/>
           </a:xfrm>
           <a:prstGeom prst="rect">
             <a:avLst/>
@@ -20672,7 +20672,7 @@
           <a:p>
             <a:pPr>
               <a:lnSpc>
-                <a:spcPct val="100000"/>
+                <a:spcPct val="90000"/>
               </a:lnSpc>
               <a:defRPr sz="1100">
                 <a:solidFill>
@@ -20775,7 +20775,7 @@
         <p:spPr>
           <a:xfrm>
             <a:off x="6446520" y="1737360"/>
-            <a:ext cx="274320" cy="548640"/>
+            <a:ext cx="274320" cy="594359"/>
           </a:xfrm>
           <a:prstGeom prst="rect">
             <a:avLst/>
@@ -20810,7 +20810,7 @@
         <p:spPr>
           <a:xfrm>
             <a:off x="6720840" y="1737360"/>
-            <a:ext cx="2194560" cy="548640"/>
+            <a:ext cx="2194560" cy="594359"/>
           </a:xfrm>
           <a:prstGeom prst="rect">
             <a:avLst/>
@@ -20825,7 +20825,7 @@
           <a:p>
             <a:pPr>
               <a:lnSpc>
-                <a:spcPct val="100000"/>
+                <a:spcPct val="90000"/>
               </a:lnSpc>
               <a:defRPr sz="1100">
                 <a:solidFill>
@@ -20848,7 +20848,7 @@
         <p:spPr>
           <a:xfrm>
             <a:off x="6446520" y="2377439"/>
-            <a:ext cx="274320" cy="548640"/>
+            <a:ext cx="274320" cy="594359"/>
           </a:xfrm>
           <a:prstGeom prst="rect">
             <a:avLst/>
@@ -20883,7 +20883,7 @@
         <p:spPr>
           <a:xfrm>
             <a:off x="6720840" y="2377439"/>
-            <a:ext cx="2194560" cy="548640"/>
+            <a:ext cx="2194560" cy="594359"/>
           </a:xfrm>
           <a:prstGeom prst="rect">
             <a:avLst/>
@@ -20898,7 +20898,7 @@
           <a:p>
             <a:pPr>
               <a:lnSpc>
-                <a:spcPct val="100000"/>
+                <a:spcPct val="90000"/>
               </a:lnSpc>
               <a:defRPr sz="1100">
                 <a:solidFill>
@@ -20921,7 +20921,7 @@
         <p:spPr>
           <a:xfrm>
             <a:off x="6446520" y="3017520"/>
-            <a:ext cx="274320" cy="548640"/>
+            <a:ext cx="274320" cy="594359"/>
           </a:xfrm>
           <a:prstGeom prst="rect">
             <a:avLst/>
@@ -20956,7 +20956,7 @@
         <p:spPr>
           <a:xfrm>
             <a:off x="6720840" y="3017520"/>
-            <a:ext cx="2194560" cy="548640"/>
+            <a:ext cx="2194560" cy="594359"/>
           </a:xfrm>
           <a:prstGeom prst="rect">
             <a:avLst/>
@@ -20971,7 +20971,7 @@
           <a:p>
             <a:pPr>
               <a:lnSpc>
-                <a:spcPct val="100000"/>
+                <a:spcPct val="90000"/>
               </a:lnSpc>
               <a:defRPr sz="1100">
                 <a:solidFill>
@@ -20994,7 +20994,7 @@
         <p:spPr>
           <a:xfrm>
             <a:off x="6446520" y="3657599"/>
-            <a:ext cx="274320" cy="548640"/>
+            <a:ext cx="274320" cy="594359"/>
           </a:xfrm>
           <a:prstGeom prst="rect">
             <a:avLst/>
@@ -21029,7 +21029,7 @@
         <p:spPr>
           <a:xfrm>
             <a:off x="6720840" y="3657599"/>
-            <a:ext cx="2194560" cy="548640"/>
+            <a:ext cx="2194560" cy="594359"/>
           </a:xfrm>
           <a:prstGeom prst="rect">
             <a:avLst/>
@@ -21044,7 +21044,7 @@
           <a:p>
             <a:pPr>
               <a:lnSpc>
-                <a:spcPct val="100000"/>
+                <a:spcPct val="90000"/>
               </a:lnSpc>
               <a:defRPr sz="1100">
                 <a:solidFill>
@@ -21067,7 +21067,7 @@
         <p:spPr>
           <a:xfrm>
             <a:off x="6446520" y="4297679"/>
-            <a:ext cx="274320" cy="548640"/>
+            <a:ext cx="274320" cy="594359"/>
           </a:xfrm>
           <a:prstGeom prst="rect">
             <a:avLst/>
@@ -21102,7 +21102,7 @@
         <p:spPr>
           <a:xfrm>
             <a:off x="6720840" y="4297679"/>
-            <a:ext cx="2194560" cy="548640"/>
+            <a:ext cx="2194560" cy="594359"/>
           </a:xfrm>
           <a:prstGeom prst="rect">
             <a:avLst/>
@@ -21117,7 +21117,7 @@
           <a:p>
             <a:pPr>
               <a:lnSpc>
-                <a:spcPct val="100000"/>
+                <a:spcPct val="90000"/>
               </a:lnSpc>
               <a:defRPr sz="1100">
                 <a:solidFill>
@@ -21140,7 +21140,7 @@
         <p:spPr>
           <a:xfrm>
             <a:off x="6446520" y="4937760"/>
-            <a:ext cx="274320" cy="548640"/>
+            <a:ext cx="274320" cy="594359"/>
           </a:xfrm>
           <a:prstGeom prst="rect">
             <a:avLst/>
@@ -21175,7 +21175,7 @@
         <p:spPr>
           <a:xfrm>
             <a:off x="6720840" y="4937760"/>
-            <a:ext cx="2194560" cy="548640"/>
+            <a:ext cx="2194560" cy="594359"/>
           </a:xfrm>
           <a:prstGeom prst="rect">
             <a:avLst/>
@@ -21190,7 +21190,7 @@
           <a:p>
             <a:pPr>
               <a:lnSpc>
-                <a:spcPct val="100000"/>
+                <a:spcPct val="90000"/>
               </a:lnSpc>
               <a:defRPr sz="1100">
                 <a:solidFill>
@@ -21389,7 +21389,7 @@
         <p:spPr>
           <a:xfrm>
             <a:off x="594360" y="1737360"/>
-            <a:ext cx="274320" cy="548640"/>
+            <a:ext cx="274320" cy="594359"/>
           </a:xfrm>
           <a:prstGeom prst="rect">
             <a:avLst/>
@@ -21424,7 +21424,7 @@
         <p:spPr>
           <a:xfrm>
             <a:off x="868680" y="1737360"/>
-            <a:ext cx="2194560" cy="548640"/>
+            <a:ext cx="2194560" cy="594359"/>
           </a:xfrm>
           <a:prstGeom prst="rect">
             <a:avLst/>
@@ -21439,7 +21439,7 @@
           <a:p>
             <a:pPr>
               <a:lnSpc>
-                <a:spcPct val="100000"/>
+                <a:spcPct val="90000"/>
               </a:lnSpc>
               <a:defRPr sz="1100">
                 <a:solidFill>
@@ -21462,7 +21462,7 @@
         <p:spPr>
           <a:xfrm>
             <a:off x="594360" y="2377439"/>
-            <a:ext cx="274320" cy="548640"/>
+            <a:ext cx="274320" cy="594359"/>
           </a:xfrm>
           <a:prstGeom prst="rect">
             <a:avLst/>
@@ -21497,7 +21497,7 @@
         <p:spPr>
           <a:xfrm>
             <a:off x="868680" y="2377439"/>
-            <a:ext cx="2194560" cy="548640"/>
+            <a:ext cx="2194560" cy="594359"/>
           </a:xfrm>
           <a:prstGeom prst="rect">
             <a:avLst/>
@@ -21512,7 +21512,7 @@
           <a:p>
             <a:pPr>
               <a:lnSpc>
-                <a:spcPct val="100000"/>
+                <a:spcPct val="90000"/>
               </a:lnSpc>
               <a:defRPr sz="1100">
                 <a:solidFill>
@@ -21535,7 +21535,7 @@
         <p:spPr>
           <a:xfrm>
             <a:off x="594360" y="3017520"/>
-            <a:ext cx="274320" cy="548640"/>
+            <a:ext cx="274320" cy="594359"/>
           </a:xfrm>
           <a:prstGeom prst="rect">
             <a:avLst/>
@@ -21570,7 +21570,7 @@
         <p:spPr>
           <a:xfrm>
             <a:off x="868680" y="3017520"/>
-            <a:ext cx="2194560" cy="548640"/>
+            <a:ext cx="2194560" cy="594359"/>
           </a:xfrm>
           <a:prstGeom prst="rect">
             <a:avLst/>
@@ -21585,7 +21585,7 @@
           <a:p>
             <a:pPr>
               <a:lnSpc>
-                <a:spcPct val="100000"/>
+                <a:spcPct val="90000"/>
               </a:lnSpc>
               <a:defRPr sz="1100">
                 <a:solidFill>
@@ -21608,7 +21608,7 @@
         <p:spPr>
           <a:xfrm>
             <a:off x="594360" y="3657599"/>
-            <a:ext cx="274320" cy="548640"/>
+            <a:ext cx="274320" cy="594359"/>
           </a:xfrm>
           <a:prstGeom prst="rect">
             <a:avLst/>
@@ -21643,7 +21643,7 @@
         <p:spPr>
           <a:xfrm>
             <a:off x="868680" y="3657599"/>
-            <a:ext cx="2194560" cy="548640"/>
+            <a:ext cx="2194560" cy="594359"/>
           </a:xfrm>
           <a:prstGeom prst="rect">
             <a:avLst/>
@@ -21658,7 +21658,7 @@
           <a:p>
             <a:pPr>
               <a:lnSpc>
-                <a:spcPct val="100000"/>
+                <a:spcPct val="90000"/>
               </a:lnSpc>
               <a:defRPr sz="1100">
                 <a:solidFill>
@@ -21681,7 +21681,7 @@
         <p:spPr>
           <a:xfrm>
             <a:off x="594360" y="4297679"/>
-            <a:ext cx="274320" cy="548640"/>
+            <a:ext cx="274320" cy="594359"/>
           </a:xfrm>
           <a:prstGeom prst="rect">
             <a:avLst/>
@@ -21716,7 +21716,7 @@
         <p:spPr>
           <a:xfrm>
             <a:off x="868680" y="4297679"/>
-            <a:ext cx="2194560" cy="548640"/>
+            <a:ext cx="2194560" cy="594359"/>
           </a:xfrm>
           <a:prstGeom prst="rect">
             <a:avLst/>
@@ -21731,7 +21731,7 @@
           <a:p>
             <a:pPr>
               <a:lnSpc>
-                <a:spcPct val="100000"/>
+                <a:spcPct val="90000"/>
               </a:lnSpc>
               <a:defRPr sz="1100">
                 <a:solidFill>
@@ -21754,7 +21754,7 @@
         <p:spPr>
           <a:xfrm>
             <a:off x="594360" y="4937760"/>
-            <a:ext cx="274320" cy="548640"/>
+            <a:ext cx="274320" cy="594359"/>
           </a:xfrm>
           <a:prstGeom prst="rect">
             <a:avLst/>
@@ -21789,7 +21789,7 @@
         <p:spPr>
           <a:xfrm>
             <a:off x="868680" y="4937760"/>
-            <a:ext cx="2194560" cy="548640"/>
+            <a:ext cx="2194560" cy="594359"/>
           </a:xfrm>
           <a:prstGeom prst="rect">
             <a:avLst/>
@@ -21804,7 +21804,7 @@
           <a:p>
             <a:pPr>
               <a:lnSpc>
-                <a:spcPct val="100000"/>
+                <a:spcPct val="90000"/>
               </a:lnSpc>
               <a:defRPr sz="1100">
                 <a:solidFill>
@@ -21907,7 +21907,7 @@
         <p:spPr>
           <a:xfrm>
             <a:off x="3520440" y="1737360"/>
-            <a:ext cx="274320" cy="548640"/>
+            <a:ext cx="274320" cy="594359"/>
           </a:xfrm>
           <a:prstGeom prst="rect">
             <a:avLst/>
@@ -21942,7 +21942,7 @@
         <p:spPr>
           <a:xfrm>
             <a:off x="3794760" y="1737360"/>
-            <a:ext cx="2194560" cy="548640"/>
+            <a:ext cx="2194560" cy="594359"/>
           </a:xfrm>
           <a:prstGeom prst="rect">
             <a:avLst/>
@@ -21957,7 +21957,7 @@
           <a:p>
             <a:pPr>
               <a:lnSpc>
-                <a:spcPct val="100000"/>
+                <a:spcPct val="90000"/>
               </a:lnSpc>
               <a:defRPr sz="1100">
                 <a:solidFill>
@@ -21980,7 +21980,7 @@
         <p:spPr>
           <a:xfrm>
             <a:off x="3520440" y="2377439"/>
-            <a:ext cx="274320" cy="548640"/>
+            <a:ext cx="274320" cy="594359"/>
           </a:xfrm>
           <a:prstGeom prst="rect">
             <a:avLst/>
@@ -22015,7 +22015,7 @@
         <p:spPr>
           <a:xfrm>
             <a:off x="3794760" y="2377439"/>
-            <a:ext cx="2194560" cy="548640"/>
+            <a:ext cx="2194560" cy="594359"/>
           </a:xfrm>
           <a:prstGeom prst="rect">
             <a:avLst/>
@@ -22030,7 +22030,7 @@
           <a:p>
             <a:pPr>
               <a:lnSpc>
-                <a:spcPct val="100000"/>
+                <a:spcPct val="90000"/>
               </a:lnSpc>
               <a:defRPr sz="1100">
                 <a:solidFill>
@@ -22053,7 +22053,7 @@
         <p:spPr>
           <a:xfrm>
             <a:off x="3520440" y="3017520"/>
-            <a:ext cx="274320" cy="548640"/>
+            <a:ext cx="274320" cy="594359"/>
           </a:xfrm>
           <a:prstGeom prst="rect">
             <a:avLst/>
@@ -22088,7 +22088,7 @@
         <p:spPr>
           <a:xfrm>
             <a:off x="3794760" y="3017520"/>
-            <a:ext cx="2194560" cy="548640"/>
+            <a:ext cx="2194560" cy="594359"/>
           </a:xfrm>
           <a:prstGeom prst="rect">
             <a:avLst/>
@@ -22103,7 +22103,7 @@
           <a:p>
             <a:pPr>
               <a:lnSpc>
-                <a:spcPct val="100000"/>
+                <a:spcPct val="90000"/>
               </a:lnSpc>
               <a:defRPr sz="1100">
                 <a:solidFill>
@@ -22126,7 +22126,7 @@
         <p:spPr>
           <a:xfrm>
             <a:off x="3520440" y="3657599"/>
-            <a:ext cx="274320" cy="548640"/>
+            <a:ext cx="274320" cy="594359"/>
           </a:xfrm>
           <a:prstGeom prst="rect">
             <a:avLst/>
@@ -22161,7 +22161,7 @@
         <p:spPr>
           <a:xfrm>
             <a:off x="3794760" y="3657599"/>
-            <a:ext cx="2194560" cy="548640"/>
+            <a:ext cx="2194560" cy="594359"/>
           </a:xfrm>
           <a:prstGeom prst="rect">
             <a:avLst/>
@@ -22176,7 +22176,7 @@
           <a:p>
             <a:pPr>
               <a:lnSpc>
-                <a:spcPct val="100000"/>
+                <a:spcPct val="90000"/>
               </a:lnSpc>
               <a:defRPr sz="1100">
                 <a:solidFill>
@@ -22199,7 +22199,7 @@
         <p:spPr>
           <a:xfrm>
             <a:off x="3520440" y="4297679"/>
-            <a:ext cx="274320" cy="548640"/>
+            <a:ext cx="274320" cy="594359"/>
           </a:xfrm>
           <a:prstGeom prst="rect">
             <a:avLst/>
@@ -22234,7 +22234,7 @@
         <p:spPr>
           <a:xfrm>
             <a:off x="3794760" y="4297679"/>
-            <a:ext cx="2194560" cy="548640"/>
+            <a:ext cx="2194560" cy="594359"/>
           </a:xfrm>
           <a:prstGeom prst="rect">
             <a:avLst/>
@@ -22249,7 +22249,7 @@
           <a:p>
             <a:pPr>
               <a:lnSpc>
-                <a:spcPct val="100000"/>
+                <a:spcPct val="90000"/>
               </a:lnSpc>
               <a:defRPr sz="1100">
                 <a:solidFill>
@@ -22272,7 +22272,7 @@
         <p:spPr>
           <a:xfrm>
             <a:off x="3520440" y="4937760"/>
-            <a:ext cx="274320" cy="548640"/>
+            <a:ext cx="274320" cy="594359"/>
           </a:xfrm>
           <a:prstGeom prst="rect">
             <a:avLst/>
@@ -22307,7 +22307,7 @@
         <p:spPr>
           <a:xfrm>
             <a:off x="3794760" y="4937760"/>
-            <a:ext cx="2194560" cy="548640"/>
+            <a:ext cx="2194560" cy="594359"/>
           </a:xfrm>
           <a:prstGeom prst="rect">
             <a:avLst/>
@@ -22322,7 +22322,7 @@
           <a:p>
             <a:pPr>
               <a:lnSpc>
-                <a:spcPct val="100000"/>
+                <a:spcPct val="90000"/>
               </a:lnSpc>
               <a:defRPr sz="1100">
                 <a:solidFill>
@@ -22425,7 +22425,7 @@
         <p:spPr>
           <a:xfrm>
             <a:off x="6446520" y="1737360"/>
-            <a:ext cx="274320" cy="548640"/>
+            <a:ext cx="274320" cy="594359"/>
           </a:xfrm>
           <a:prstGeom prst="rect">
             <a:avLst/>
@@ -22460,7 +22460,7 @@
         <p:spPr>
           <a:xfrm>
             <a:off x="6720840" y="1737360"/>
-            <a:ext cx="2194560" cy="548640"/>
+            <a:ext cx="2194560" cy="594359"/>
           </a:xfrm>
           <a:prstGeom prst="rect">
             <a:avLst/>
@@ -22475,7 +22475,7 @@
           <a:p>
             <a:pPr>
               <a:lnSpc>
-                <a:spcPct val="100000"/>
+                <a:spcPct val="90000"/>
               </a:lnSpc>
               <a:defRPr sz="1100">
                 <a:solidFill>
@@ -22498,7 +22498,7 @@
         <p:spPr>
           <a:xfrm>
             <a:off x="6446520" y="2377439"/>
-            <a:ext cx="274320" cy="548640"/>
+            <a:ext cx="274320" cy="594359"/>
           </a:xfrm>
           <a:prstGeom prst="rect">
             <a:avLst/>
@@ -22533,7 +22533,7 @@
         <p:spPr>
           <a:xfrm>
             <a:off x="6720840" y="2377439"/>
-            <a:ext cx="2194560" cy="548640"/>
+            <a:ext cx="2194560" cy="594359"/>
           </a:xfrm>
           <a:prstGeom prst="rect">
             <a:avLst/>
@@ -22548,7 +22548,7 @@
           <a:p>
             <a:pPr>
               <a:lnSpc>
-                <a:spcPct val="100000"/>
+                <a:spcPct val="90000"/>
               </a:lnSpc>
               <a:defRPr sz="1100">
                 <a:solidFill>
@@ -22571,7 +22571,7 @@
         <p:spPr>
           <a:xfrm>
             <a:off x="6446520" y="3017520"/>
-            <a:ext cx="274320" cy="548640"/>
+            <a:ext cx="274320" cy="594359"/>
           </a:xfrm>
           <a:prstGeom prst="rect">
             <a:avLst/>
@@ -22606,7 +22606,7 @@
         <p:spPr>
           <a:xfrm>
             <a:off x="6720840" y="3017520"/>
-            <a:ext cx="2194560" cy="548640"/>
+            <a:ext cx="2194560" cy="594359"/>
           </a:xfrm>
           <a:prstGeom prst="rect">
             <a:avLst/>
@@ -22621,7 +22621,7 @@
           <a:p>
             <a:pPr>
               <a:lnSpc>
-                <a:spcPct val="100000"/>
+                <a:spcPct val="90000"/>
               </a:lnSpc>
               <a:defRPr sz="1100">
                 <a:solidFill>
@@ -22644,7 +22644,7 @@
         <p:spPr>
           <a:xfrm>
             <a:off x="6446520" y="3657599"/>
-            <a:ext cx="274320" cy="548640"/>
+            <a:ext cx="274320" cy="594359"/>
           </a:xfrm>
           <a:prstGeom prst="rect">
             <a:avLst/>
@@ -22679,7 +22679,7 @@
         <p:spPr>
           <a:xfrm>
             <a:off x="6720840" y="3657599"/>
-            <a:ext cx="2194560" cy="548640"/>
+            <a:ext cx="2194560" cy="594359"/>
           </a:xfrm>
           <a:prstGeom prst="rect">
             <a:avLst/>
@@ -22694,7 +22694,7 @@
           <a:p>
             <a:pPr>
               <a:lnSpc>
-                <a:spcPct val="100000"/>
+                <a:spcPct val="90000"/>
               </a:lnSpc>
               <a:defRPr sz="1100">
                 <a:solidFill>
@@ -22717,7 +22717,7 @@
         <p:spPr>
           <a:xfrm>
             <a:off x="6446520" y="4297679"/>
-            <a:ext cx="274320" cy="548640"/>
+            <a:ext cx="274320" cy="594359"/>
           </a:xfrm>
           <a:prstGeom prst="rect">
             <a:avLst/>
@@ -22752,7 +22752,7 @@
         <p:spPr>
           <a:xfrm>
             <a:off x="6720840" y="4297679"/>
-            <a:ext cx="2194560" cy="548640"/>
+            <a:ext cx="2194560" cy="594359"/>
           </a:xfrm>
           <a:prstGeom prst="rect">
             <a:avLst/>
@@ -22767,7 +22767,7 @@
           <a:p>
             <a:pPr>
               <a:lnSpc>
-                <a:spcPct val="100000"/>
+                <a:spcPct val="90000"/>
               </a:lnSpc>
               <a:defRPr sz="1100">
                 <a:solidFill>
@@ -22790,7 +22790,7 @@
         <p:spPr>
           <a:xfrm>
             <a:off x="6446520" y="4937760"/>
-            <a:ext cx="274320" cy="548640"/>
+            <a:ext cx="274320" cy="594359"/>
           </a:xfrm>
           <a:prstGeom prst="rect">
             <a:avLst/>
@@ -22825,7 +22825,7 @@
         <p:spPr>
           <a:xfrm>
             <a:off x="6720840" y="4937760"/>
-            <a:ext cx="2194560" cy="548640"/>
+            <a:ext cx="2194560" cy="594359"/>
           </a:xfrm>
           <a:prstGeom prst="rect">
             <a:avLst/>
@@ -22840,7 +22840,7 @@
           <a:p>
             <a:pPr>
               <a:lnSpc>
-                <a:spcPct val="100000"/>
+                <a:spcPct val="90000"/>
               </a:lnSpc>
               <a:defRPr sz="1100">
                 <a:solidFill>
@@ -23039,7 +23039,7 @@
         <p:spPr>
           <a:xfrm>
             <a:off x="594360" y="1737360"/>
-            <a:ext cx="274320" cy="548640"/>
+            <a:ext cx="274320" cy="594359"/>
           </a:xfrm>
           <a:prstGeom prst="rect">
             <a:avLst/>
@@ -23074,7 +23074,7 @@
         <p:spPr>
           <a:xfrm>
             <a:off x="868680" y="1737360"/>
-            <a:ext cx="2194560" cy="548640"/>
+            <a:ext cx="2194560" cy="594359"/>
           </a:xfrm>
           <a:prstGeom prst="rect">
             <a:avLst/>
@@ -23089,7 +23089,7 @@
           <a:p>
             <a:pPr>
               <a:lnSpc>
-                <a:spcPct val="100000"/>
+                <a:spcPct val="90000"/>
               </a:lnSpc>
               <a:defRPr sz="1100">
                 <a:solidFill>
@@ -23112,7 +23112,7 @@
         <p:spPr>
           <a:xfrm>
             <a:off x="594360" y="2377439"/>
-            <a:ext cx="274320" cy="548640"/>
+            <a:ext cx="274320" cy="594359"/>
           </a:xfrm>
           <a:prstGeom prst="rect">
             <a:avLst/>
@@ -23147,7 +23147,7 @@
         <p:spPr>
           <a:xfrm>
             <a:off x="868680" y="2377439"/>
-            <a:ext cx="2194560" cy="548640"/>
+            <a:ext cx="2194560" cy="594359"/>
           </a:xfrm>
           <a:prstGeom prst="rect">
             <a:avLst/>
@@ -23162,7 +23162,7 @@
           <a:p>
             <a:pPr>
               <a:lnSpc>
-                <a:spcPct val="100000"/>
+                <a:spcPct val="90000"/>
               </a:lnSpc>
               <a:defRPr sz="1100">
                 <a:solidFill>
@@ -23185,7 +23185,7 @@
         <p:spPr>
           <a:xfrm>
             <a:off x="594360" y="3017520"/>
-            <a:ext cx="274320" cy="548640"/>
+            <a:ext cx="274320" cy="594359"/>
           </a:xfrm>
           <a:prstGeom prst="rect">
             <a:avLst/>
@@ -23220,7 +23220,7 @@
         <p:spPr>
           <a:xfrm>
             <a:off x="868680" y="3017520"/>
-            <a:ext cx="2194560" cy="548640"/>
+            <a:ext cx="2194560" cy="594359"/>
           </a:xfrm>
           <a:prstGeom prst="rect">
             <a:avLst/>
@@ -23235,7 +23235,7 @@
           <a:p>
             <a:pPr>
               <a:lnSpc>
-                <a:spcPct val="100000"/>
+                <a:spcPct val="90000"/>
               </a:lnSpc>
               <a:defRPr sz="1100">
                 <a:solidFill>
@@ -23258,7 +23258,7 @@
         <p:spPr>
           <a:xfrm>
             <a:off x="594360" y="3657599"/>
-            <a:ext cx="274320" cy="548640"/>
+            <a:ext cx="274320" cy="594359"/>
           </a:xfrm>
           <a:prstGeom prst="rect">
             <a:avLst/>
@@ -23293,7 +23293,7 @@
         <p:spPr>
           <a:xfrm>
             <a:off x="868680" y="3657599"/>
-            <a:ext cx="2194560" cy="548640"/>
+            <a:ext cx="2194560" cy="594359"/>
           </a:xfrm>
           <a:prstGeom prst="rect">
             <a:avLst/>
@@ -23308,7 +23308,7 @@
           <a:p>
             <a:pPr>
               <a:lnSpc>
-                <a:spcPct val="100000"/>
+                <a:spcPct val="90000"/>
               </a:lnSpc>
               <a:defRPr sz="1100">
                 <a:solidFill>
@@ -23331,7 +23331,7 @@
         <p:spPr>
           <a:xfrm>
             <a:off x="594360" y="4297679"/>
-            <a:ext cx="274320" cy="548640"/>
+            <a:ext cx="274320" cy="594359"/>
           </a:xfrm>
           <a:prstGeom prst="rect">
             <a:avLst/>
@@ -23366,7 +23366,7 @@
         <p:spPr>
           <a:xfrm>
             <a:off x="868680" y="4297679"/>
-            <a:ext cx="2194560" cy="548640"/>
+            <a:ext cx="2194560" cy="594359"/>
           </a:xfrm>
           <a:prstGeom prst="rect">
             <a:avLst/>
@@ -23381,7 +23381,7 @@
           <a:p>
             <a:pPr>
               <a:lnSpc>
-                <a:spcPct val="100000"/>
+                <a:spcPct val="90000"/>
               </a:lnSpc>
               <a:defRPr sz="1100">
                 <a:solidFill>
@@ -23404,7 +23404,7 @@
         <p:spPr>
           <a:xfrm>
             <a:off x="594360" y="4937760"/>
-            <a:ext cx="274320" cy="548640"/>
+            <a:ext cx="274320" cy="594359"/>
           </a:xfrm>
           <a:prstGeom prst="rect">
             <a:avLst/>
@@ -23439,7 +23439,7 @@
         <p:spPr>
           <a:xfrm>
             <a:off x="868680" y="4937760"/>
-            <a:ext cx="2194560" cy="548640"/>
+            <a:ext cx="2194560" cy="594359"/>
           </a:xfrm>
           <a:prstGeom prst="rect">
             <a:avLst/>
@@ -23454,7 +23454,7 @@
           <a:p>
             <a:pPr>
               <a:lnSpc>
-                <a:spcPct val="100000"/>
+                <a:spcPct val="90000"/>
               </a:lnSpc>
               <a:defRPr sz="1100">
                 <a:solidFill>
@@ -23557,7 +23557,7 @@
         <p:spPr>
           <a:xfrm>
             <a:off x="3520440" y="1737360"/>
-            <a:ext cx="274320" cy="548640"/>
+            <a:ext cx="274320" cy="594359"/>
           </a:xfrm>
           <a:prstGeom prst="rect">
             <a:avLst/>
@@ -23592,7 +23592,7 @@
         <p:spPr>
           <a:xfrm>
             <a:off x="3794760" y="1737360"/>
-            <a:ext cx="2194560" cy="548640"/>
+            <a:ext cx="2194560" cy="594359"/>
           </a:xfrm>
           <a:prstGeom prst="rect">
             <a:avLst/>
@@ -23607,7 +23607,7 @@
           <a:p>
             <a:pPr>
               <a:lnSpc>
-                <a:spcPct val="100000"/>
+                <a:spcPct val="90000"/>
               </a:lnSpc>
               <a:defRPr sz="1100">
                 <a:solidFill>
@@ -23630,7 +23630,7 @@
         <p:spPr>
           <a:xfrm>
             <a:off x="3520440" y="2377439"/>
-            <a:ext cx="274320" cy="548640"/>
+            <a:ext cx="274320" cy="594359"/>
           </a:xfrm>
           <a:prstGeom prst="rect">
             <a:avLst/>
@@ -23665,7 +23665,7 @@
         <p:spPr>
           <a:xfrm>
             <a:off x="3794760" y="2377439"/>
-            <a:ext cx="2194560" cy="548640"/>
+            <a:ext cx="2194560" cy="594359"/>
           </a:xfrm>
           <a:prstGeom prst="rect">
             <a:avLst/>
@@ -23680,7 +23680,7 @@
           <a:p>
             <a:pPr>
               <a:lnSpc>
-                <a:spcPct val="100000"/>
+                <a:spcPct val="90000"/>
               </a:lnSpc>
               <a:defRPr sz="1100">
                 <a:solidFill>
@@ -23703,7 +23703,7 @@
         <p:spPr>
           <a:xfrm>
             <a:off x="3520440" y="3017520"/>
-            <a:ext cx="274320" cy="548640"/>
+            <a:ext cx="274320" cy="594359"/>
           </a:xfrm>
           <a:prstGeom prst="rect">
             <a:avLst/>
@@ -23738,7 +23738,7 @@
         <p:spPr>
           <a:xfrm>
             <a:off x="3794760" y="3017520"/>
-            <a:ext cx="2194560" cy="548640"/>
+            <a:ext cx="2194560" cy="594359"/>
           </a:xfrm>
           <a:prstGeom prst="rect">
             <a:avLst/>
@@ -23753,7 +23753,7 @@
           <a:p>
             <a:pPr>
               <a:lnSpc>
-                <a:spcPct val="100000"/>
+                <a:spcPct val="90000"/>
               </a:lnSpc>
               <a:defRPr sz="1100">
                 <a:solidFill>
@@ -23776,7 +23776,7 @@
         <p:spPr>
           <a:xfrm>
             <a:off x="3520440" y="3657599"/>
-            <a:ext cx="274320" cy="548640"/>
+            <a:ext cx="274320" cy="594359"/>
           </a:xfrm>
           <a:prstGeom prst="rect">
             <a:avLst/>
@@ -23811,7 +23811,7 @@
         <p:spPr>
           <a:xfrm>
             <a:off x="3794760" y="3657599"/>
-            <a:ext cx="2194560" cy="548640"/>
+            <a:ext cx="2194560" cy="594359"/>
           </a:xfrm>
           <a:prstGeom prst="rect">
             <a:avLst/>
@@ -23826,7 +23826,7 @@
           <a:p>
             <a:pPr>
               <a:lnSpc>
-                <a:spcPct val="100000"/>
+                <a:spcPct val="90000"/>
               </a:lnSpc>
               <a:defRPr sz="1100">
                 <a:solidFill>
@@ -23849,7 +23849,7 @@
         <p:spPr>
           <a:xfrm>
             <a:off x="3520440" y="4297679"/>
-            <a:ext cx="274320" cy="548640"/>
+            <a:ext cx="274320" cy="594359"/>
           </a:xfrm>
           <a:prstGeom prst="rect">
             <a:avLst/>
@@ -23884,7 +23884,7 @@
         <p:spPr>
           <a:xfrm>
             <a:off x="3794760" y="4297679"/>
-            <a:ext cx="2194560" cy="548640"/>
+            <a:ext cx="2194560" cy="594359"/>
           </a:xfrm>
           <a:prstGeom prst="rect">
             <a:avLst/>
@@ -23899,7 +23899,7 @@
           <a:p>
             <a:pPr>
               <a:lnSpc>
-                <a:spcPct val="100000"/>
+                <a:spcPct val="90000"/>
               </a:lnSpc>
               <a:defRPr sz="1100">
                 <a:solidFill>
@@ -23922,7 +23922,7 @@
         <p:spPr>
           <a:xfrm>
             <a:off x="3520440" y="4937760"/>
-            <a:ext cx="274320" cy="548640"/>
+            <a:ext cx="274320" cy="594359"/>
           </a:xfrm>
           <a:prstGeom prst="rect">
             <a:avLst/>
@@ -23957,7 +23957,7 @@
         <p:spPr>
           <a:xfrm>
             <a:off x="3794760" y="4937760"/>
-            <a:ext cx="2194560" cy="548640"/>
+            <a:ext cx="2194560" cy="594359"/>
           </a:xfrm>
           <a:prstGeom prst="rect">
             <a:avLst/>
@@ -23972,7 +23972,7 @@
           <a:p>
             <a:pPr>
               <a:lnSpc>
-                <a:spcPct val="100000"/>
+                <a:spcPct val="90000"/>
               </a:lnSpc>
               <a:defRPr sz="1100">
                 <a:solidFill>
@@ -24075,7 +24075,7 @@
         <p:spPr>
           <a:xfrm>
             <a:off x="6446520" y="1737360"/>
-            <a:ext cx="274320" cy="548640"/>
+            <a:ext cx="274320" cy="594359"/>
           </a:xfrm>
           <a:prstGeom prst="rect">
             <a:avLst/>
@@ -24110,7 +24110,7 @@
         <p:spPr>
           <a:xfrm>
             <a:off x="6720840" y="1737360"/>
-            <a:ext cx="2194560" cy="548640"/>
+            <a:ext cx="2194560" cy="594359"/>
           </a:xfrm>
           <a:prstGeom prst="rect">
             <a:avLst/>
@@ -24125,7 +24125,7 @@
           <a:p>
             <a:pPr>
               <a:lnSpc>
-                <a:spcPct val="100000"/>
+                <a:spcPct val="90000"/>
               </a:lnSpc>
               <a:defRPr sz="1100">
                 <a:solidFill>
@@ -24148,7 +24148,7 @@
         <p:spPr>
           <a:xfrm>
             <a:off x="6446520" y="2377439"/>
-            <a:ext cx="274320" cy="548640"/>
+            <a:ext cx="274320" cy="594359"/>
           </a:xfrm>
           <a:prstGeom prst="rect">
             <a:avLst/>
@@ -24183,7 +24183,7 @@
         <p:spPr>
           <a:xfrm>
             <a:off x="6720840" y="2377439"/>
-            <a:ext cx="2194560" cy="548640"/>
+            <a:ext cx="2194560" cy="594359"/>
           </a:xfrm>
           <a:prstGeom prst="rect">
             <a:avLst/>
@@ -24198,7 +24198,7 @@
           <a:p>
             <a:pPr>
               <a:lnSpc>
-                <a:spcPct val="100000"/>
+                <a:spcPct val="90000"/>
               </a:lnSpc>
               <a:defRPr sz="1100">
                 <a:solidFill>
@@ -24221,7 +24221,7 @@
         <p:spPr>
           <a:xfrm>
             <a:off x="6446520" y="3017520"/>
-            <a:ext cx="274320" cy="548640"/>
+            <a:ext cx="274320" cy="594359"/>
           </a:xfrm>
           <a:prstGeom prst="rect">
             <a:avLst/>
@@ -24256,7 +24256,7 @@
         <p:spPr>
           <a:xfrm>
             <a:off x="6720840" y="3017520"/>
-            <a:ext cx="2194560" cy="548640"/>
+            <a:ext cx="2194560" cy="594359"/>
           </a:xfrm>
           <a:prstGeom prst="rect">
             <a:avLst/>
@@ -24271,7 +24271,7 @@
           <a:p>
             <a:pPr>
               <a:lnSpc>
-                <a:spcPct val="100000"/>
+                <a:spcPct val="90000"/>
               </a:lnSpc>
               <a:defRPr sz="1100">
                 <a:solidFill>
@@ -24294,7 +24294,7 @@
         <p:spPr>
           <a:xfrm>
             <a:off x="6446520" y="3657599"/>
-            <a:ext cx="274320" cy="548640"/>
+            <a:ext cx="274320" cy="594359"/>
           </a:xfrm>
           <a:prstGeom prst="rect">
             <a:avLst/>
@@ -24329,7 +24329,7 @@
         <p:spPr>
           <a:xfrm>
             <a:off x="6720840" y="3657599"/>
-            <a:ext cx="2194560" cy="548640"/>
+            <a:ext cx="2194560" cy="594359"/>
           </a:xfrm>
           <a:prstGeom prst="rect">
             <a:avLst/>
@@ -24344,7 +24344,7 @@
           <a:p>
             <a:pPr>
               <a:lnSpc>
-                <a:spcPct val="100000"/>
+                <a:spcPct val="90000"/>
               </a:lnSpc>
               <a:defRPr sz="1100">
                 <a:solidFill>
@@ -24367,7 +24367,7 @@
         <p:spPr>
           <a:xfrm>
             <a:off x="6446520" y="4297679"/>
-            <a:ext cx="274320" cy="548640"/>
+            <a:ext cx="274320" cy="594359"/>
           </a:xfrm>
           <a:prstGeom prst="rect">
             <a:avLst/>
@@ -24402,7 +24402,7 @@
         <p:spPr>
           <a:xfrm>
             <a:off x="6720840" y="4297679"/>
-            <a:ext cx="2194560" cy="548640"/>
+            <a:ext cx="2194560" cy="594359"/>
           </a:xfrm>
           <a:prstGeom prst="rect">
             <a:avLst/>
@@ -24417,7 +24417,7 @@
           <a:p>
             <a:pPr>
               <a:lnSpc>
-                <a:spcPct val="100000"/>
+                <a:spcPct val="90000"/>
               </a:lnSpc>
               <a:defRPr sz="1100">
                 <a:solidFill>
@@ -24440,7 +24440,7 @@
         <p:spPr>
           <a:xfrm>
             <a:off x="6446520" y="4937760"/>
-            <a:ext cx="274320" cy="548640"/>
+            <a:ext cx="274320" cy="594359"/>
           </a:xfrm>
           <a:prstGeom prst="rect">
             <a:avLst/>
@@ -24475,7 +24475,7 @@
         <p:spPr>
           <a:xfrm>
             <a:off x="6720840" y="4937760"/>
-            <a:ext cx="2194560" cy="548640"/>
+            <a:ext cx="2194560" cy="594359"/>
           </a:xfrm>
           <a:prstGeom prst="rect">
             <a:avLst/>
@@ -24490,7 +24490,7 @@
           <a:p>
             <a:pPr>
               <a:lnSpc>
-                <a:spcPct val="100000"/>
+                <a:spcPct val="90000"/>
               </a:lnSpc>
               <a:defRPr sz="1100">
                 <a:solidFill>
@@ -24689,7 +24689,7 @@
         <p:spPr>
           <a:xfrm>
             <a:off x="594360" y="1737360"/>
-            <a:ext cx="274320" cy="548640"/>
+            <a:ext cx="274320" cy="594359"/>
           </a:xfrm>
           <a:prstGeom prst="rect">
             <a:avLst/>
@@ -24724,7 +24724,7 @@
         <p:spPr>
           <a:xfrm>
             <a:off x="868680" y="1737360"/>
-            <a:ext cx="2194560" cy="548640"/>
+            <a:ext cx="2194560" cy="594359"/>
           </a:xfrm>
           <a:prstGeom prst="rect">
             <a:avLst/>
@@ -24739,7 +24739,7 @@
           <a:p>
             <a:pPr>
               <a:lnSpc>
-                <a:spcPct val="100000"/>
+                <a:spcPct val="90000"/>
               </a:lnSpc>
               <a:defRPr sz="1100">
                 <a:solidFill>
@@ -24762,7 +24762,7 @@
         <p:spPr>
           <a:xfrm>
             <a:off x="594360" y="2377439"/>
-            <a:ext cx="274320" cy="548640"/>
+            <a:ext cx="274320" cy="594359"/>
           </a:xfrm>
           <a:prstGeom prst="rect">
             <a:avLst/>
@@ -24797,7 +24797,7 @@
         <p:spPr>
           <a:xfrm>
             <a:off x="868680" y="2377439"/>
-            <a:ext cx="2194560" cy="548640"/>
+            <a:ext cx="2194560" cy="594359"/>
           </a:xfrm>
           <a:prstGeom prst="rect">
             <a:avLst/>
@@ -24812,7 +24812,7 @@
           <a:p>
             <a:pPr>
               <a:lnSpc>
-                <a:spcPct val="100000"/>
+                <a:spcPct val="90000"/>
               </a:lnSpc>
               <a:defRPr sz="1100">
                 <a:solidFill>
@@ -24835,7 +24835,7 @@
         <p:spPr>
           <a:xfrm>
             <a:off x="594360" y="3017520"/>
-            <a:ext cx="274320" cy="548640"/>
+            <a:ext cx="274320" cy="594359"/>
           </a:xfrm>
           <a:prstGeom prst="rect">
             <a:avLst/>
@@ -24870,7 +24870,7 @@
         <p:spPr>
           <a:xfrm>
             <a:off x="868680" y="3017520"/>
-            <a:ext cx="2194560" cy="548640"/>
+            <a:ext cx="2194560" cy="594359"/>
           </a:xfrm>
           <a:prstGeom prst="rect">
             <a:avLst/>
@@ -24885,7 +24885,7 @@
           <a:p>
             <a:pPr>
               <a:lnSpc>
-                <a:spcPct val="100000"/>
+                <a:spcPct val="90000"/>
               </a:lnSpc>
               <a:defRPr sz="1100">
                 <a:solidFill>
@@ -24908,7 +24908,7 @@
         <p:spPr>
           <a:xfrm>
             <a:off x="594360" y="3657599"/>
-            <a:ext cx="274320" cy="548640"/>
+            <a:ext cx="274320" cy="594359"/>
           </a:xfrm>
           <a:prstGeom prst="rect">
             <a:avLst/>
@@ -24943,7 +24943,7 @@
         <p:spPr>
           <a:xfrm>
             <a:off x="868680" y="3657599"/>
-            <a:ext cx="2194560" cy="548640"/>
+            <a:ext cx="2194560" cy="594359"/>
           </a:xfrm>
           <a:prstGeom prst="rect">
             <a:avLst/>
@@ -24958,7 +24958,7 @@
           <a:p>
             <a:pPr>
               <a:lnSpc>
-                <a:spcPct val="100000"/>
+                <a:spcPct val="90000"/>
               </a:lnSpc>
               <a:defRPr sz="1100">
                 <a:solidFill>
@@ -24981,7 +24981,7 @@
         <p:spPr>
           <a:xfrm>
             <a:off x="594360" y="4297679"/>
-            <a:ext cx="274320" cy="548640"/>
+            <a:ext cx="274320" cy="594359"/>
           </a:xfrm>
           <a:prstGeom prst="rect">
             <a:avLst/>
@@ -25016,7 +25016,7 @@
         <p:spPr>
           <a:xfrm>
             <a:off x="868680" y="4297679"/>
-            <a:ext cx="2194560" cy="548640"/>
+            <a:ext cx="2194560" cy="594359"/>
           </a:xfrm>
           <a:prstGeom prst="rect">
             <a:avLst/>
@@ -25031,7 +25031,7 @@
           <a:p>
             <a:pPr>
               <a:lnSpc>
-                <a:spcPct val="100000"/>
+                <a:spcPct val="90000"/>
               </a:lnSpc>
               <a:defRPr sz="1100">
                 <a:solidFill>
@@ -25054,7 +25054,7 @@
         <p:spPr>
           <a:xfrm>
             <a:off x="594360" y="4937760"/>
-            <a:ext cx="274320" cy="548640"/>
+            <a:ext cx="274320" cy="594359"/>
           </a:xfrm>
           <a:prstGeom prst="rect">
             <a:avLst/>
@@ -25089,7 +25089,7 @@
         <p:spPr>
           <a:xfrm>
             <a:off x="868680" y="4937760"/>
-            <a:ext cx="2194560" cy="548640"/>
+            <a:ext cx="2194560" cy="594359"/>
           </a:xfrm>
           <a:prstGeom prst="rect">
             <a:avLst/>
@@ -25104,7 +25104,7 @@
           <a:p>
             <a:pPr>
               <a:lnSpc>
-                <a:spcPct val="100000"/>
+                <a:spcPct val="90000"/>
               </a:lnSpc>
               <a:defRPr sz="1100">
                 <a:solidFill>
@@ -25207,7 +25207,7 @@
         <p:spPr>
           <a:xfrm>
             <a:off x="3520440" y="1737360"/>
-            <a:ext cx="274320" cy="548640"/>
+            <a:ext cx="274320" cy="594359"/>
           </a:xfrm>
           <a:prstGeom prst="rect">
             <a:avLst/>
@@ -25242,7 +25242,7 @@
         <p:spPr>
           <a:xfrm>
             <a:off x="3794760" y="1737360"/>
-            <a:ext cx="2194560" cy="548640"/>
+            <a:ext cx="2194560" cy="594359"/>
           </a:xfrm>
           <a:prstGeom prst="rect">
             <a:avLst/>
@@ -25257,7 +25257,7 @@
           <a:p>
             <a:pPr>
               <a:lnSpc>
-                <a:spcPct val="100000"/>
+                <a:spcPct val="90000"/>
               </a:lnSpc>
               <a:defRPr sz="1100">
                 <a:solidFill>
@@ -25280,7 +25280,7 @@
         <p:spPr>
           <a:xfrm>
             <a:off x="3520440" y="2377439"/>
-            <a:ext cx="274320" cy="548640"/>
+            <a:ext cx="274320" cy="594359"/>
           </a:xfrm>
           <a:prstGeom prst="rect">
             <a:avLst/>
@@ -25315,7 +25315,7 @@
         <p:spPr>
           <a:xfrm>
             <a:off x="3794760" y="2377439"/>
-            <a:ext cx="2194560" cy="548640"/>
+            <a:ext cx="2194560" cy="594359"/>
           </a:xfrm>
           <a:prstGeom prst="rect">
             <a:avLst/>
@@ -25330,7 +25330,7 @@
           <a:p>
             <a:pPr>
               <a:lnSpc>
-                <a:spcPct val="100000"/>
+                <a:spcPct val="90000"/>
               </a:lnSpc>
               <a:defRPr sz="1100">
                 <a:solidFill>
@@ -25353,7 +25353,7 @@
         <p:spPr>
           <a:xfrm>
             <a:off x="3520440" y="3017520"/>
-            <a:ext cx="274320" cy="548640"/>
+            <a:ext cx="274320" cy="594359"/>
           </a:xfrm>
           <a:prstGeom prst="rect">
             <a:avLst/>
@@ -25388,7 +25388,7 @@
         <p:spPr>
           <a:xfrm>
             <a:off x="3794760" y="3017520"/>
-            <a:ext cx="2194560" cy="548640"/>
+            <a:ext cx="2194560" cy="594359"/>
           </a:xfrm>
           <a:prstGeom prst="rect">
             <a:avLst/>
@@ -25403,7 +25403,7 @@
           <a:p>
             <a:pPr>
               <a:lnSpc>
-                <a:spcPct val="100000"/>
+                <a:spcPct val="90000"/>
               </a:lnSpc>
               <a:defRPr sz="1100">
                 <a:solidFill>
@@ -25426,7 +25426,7 @@
         <p:spPr>
           <a:xfrm>
             <a:off x="3520440" y="3657599"/>
-            <a:ext cx="274320" cy="548640"/>
+            <a:ext cx="274320" cy="594359"/>
           </a:xfrm>
           <a:prstGeom prst="rect">
             <a:avLst/>
@@ -25461,7 +25461,7 @@
         <p:spPr>
           <a:xfrm>
             <a:off x="3794760" y="3657599"/>
-            <a:ext cx="2194560" cy="548640"/>
+            <a:ext cx="2194560" cy="594359"/>
           </a:xfrm>
           <a:prstGeom prst="rect">
             <a:avLst/>
@@ -25476,7 +25476,7 @@
           <a:p>
             <a:pPr>
               <a:lnSpc>
-                <a:spcPct val="100000"/>
+                <a:spcPct val="90000"/>
               </a:lnSpc>
               <a:defRPr sz="1100">
                 <a:solidFill>
@@ -25499,7 +25499,7 @@
         <p:spPr>
           <a:xfrm>
             <a:off x="3520440" y="4297679"/>
-            <a:ext cx="274320" cy="548640"/>
+            <a:ext cx="274320" cy="594359"/>
           </a:xfrm>
           <a:prstGeom prst="rect">
             <a:avLst/>
@@ -25534,7 +25534,7 @@
         <p:spPr>
           <a:xfrm>
             <a:off x="3794760" y="4297679"/>
-            <a:ext cx="2194560" cy="548640"/>
+            <a:ext cx="2194560" cy="594359"/>
           </a:xfrm>
           <a:prstGeom prst="rect">
             <a:avLst/>
@@ -25549,7 +25549,7 @@
           <a:p>
             <a:pPr>
               <a:lnSpc>
-                <a:spcPct val="100000"/>
+                <a:spcPct val="90000"/>
               </a:lnSpc>
               <a:defRPr sz="1100">
                 <a:solidFill>
@@ -25572,7 +25572,7 @@
         <p:spPr>
           <a:xfrm>
             <a:off x="3520440" y="4937760"/>
-            <a:ext cx="274320" cy="548640"/>
+            <a:ext cx="274320" cy="594359"/>
           </a:xfrm>
           <a:prstGeom prst="rect">
             <a:avLst/>
@@ -25607,7 +25607,7 @@
         <p:spPr>
           <a:xfrm>
             <a:off x="3794760" y="4937760"/>
-            <a:ext cx="2194560" cy="548640"/>
+            <a:ext cx="2194560" cy="594359"/>
           </a:xfrm>
           <a:prstGeom prst="rect">
             <a:avLst/>
@@ -25622,7 +25622,7 @@
           <a:p>
             <a:pPr>
               <a:lnSpc>
-                <a:spcPct val="100000"/>
+                <a:spcPct val="90000"/>
               </a:lnSpc>
               <a:defRPr sz="1100">
                 <a:solidFill>
@@ -25725,7 +25725,7 @@
         <p:spPr>
           <a:xfrm>
             <a:off x="6446520" y="1737360"/>
-            <a:ext cx="274320" cy="548640"/>
+            <a:ext cx="274320" cy="594359"/>
           </a:xfrm>
           <a:prstGeom prst="rect">
             <a:avLst/>
@@ -25760,7 +25760,7 @@
         <p:spPr>
           <a:xfrm>
             <a:off x="6720840" y="1737360"/>
-            <a:ext cx="2194560" cy="548640"/>
+            <a:ext cx="2194560" cy="594359"/>
           </a:xfrm>
           <a:prstGeom prst="rect">
             <a:avLst/>
@@ -25775,7 +25775,7 @@
           <a:p>
             <a:pPr>
               <a:lnSpc>
-                <a:spcPct val="100000"/>
+                <a:spcPct val="90000"/>
               </a:lnSpc>
               <a:defRPr sz="1100">
                 <a:solidFill>
@@ -25798,7 +25798,7 @@
         <p:spPr>
           <a:xfrm>
             <a:off x="6446520" y="2377439"/>
-            <a:ext cx="274320" cy="548640"/>
+            <a:ext cx="274320" cy="594359"/>
           </a:xfrm>
           <a:prstGeom prst="rect">
             <a:avLst/>
@@ -25833,7 +25833,7 @@
         <p:spPr>
           <a:xfrm>
             <a:off x="6720840" y="2377439"/>
-            <a:ext cx="2194560" cy="548640"/>
+            <a:ext cx="2194560" cy="594359"/>
           </a:xfrm>
           <a:prstGeom prst="rect">
             <a:avLst/>
@@ -25848,7 +25848,7 @@
           <a:p>
             <a:pPr>
               <a:lnSpc>
-                <a:spcPct val="100000"/>
+                <a:spcPct val="90000"/>
               </a:lnSpc>
               <a:defRPr sz="1100">
                 <a:solidFill>
@@ -25871,7 +25871,7 @@
         <p:spPr>
           <a:xfrm>
             <a:off x="6446520" y="3017520"/>
-            <a:ext cx="274320" cy="548640"/>
+            <a:ext cx="274320" cy="594359"/>
           </a:xfrm>
           <a:prstGeom prst="rect">
             <a:avLst/>
@@ -25906,7 +25906,7 @@
         <p:spPr>
           <a:xfrm>
             <a:off x="6720840" y="3017520"/>
-            <a:ext cx="2194560" cy="548640"/>
+            <a:ext cx="2194560" cy="594359"/>
           </a:xfrm>
           <a:prstGeom prst="rect">
             <a:avLst/>
@@ -25921,7 +25921,7 @@
           <a:p>
             <a:pPr>
               <a:lnSpc>
-                <a:spcPct val="100000"/>
+                <a:spcPct val="90000"/>
               </a:lnSpc>
               <a:defRPr sz="1100">
                 <a:solidFill>
@@ -25944,7 +25944,7 @@
         <p:spPr>
           <a:xfrm>
             <a:off x="6446520" y="3657599"/>
-            <a:ext cx="274320" cy="548640"/>
+            <a:ext cx="274320" cy="594359"/>
           </a:xfrm>
           <a:prstGeom prst="rect">
             <a:avLst/>
@@ -25979,7 +25979,7 @@
         <p:spPr>
           <a:xfrm>
             <a:off x="6720840" y="3657599"/>
-            <a:ext cx="2194560" cy="548640"/>
+            <a:ext cx="2194560" cy="594359"/>
           </a:xfrm>
           <a:prstGeom prst="rect">
             <a:avLst/>
@@ -25994,7 +25994,7 @@
           <a:p>
             <a:pPr>
               <a:lnSpc>
-                <a:spcPct val="100000"/>
+                <a:spcPct val="90000"/>
               </a:lnSpc>
               <a:defRPr sz="1100">
                 <a:solidFill>
@@ -26017,7 +26017,7 @@
         <p:spPr>
           <a:xfrm>
             <a:off x="6446520" y="4297679"/>
-            <a:ext cx="274320" cy="548640"/>
+            <a:ext cx="274320" cy="594359"/>
           </a:xfrm>
           <a:prstGeom prst="rect">
             <a:avLst/>
@@ -26052,7 +26052,7 @@
         <p:spPr>
           <a:xfrm>
             <a:off x="6720840" y="4297679"/>
-            <a:ext cx="2194560" cy="548640"/>
+            <a:ext cx="2194560" cy="594359"/>
           </a:xfrm>
           <a:prstGeom prst="rect">
             <a:avLst/>
@@ -26067,7 +26067,7 @@
           <a:p>
             <a:pPr>
               <a:lnSpc>
-                <a:spcPct val="100000"/>
+                <a:spcPct val="90000"/>
               </a:lnSpc>
               <a:defRPr sz="1100">
                 <a:solidFill>
@@ -26090,7 +26090,7 @@
         <p:spPr>
           <a:xfrm>
             <a:off x="6446520" y="4937760"/>
-            <a:ext cx="274320" cy="548640"/>
+            <a:ext cx="274320" cy="594359"/>
           </a:xfrm>
           <a:prstGeom prst="rect">
             <a:avLst/>
@@ -26125,7 +26125,7 @@
         <p:spPr>
           <a:xfrm>
             <a:off x="6720840" y="4937760"/>
-            <a:ext cx="2194560" cy="548640"/>
+            <a:ext cx="2194560" cy="594359"/>
           </a:xfrm>
           <a:prstGeom prst="rect">
             <a:avLst/>
@@ -26140,7 +26140,7 @@
           <a:p>
             <a:pPr>
               <a:lnSpc>
-                <a:spcPct val="100000"/>
+                <a:spcPct val="90000"/>
               </a:lnSpc>
               <a:defRPr sz="1100">
                 <a:solidFill>
@@ -26339,7 +26339,7 @@
         <p:spPr>
           <a:xfrm>
             <a:off x="594360" y="1737360"/>
-            <a:ext cx="274320" cy="548640"/>
+            <a:ext cx="274320" cy="594359"/>
           </a:xfrm>
           <a:prstGeom prst="rect">
             <a:avLst/>
@@ -26374,7 +26374,7 @@
         <p:spPr>
           <a:xfrm>
             <a:off x="868680" y="1737360"/>
-            <a:ext cx="2194560" cy="548640"/>
+            <a:ext cx="2194560" cy="594359"/>
           </a:xfrm>
           <a:prstGeom prst="rect">
             <a:avLst/>
@@ -26389,7 +26389,7 @@
           <a:p>
             <a:pPr>
               <a:lnSpc>
-                <a:spcPct val="100000"/>
+                <a:spcPct val="90000"/>
               </a:lnSpc>
               <a:defRPr sz="1100">
                 <a:solidFill>
@@ -26412,7 +26412,7 @@
         <p:spPr>
           <a:xfrm>
             <a:off x="594360" y="2377439"/>
-            <a:ext cx="274320" cy="548640"/>
+            <a:ext cx="274320" cy="594359"/>
           </a:xfrm>
           <a:prstGeom prst="rect">
             <a:avLst/>
@@ -26447,7 +26447,7 @@
         <p:spPr>
           <a:xfrm>
             <a:off x="868680" y="2377439"/>
-            <a:ext cx="2194560" cy="548640"/>
+            <a:ext cx="2194560" cy="594359"/>
           </a:xfrm>
           <a:prstGeom prst="rect">
             <a:avLst/>
@@ -26462,7 +26462,7 @@
           <a:p>
             <a:pPr>
               <a:lnSpc>
-                <a:spcPct val="100000"/>
+                <a:spcPct val="90000"/>
               </a:lnSpc>
               <a:defRPr sz="1100">
                 <a:solidFill>
@@ -26485,7 +26485,7 @@
         <p:spPr>
           <a:xfrm>
             <a:off x="594360" y="3017520"/>
-            <a:ext cx="274320" cy="548640"/>
+            <a:ext cx="274320" cy="594359"/>
           </a:xfrm>
           <a:prstGeom prst="rect">
             <a:avLst/>
@@ -26520,7 +26520,7 @@
         <p:spPr>
           <a:xfrm>
             <a:off x="868680" y="3017520"/>
-            <a:ext cx="2194560" cy="548640"/>
+            <a:ext cx="2194560" cy="594359"/>
           </a:xfrm>
           <a:prstGeom prst="rect">
             <a:avLst/>
@@ -26535,7 +26535,7 @@
           <a:p>
             <a:pPr>
               <a:lnSpc>
-                <a:spcPct val="100000"/>
+                <a:spcPct val="90000"/>
               </a:lnSpc>
               <a:defRPr sz="1100">
                 <a:solidFill>
@@ -26558,7 +26558,7 @@
         <p:spPr>
           <a:xfrm>
             <a:off x="594360" y="3657599"/>
-            <a:ext cx="274320" cy="548640"/>
+            <a:ext cx="274320" cy="594359"/>
           </a:xfrm>
           <a:prstGeom prst="rect">
             <a:avLst/>
@@ -26593,7 +26593,7 @@
         <p:spPr>
           <a:xfrm>
             <a:off x="868680" y="3657599"/>
-            <a:ext cx="2194560" cy="548640"/>
+            <a:ext cx="2194560" cy="594359"/>
           </a:xfrm>
           <a:prstGeom prst="rect">
             <a:avLst/>
@@ -26608,7 +26608,7 @@
           <a:p>
             <a:pPr>
               <a:lnSpc>
-                <a:spcPct val="100000"/>
+                <a:spcPct val="90000"/>
               </a:lnSpc>
               <a:defRPr sz="1100">
                 <a:solidFill>
@@ -26631,7 +26631,7 @@
         <p:spPr>
           <a:xfrm>
             <a:off x="594360" y="4297679"/>
-            <a:ext cx="274320" cy="548640"/>
+            <a:ext cx="274320" cy="594359"/>
           </a:xfrm>
           <a:prstGeom prst="rect">
             <a:avLst/>
@@ -26666,7 +26666,7 @@
         <p:spPr>
           <a:xfrm>
             <a:off x="868680" y="4297679"/>
-            <a:ext cx="2194560" cy="548640"/>
+            <a:ext cx="2194560" cy="594359"/>
           </a:xfrm>
           <a:prstGeom prst="rect">
             <a:avLst/>
@@ -26681,7 +26681,7 @@
           <a:p>
             <a:pPr>
               <a:lnSpc>
-                <a:spcPct val="100000"/>
+                <a:spcPct val="90000"/>
               </a:lnSpc>
               <a:defRPr sz="1100">
                 <a:solidFill>
@@ -26704,7 +26704,7 @@
         <p:spPr>
           <a:xfrm>
             <a:off x="594360" y="4937760"/>
-            <a:ext cx="274320" cy="548640"/>
+            <a:ext cx="274320" cy="594359"/>
           </a:xfrm>
           <a:prstGeom prst="rect">
             <a:avLst/>
@@ -26739,7 +26739,7 @@
         <p:spPr>
           <a:xfrm>
             <a:off x="868680" y="4937760"/>
-            <a:ext cx="2194560" cy="548640"/>
+            <a:ext cx="2194560" cy="594359"/>
           </a:xfrm>
           <a:prstGeom prst="rect">
             <a:avLst/>
@@ -26754,7 +26754,7 @@
           <a:p>
             <a:pPr>
               <a:lnSpc>
-                <a:spcPct val="100000"/>
+                <a:spcPct val="90000"/>
               </a:lnSpc>
               <a:defRPr sz="1100">
                 <a:solidFill>
@@ -26857,7 +26857,7 @@
         <p:spPr>
           <a:xfrm>
             <a:off x="3520440" y="1737360"/>
-            <a:ext cx="274320" cy="548640"/>
+            <a:ext cx="274320" cy="594359"/>
           </a:xfrm>
           <a:prstGeom prst="rect">
             <a:avLst/>
@@ -26892,7 +26892,7 @@
         <p:spPr>
           <a:xfrm>
             <a:off x="3794760" y="1737360"/>
-            <a:ext cx="2194560" cy="548640"/>
+            <a:ext cx="2194560" cy="594359"/>
           </a:xfrm>
           <a:prstGeom prst="rect">
             <a:avLst/>
@@ -26907,7 +26907,7 @@
           <a:p>
             <a:pPr>
               <a:lnSpc>
-                <a:spcPct val="100000"/>
+                <a:spcPct val="90000"/>
               </a:lnSpc>
               <a:defRPr sz="1100">
                 <a:solidFill>
@@ -26930,7 +26930,7 @@
         <p:spPr>
           <a:xfrm>
             <a:off x="3520440" y="2377439"/>
-            <a:ext cx="274320" cy="548640"/>
+            <a:ext cx="274320" cy="594359"/>
           </a:xfrm>
           <a:prstGeom prst="rect">
             <a:avLst/>
@@ -26965,7 +26965,7 @@
         <p:spPr>
           <a:xfrm>
             <a:off x="3794760" y="2377439"/>
-            <a:ext cx="2194560" cy="548640"/>
+            <a:ext cx="2194560" cy="594359"/>
           </a:xfrm>
           <a:prstGeom prst="rect">
             <a:avLst/>
@@ -26980,7 +26980,7 @@
           <a:p>
             <a:pPr>
               <a:lnSpc>
-                <a:spcPct val="100000"/>
+                <a:spcPct val="90000"/>
               </a:lnSpc>
               <a:defRPr sz="1100">
                 <a:solidFill>
@@ -27003,7 +27003,7 @@
         <p:spPr>
           <a:xfrm>
             <a:off x="3520440" y="3017520"/>
-            <a:ext cx="274320" cy="548640"/>
+            <a:ext cx="274320" cy="594359"/>
           </a:xfrm>
           <a:prstGeom prst="rect">
             <a:avLst/>
@@ -27038,7 +27038,7 @@
         <p:spPr>
           <a:xfrm>
             <a:off x="3794760" y="3017520"/>
-            <a:ext cx="2194560" cy="548640"/>
+            <a:ext cx="2194560" cy="594359"/>
           </a:xfrm>
           <a:prstGeom prst="rect">
             <a:avLst/>
@@ -27053,7 +27053,7 @@
           <a:p>
             <a:pPr>
               <a:lnSpc>
-                <a:spcPct val="100000"/>
+                <a:spcPct val="90000"/>
               </a:lnSpc>
               <a:defRPr sz="1100">
                 <a:solidFill>
@@ -27076,7 +27076,7 @@
         <p:spPr>
           <a:xfrm>
             <a:off x="3520440" y="3657599"/>
-            <a:ext cx="274320" cy="548640"/>
+            <a:ext cx="274320" cy="594359"/>
           </a:xfrm>
           <a:prstGeom prst="rect">
             <a:avLst/>
@@ -27111,7 +27111,7 @@
         <p:spPr>
           <a:xfrm>
             <a:off x="3794760" y="3657599"/>
-            <a:ext cx="2194560" cy="548640"/>
+            <a:ext cx="2194560" cy="594359"/>
           </a:xfrm>
           <a:prstGeom prst="rect">
             <a:avLst/>
@@ -27126,7 +27126,7 @@
           <a:p>
             <a:pPr>
               <a:lnSpc>
-                <a:spcPct val="100000"/>
+                <a:spcPct val="90000"/>
               </a:lnSpc>
               <a:defRPr sz="1100">
                 <a:solidFill>
@@ -27149,7 +27149,7 @@
         <p:spPr>
           <a:xfrm>
             <a:off x="3520440" y="4297679"/>
-            <a:ext cx="274320" cy="548640"/>
+            <a:ext cx="274320" cy="594359"/>
           </a:xfrm>
           <a:prstGeom prst="rect">
             <a:avLst/>
@@ -27184,7 +27184,7 @@
         <p:spPr>
           <a:xfrm>
             <a:off x="3794760" y="4297679"/>
-            <a:ext cx="2194560" cy="548640"/>
+            <a:ext cx="2194560" cy="594359"/>
           </a:xfrm>
           <a:prstGeom prst="rect">
             <a:avLst/>
@@ -27199,7 +27199,7 @@
           <a:p>
             <a:pPr>
               <a:lnSpc>
-                <a:spcPct val="100000"/>
+                <a:spcPct val="90000"/>
               </a:lnSpc>
               <a:defRPr sz="1100">
                 <a:solidFill>
@@ -27222,7 +27222,7 @@
         <p:spPr>
           <a:xfrm>
             <a:off x="3520440" y="4937760"/>
-            <a:ext cx="274320" cy="548640"/>
+            <a:ext cx="274320" cy="594359"/>
           </a:xfrm>
           <a:prstGeom prst="rect">
             <a:avLst/>
@@ -27257,7 +27257,7 @@
         <p:spPr>
           <a:xfrm>
             <a:off x="3794760" y="4937760"/>
-            <a:ext cx="2194560" cy="548640"/>
+            <a:ext cx="2194560" cy="594359"/>
           </a:xfrm>
           <a:prstGeom prst="rect">
             <a:avLst/>
@@ -27272,7 +27272,7 @@
           <a:p>
             <a:pPr>
               <a:lnSpc>
-                <a:spcPct val="100000"/>
+                <a:spcPct val="90000"/>
               </a:lnSpc>
               <a:defRPr sz="1100">
                 <a:solidFill>
@@ -27375,7 +27375,7 @@
         <p:spPr>
           <a:xfrm>
             <a:off x="6446520" y="1737360"/>
-            <a:ext cx="274320" cy="548640"/>
+            <a:ext cx="274320" cy="594359"/>
           </a:xfrm>
           <a:prstGeom prst="rect">
             <a:avLst/>
@@ -27410,7 +27410,7 @@
         <p:spPr>
           <a:xfrm>
             <a:off x="6720840" y="1737360"/>
-            <a:ext cx="2194560" cy="548640"/>
+            <a:ext cx="2194560" cy="594359"/>
           </a:xfrm>
           <a:prstGeom prst="rect">
             <a:avLst/>
@@ -27425,7 +27425,7 @@
           <a:p>
             <a:pPr>
               <a:lnSpc>
-                <a:spcPct val="100000"/>
+                <a:spcPct val="90000"/>
               </a:lnSpc>
               <a:defRPr sz="1100">
                 <a:solidFill>
@@ -27448,7 +27448,7 @@
         <p:spPr>
           <a:xfrm>
             <a:off x="6446520" y="2377439"/>
-            <a:ext cx="274320" cy="548640"/>
+            <a:ext cx="274320" cy="594359"/>
           </a:xfrm>
           <a:prstGeom prst="rect">
             <a:avLst/>
@@ -27483,7 +27483,7 @@
         <p:spPr>
           <a:xfrm>
             <a:off x="6720840" y="2377439"/>
-            <a:ext cx="2194560" cy="548640"/>
+            <a:ext cx="2194560" cy="594359"/>
           </a:xfrm>
           <a:prstGeom prst="rect">
             <a:avLst/>
@@ -27498,7 +27498,7 @@
           <a:p>
             <a:pPr>
               <a:lnSpc>
-                <a:spcPct val="100000"/>
+                <a:spcPct val="90000"/>
               </a:lnSpc>
               <a:defRPr sz="1100">
                 <a:solidFill>
@@ -27521,7 +27521,7 @@
         <p:spPr>
           <a:xfrm>
             <a:off x="6446520" y="3017520"/>
-            <a:ext cx="274320" cy="548640"/>
+            <a:ext cx="274320" cy="594359"/>
           </a:xfrm>
           <a:prstGeom prst="rect">
             <a:avLst/>
@@ -27556,7 +27556,7 @@
         <p:spPr>
           <a:xfrm>
             <a:off x="6720840" y="3017520"/>
-            <a:ext cx="2194560" cy="548640"/>
+            <a:ext cx="2194560" cy="594359"/>
           </a:xfrm>
           <a:prstGeom prst="rect">
             <a:avLst/>
@@ -27571,7 +27571,7 @@
           <a:p>
             <a:pPr>
               <a:lnSpc>
-                <a:spcPct val="100000"/>
+                <a:spcPct val="90000"/>
               </a:lnSpc>
               <a:defRPr sz="1100">
                 <a:solidFill>
@@ -27594,7 +27594,7 @@
         <p:spPr>
           <a:xfrm>
             <a:off x="6446520" y="3657599"/>
-            <a:ext cx="274320" cy="548640"/>
+            <a:ext cx="274320" cy="594359"/>
           </a:xfrm>
           <a:prstGeom prst="rect">
             <a:avLst/>
@@ -27629,7 +27629,7 @@
         <p:spPr>
           <a:xfrm>
             <a:off x="6720840" y="3657599"/>
-            <a:ext cx="2194560" cy="548640"/>
+            <a:ext cx="2194560" cy="594359"/>
           </a:xfrm>
           <a:prstGeom prst="rect">
             <a:avLst/>
@@ -27644,7 +27644,7 @@
           <a:p>
             <a:pPr>
               <a:lnSpc>
-                <a:spcPct val="100000"/>
+                <a:spcPct val="90000"/>
               </a:lnSpc>
               <a:defRPr sz="1100">
                 <a:solidFill>
@@ -27667,7 +27667,7 @@
         <p:spPr>
           <a:xfrm>
             <a:off x="6446520" y="4297679"/>
-            <a:ext cx="274320" cy="548640"/>
+            <a:ext cx="274320" cy="594359"/>
           </a:xfrm>
           <a:prstGeom prst="rect">
             <a:avLst/>
@@ -27702,7 +27702,7 @@
         <p:spPr>
           <a:xfrm>
             <a:off x="6720840" y="4297679"/>
-            <a:ext cx="2194560" cy="548640"/>
+            <a:ext cx="2194560" cy="594359"/>
           </a:xfrm>
           <a:prstGeom prst="rect">
             <a:avLst/>
@@ -27717,7 +27717,7 @@
           <a:p>
             <a:pPr>
               <a:lnSpc>
-                <a:spcPct val="100000"/>
+                <a:spcPct val="90000"/>
               </a:lnSpc>
               <a:defRPr sz="1100">
                 <a:solidFill>
@@ -27740,7 +27740,7 @@
         <p:spPr>
           <a:xfrm>
             <a:off x="6446520" y="4937760"/>
-            <a:ext cx="274320" cy="548640"/>
+            <a:ext cx="274320" cy="594359"/>
           </a:xfrm>
           <a:prstGeom prst="rect">
             <a:avLst/>
@@ -27775,7 +27775,7 @@
         <p:spPr>
           <a:xfrm>
             <a:off x="6720840" y="4937760"/>
-            <a:ext cx="2194560" cy="548640"/>
+            <a:ext cx="2194560" cy="594359"/>
           </a:xfrm>
           <a:prstGeom prst="rect">
             <a:avLst/>
@@ -27790,7 +27790,7 @@
           <a:p>
             <a:pPr>
               <a:lnSpc>
-                <a:spcPct val="100000"/>
+                <a:spcPct val="90000"/>
               </a:lnSpc>
               <a:defRPr sz="1100">
                 <a:solidFill>
@@ -27989,7 +27989,7 @@
         <p:spPr>
           <a:xfrm>
             <a:off x="594360" y="1737360"/>
-            <a:ext cx="274320" cy="548640"/>
+            <a:ext cx="274320" cy="594359"/>
           </a:xfrm>
           <a:prstGeom prst="rect">
             <a:avLst/>
@@ -28024,7 +28024,7 @@
         <p:spPr>
           <a:xfrm>
             <a:off x="868680" y="1737360"/>
-            <a:ext cx="2194560" cy="548640"/>
+            <a:ext cx="2194560" cy="594359"/>
           </a:xfrm>
           <a:prstGeom prst="rect">
             <a:avLst/>
@@ -28039,7 +28039,7 @@
           <a:p>
             <a:pPr>
               <a:lnSpc>
-                <a:spcPct val="100000"/>
+                <a:spcPct val="90000"/>
               </a:lnSpc>
               <a:defRPr sz="1100">
                 <a:solidFill>
@@ -28062,7 +28062,7 @@
         <p:spPr>
           <a:xfrm>
             <a:off x="594360" y="2377439"/>
-            <a:ext cx="274320" cy="548640"/>
+            <a:ext cx="274320" cy="594359"/>
           </a:xfrm>
           <a:prstGeom prst="rect">
             <a:avLst/>
@@ -28097,7 +28097,7 @@
         <p:spPr>
           <a:xfrm>
             <a:off x="868680" y="2377439"/>
-            <a:ext cx="2194560" cy="548640"/>
+            <a:ext cx="2194560" cy="594359"/>
           </a:xfrm>
           <a:prstGeom prst="rect">
             <a:avLst/>
@@ -28112,7 +28112,7 @@
           <a:p>
             <a:pPr>
               <a:lnSpc>
-                <a:spcPct val="100000"/>
+                <a:spcPct val="90000"/>
               </a:lnSpc>
               <a:defRPr sz="1100">
                 <a:solidFill>
@@ -28135,7 +28135,7 @@
         <p:spPr>
           <a:xfrm>
             <a:off x="594360" y="3017520"/>
-            <a:ext cx="274320" cy="548640"/>
+            <a:ext cx="274320" cy="594359"/>
           </a:xfrm>
           <a:prstGeom prst="rect">
             <a:avLst/>
@@ -28170,7 +28170,7 @@
         <p:spPr>
           <a:xfrm>
             <a:off x="868680" y="3017520"/>
-            <a:ext cx="2194560" cy="548640"/>
+            <a:ext cx="2194560" cy="594359"/>
           </a:xfrm>
           <a:prstGeom prst="rect">
             <a:avLst/>
@@ -28185,7 +28185,7 @@
           <a:p>
             <a:pPr>
               <a:lnSpc>
-                <a:spcPct val="100000"/>
+                <a:spcPct val="90000"/>
               </a:lnSpc>
               <a:defRPr sz="1100">
                 <a:solidFill>
@@ -28208,7 +28208,7 @@
         <p:spPr>
           <a:xfrm>
             <a:off x="594360" y="3657599"/>
-            <a:ext cx="274320" cy="548640"/>
+            <a:ext cx="274320" cy="594359"/>
           </a:xfrm>
           <a:prstGeom prst="rect">
             <a:avLst/>
@@ -28243,7 +28243,7 @@
         <p:spPr>
           <a:xfrm>
             <a:off x="868680" y="3657599"/>
-            <a:ext cx="2194560" cy="548640"/>
+            <a:ext cx="2194560" cy="594359"/>
           </a:xfrm>
           <a:prstGeom prst="rect">
             <a:avLst/>
@@ -28258,7 +28258,7 @@
           <a:p>
             <a:pPr>
               <a:lnSpc>
-                <a:spcPct val="100000"/>
+                <a:spcPct val="90000"/>
               </a:lnSpc>
               <a:defRPr sz="1100">
                 <a:solidFill>
@@ -28281,7 +28281,7 @@
         <p:spPr>
           <a:xfrm>
             <a:off x="594360" y="4297679"/>
-            <a:ext cx="274320" cy="548640"/>
+            <a:ext cx="274320" cy="594359"/>
           </a:xfrm>
           <a:prstGeom prst="rect">
             <a:avLst/>
@@ -28316,7 +28316,7 @@
         <p:spPr>
           <a:xfrm>
             <a:off x="868680" y="4297679"/>
-            <a:ext cx="2194560" cy="548640"/>
+            <a:ext cx="2194560" cy="594359"/>
           </a:xfrm>
           <a:prstGeom prst="rect">
             <a:avLst/>
@@ -28331,7 +28331,7 @@
           <a:p>
             <a:pPr>
               <a:lnSpc>
-                <a:spcPct val="100000"/>
+                <a:spcPct val="90000"/>
               </a:lnSpc>
               <a:defRPr sz="1100">
                 <a:solidFill>
@@ -28354,7 +28354,7 @@
         <p:spPr>
           <a:xfrm>
             <a:off x="594360" y="4937760"/>
-            <a:ext cx="274320" cy="548640"/>
+            <a:ext cx="274320" cy="594359"/>
           </a:xfrm>
           <a:prstGeom prst="rect">
             <a:avLst/>
@@ -28389,7 +28389,7 @@
         <p:spPr>
           <a:xfrm>
             <a:off x="868680" y="4937760"/>
-            <a:ext cx="2194560" cy="548640"/>
+            <a:ext cx="2194560" cy="594359"/>
           </a:xfrm>
           <a:prstGeom prst="rect">
             <a:avLst/>
@@ -28404,7 +28404,7 @@
           <a:p>
             <a:pPr>
               <a:lnSpc>
-                <a:spcPct val="100000"/>
+                <a:spcPct val="90000"/>
               </a:lnSpc>
               <a:defRPr sz="1100">
                 <a:solidFill>
@@ -28507,7 +28507,7 @@
         <p:spPr>
           <a:xfrm>
             <a:off x="3520440" y="1737360"/>
-            <a:ext cx="274320" cy="548640"/>
+            <a:ext cx="274320" cy="594359"/>
           </a:xfrm>
           <a:prstGeom prst="rect">
             <a:avLst/>
@@ -28542,7 +28542,7 @@
         <p:spPr>
           <a:xfrm>
             <a:off x="3794760" y="1737360"/>
-            <a:ext cx="2194560" cy="548640"/>
+            <a:ext cx="2194560" cy="594359"/>
           </a:xfrm>
           <a:prstGeom prst="rect">
             <a:avLst/>
@@ -28557,7 +28557,7 @@
           <a:p>
             <a:pPr>
               <a:lnSpc>
-                <a:spcPct val="100000"/>
+                <a:spcPct val="90000"/>
               </a:lnSpc>
               <a:defRPr sz="1100">
                 <a:solidFill>
@@ -28580,7 +28580,7 @@
         <p:spPr>
           <a:xfrm>
             <a:off x="3520440" y="2377439"/>
-            <a:ext cx="274320" cy="548640"/>
+            <a:ext cx="274320" cy="594359"/>
           </a:xfrm>
           <a:prstGeom prst="rect">
             <a:avLst/>
@@ -28615,7 +28615,7 @@
         <p:spPr>
           <a:xfrm>
             <a:off x="3794760" y="2377439"/>
-            <a:ext cx="2194560" cy="548640"/>
+            <a:ext cx="2194560" cy="594359"/>
           </a:xfrm>
           <a:prstGeom prst="rect">
             <a:avLst/>
@@ -28630,7 +28630,7 @@
           <a:p>
             <a:pPr>
               <a:lnSpc>
-                <a:spcPct val="100000"/>
+                <a:spcPct val="90000"/>
               </a:lnSpc>
               <a:defRPr sz="1100">
                 <a:solidFill>
@@ -28653,7 +28653,7 @@
         <p:spPr>
           <a:xfrm>
             <a:off x="3520440" y="3017520"/>
-            <a:ext cx="274320" cy="548640"/>
+            <a:ext cx="274320" cy="594359"/>
           </a:xfrm>
           <a:prstGeom prst="rect">
             <a:avLst/>
@@ -28688,7 +28688,7 @@
         <p:spPr>
           <a:xfrm>
             <a:off x="3794760" y="3017520"/>
-            <a:ext cx="2194560" cy="548640"/>
+            <a:ext cx="2194560" cy="594359"/>
           </a:xfrm>
           <a:prstGeom prst="rect">
             <a:avLst/>
@@ -28703,7 +28703,7 @@
           <a:p>
             <a:pPr>
               <a:lnSpc>
-                <a:spcPct val="100000"/>
+                <a:spcPct val="90000"/>
               </a:lnSpc>
               <a:defRPr sz="1100">
                 <a:solidFill>
@@ -28726,7 +28726,7 @@
         <p:spPr>
           <a:xfrm>
             <a:off x="3520440" y="3657599"/>
-            <a:ext cx="274320" cy="548640"/>
+            <a:ext cx="274320" cy="594359"/>
           </a:xfrm>
           <a:prstGeom prst="rect">
             <a:avLst/>
@@ -28761,7 +28761,7 @@
         <p:spPr>
           <a:xfrm>
             <a:off x="3794760" y="3657599"/>
-            <a:ext cx="2194560" cy="548640"/>
+            <a:ext cx="2194560" cy="594359"/>
           </a:xfrm>
           <a:prstGeom prst="rect">
             <a:avLst/>
@@ -28776,7 +28776,7 @@
           <a:p>
             <a:pPr>
               <a:lnSpc>
-                <a:spcPct val="100000"/>
+                <a:spcPct val="90000"/>
               </a:lnSpc>
               <a:defRPr sz="1100">
                 <a:solidFill>
@@ -28799,7 +28799,7 @@
         <p:spPr>
           <a:xfrm>
             <a:off x="3520440" y="4297679"/>
-            <a:ext cx="274320" cy="548640"/>
+            <a:ext cx="274320" cy="594359"/>
           </a:xfrm>
           <a:prstGeom prst="rect">
             <a:avLst/>
@@ -28834,7 +28834,7 @@
         <p:spPr>
           <a:xfrm>
             <a:off x="3794760" y="4297679"/>
-            <a:ext cx="2194560" cy="548640"/>
+            <a:ext cx="2194560" cy="594359"/>
           </a:xfrm>
           <a:prstGeom prst="rect">
             <a:avLst/>
@@ -28849,7 +28849,7 @@
           <a:p>
             <a:pPr>
               <a:lnSpc>
-                <a:spcPct val="100000"/>
+                <a:spcPct val="90000"/>
               </a:lnSpc>
               <a:defRPr sz="1100">
                 <a:solidFill>
@@ -28872,7 +28872,7 @@
         <p:spPr>
           <a:xfrm>
             <a:off x="3520440" y="4937760"/>
-            <a:ext cx="274320" cy="548640"/>
+            <a:ext cx="274320" cy="594359"/>
           </a:xfrm>
           <a:prstGeom prst="rect">
             <a:avLst/>
@@ -28907,7 +28907,7 @@
         <p:spPr>
           <a:xfrm>
             <a:off x="3794760" y="4937760"/>
-            <a:ext cx="2194560" cy="548640"/>
+            <a:ext cx="2194560" cy="594359"/>
           </a:xfrm>
           <a:prstGeom prst="rect">
             <a:avLst/>
@@ -28922,7 +28922,7 @@
           <a:p>
             <a:pPr>
               <a:lnSpc>
-                <a:spcPct val="100000"/>
+                <a:spcPct val="90000"/>
               </a:lnSpc>
               <a:defRPr sz="1100">
                 <a:solidFill>
@@ -29025,7 +29025,7 @@
         <p:spPr>
           <a:xfrm>
             <a:off x="6446520" y="1737360"/>
-            <a:ext cx="274320" cy="548640"/>
+            <a:ext cx="274320" cy="594359"/>
           </a:xfrm>
           <a:prstGeom prst="rect">
             <a:avLst/>
@@ -29060,7 +29060,7 @@
         <p:spPr>
           <a:xfrm>
             <a:off x="6720840" y="1737360"/>
-            <a:ext cx="2194560" cy="548640"/>
+            <a:ext cx="2194560" cy="594359"/>
           </a:xfrm>
           <a:prstGeom prst="rect">
             <a:avLst/>
@@ -29075,7 +29075,7 @@
           <a:p>
             <a:pPr>
               <a:lnSpc>
-                <a:spcPct val="100000"/>
+                <a:spcPct val="90000"/>
               </a:lnSpc>
               <a:defRPr sz="1100">
                 <a:solidFill>
@@ -29098,7 +29098,7 @@
         <p:spPr>
           <a:xfrm>
             <a:off x="6446520" y="2377439"/>
-            <a:ext cx="274320" cy="548640"/>
+            <a:ext cx="274320" cy="594359"/>
           </a:xfrm>
           <a:prstGeom prst="rect">
             <a:avLst/>
@@ -29133,7 +29133,7 @@
         <p:spPr>
           <a:xfrm>
             <a:off x="6720840" y="2377439"/>
-            <a:ext cx="2194560" cy="548640"/>
+            <a:ext cx="2194560" cy="594359"/>
           </a:xfrm>
           <a:prstGeom prst="rect">
             <a:avLst/>
@@ -29148,7 +29148,7 @@
           <a:p>
             <a:pPr>
               <a:lnSpc>
-                <a:spcPct val="100000"/>
+                <a:spcPct val="90000"/>
               </a:lnSpc>
               <a:defRPr sz="1100">
                 <a:solidFill>
@@ -29171,7 +29171,7 @@
         <p:spPr>
           <a:xfrm>
             <a:off x="6446520" y="3017520"/>
-            <a:ext cx="274320" cy="548640"/>
+            <a:ext cx="274320" cy="594359"/>
           </a:xfrm>
           <a:prstGeom prst="rect">
             <a:avLst/>
@@ -29206,7 +29206,7 @@
         <p:spPr>
           <a:xfrm>
             <a:off x="6720840" y="3017520"/>
-            <a:ext cx="2194560" cy="548640"/>
+            <a:ext cx="2194560" cy="594359"/>
           </a:xfrm>
           <a:prstGeom prst="rect">
             <a:avLst/>
@@ -29221,7 +29221,7 @@
           <a:p>
             <a:pPr>
               <a:lnSpc>
-                <a:spcPct val="100000"/>
+                <a:spcPct val="90000"/>
               </a:lnSpc>
               <a:defRPr sz="1100">
                 <a:solidFill>
@@ -29244,7 +29244,7 @@
         <p:spPr>
           <a:xfrm>
             <a:off x="6446520" y="3657599"/>
-            <a:ext cx="274320" cy="548640"/>
+            <a:ext cx="274320" cy="594359"/>
           </a:xfrm>
           <a:prstGeom prst="rect">
             <a:avLst/>
@@ -29279,7 +29279,7 @@
         <p:spPr>
           <a:xfrm>
             <a:off x="6720840" y="3657599"/>
-            <a:ext cx="2194560" cy="548640"/>
+            <a:ext cx="2194560" cy="594359"/>
           </a:xfrm>
           <a:prstGeom prst="rect">
             <a:avLst/>
@@ -29294,7 +29294,7 @@
           <a:p>
             <a:pPr>
               <a:lnSpc>
-                <a:spcPct val="100000"/>
+                <a:spcPct val="90000"/>
               </a:lnSpc>
               <a:defRPr sz="1100">
                 <a:solidFill>
@@ -29317,7 +29317,7 @@
         <p:spPr>
           <a:xfrm>
             <a:off x="6446520" y="4297679"/>
-            <a:ext cx="274320" cy="548640"/>
+            <a:ext cx="274320" cy="594359"/>
           </a:xfrm>
           <a:prstGeom prst="rect">
             <a:avLst/>
@@ -29352,7 +29352,7 @@
         <p:spPr>
           <a:xfrm>
             <a:off x="6720840" y="4297679"/>
-            <a:ext cx="2194560" cy="548640"/>
+            <a:ext cx="2194560" cy="594359"/>
           </a:xfrm>
           <a:prstGeom prst="rect">
             <a:avLst/>
@@ -29367,7 +29367,7 @@
           <a:p>
             <a:pPr>
               <a:lnSpc>
-                <a:spcPct val="100000"/>
+                <a:spcPct val="90000"/>
               </a:lnSpc>
               <a:defRPr sz="1100">
                 <a:solidFill>
@@ -29390,7 +29390,7 @@
         <p:spPr>
           <a:xfrm>
             <a:off x="6446520" y="4937760"/>
-            <a:ext cx="274320" cy="548640"/>
+            <a:ext cx="274320" cy="594359"/>
           </a:xfrm>
           <a:prstGeom prst="rect">
             <a:avLst/>
@@ -29425,7 +29425,7 @@
         <p:spPr>
           <a:xfrm>
             <a:off x="6720840" y="4937760"/>
-            <a:ext cx="2194560" cy="548640"/>
+            <a:ext cx="2194560" cy="594359"/>
           </a:xfrm>
           <a:prstGeom prst="rect">
             <a:avLst/>
@@ -29440,7 +29440,7 @@
           <a:p>
             <a:pPr>
               <a:lnSpc>
-                <a:spcPct val="100000"/>
+                <a:spcPct val="90000"/>
               </a:lnSpc>
               <a:defRPr sz="1100">
                 <a:solidFill>
@@ -29639,7 +29639,7 @@
         <p:spPr>
           <a:xfrm>
             <a:off x="594360" y="1737360"/>
-            <a:ext cx="274320" cy="548640"/>
+            <a:ext cx="274320" cy="594359"/>
           </a:xfrm>
           <a:prstGeom prst="rect">
             <a:avLst/>
@@ -29674,7 +29674,7 @@
         <p:spPr>
           <a:xfrm>
             <a:off x="868680" y="1737360"/>
-            <a:ext cx="2194560" cy="548640"/>
+            <a:ext cx="2194560" cy="594359"/>
           </a:xfrm>
           <a:prstGeom prst="rect">
             <a:avLst/>
@@ -29689,7 +29689,7 @@
           <a:p>
             <a:pPr>
               <a:lnSpc>
-                <a:spcPct val="100000"/>
+                <a:spcPct val="90000"/>
               </a:lnSpc>
               <a:defRPr sz="1100">
                 <a:solidFill>
@@ -29712,7 +29712,7 @@
         <p:spPr>
           <a:xfrm>
             <a:off x="594360" y="2377439"/>
-            <a:ext cx="274320" cy="548640"/>
+            <a:ext cx="274320" cy="594359"/>
           </a:xfrm>
           <a:prstGeom prst="rect">
             <a:avLst/>
@@ -29747,7 +29747,7 @@
         <p:spPr>
           <a:xfrm>
             <a:off x="868680" y="2377439"/>
-            <a:ext cx="2194560" cy="548640"/>
+            <a:ext cx="2194560" cy="594359"/>
           </a:xfrm>
           <a:prstGeom prst="rect">
             <a:avLst/>
@@ -29762,7 +29762,7 @@
           <a:p>
             <a:pPr>
               <a:lnSpc>
-                <a:spcPct val="100000"/>
+                <a:spcPct val="90000"/>
               </a:lnSpc>
               <a:defRPr sz="1100">
                 <a:solidFill>
@@ -29785,7 +29785,7 @@
         <p:spPr>
           <a:xfrm>
             <a:off x="594360" y="3017520"/>
-            <a:ext cx="274320" cy="548640"/>
+            <a:ext cx="274320" cy="594359"/>
           </a:xfrm>
           <a:prstGeom prst="rect">
             <a:avLst/>
@@ -29820,7 +29820,7 @@
         <p:spPr>
           <a:xfrm>
             <a:off x="868680" y="3017520"/>
-            <a:ext cx="2194560" cy="548640"/>
+            <a:ext cx="2194560" cy="594359"/>
           </a:xfrm>
           <a:prstGeom prst="rect">
             <a:avLst/>
@@ -29835,7 +29835,7 @@
           <a:p>
             <a:pPr>
               <a:lnSpc>
-                <a:spcPct val="100000"/>
+                <a:spcPct val="90000"/>
               </a:lnSpc>
               <a:defRPr sz="1100">
                 <a:solidFill>
@@ -29858,7 +29858,7 @@
         <p:spPr>
           <a:xfrm>
             <a:off x="594360" y="3657599"/>
-            <a:ext cx="274320" cy="548640"/>
+            <a:ext cx="274320" cy="594359"/>
           </a:xfrm>
           <a:prstGeom prst="rect">
             <a:avLst/>
@@ -29893,7 +29893,7 @@
         <p:spPr>
           <a:xfrm>
             <a:off x="868680" y="3657599"/>
-            <a:ext cx="2194560" cy="548640"/>
+            <a:ext cx="2194560" cy="594359"/>
           </a:xfrm>
           <a:prstGeom prst="rect">
             <a:avLst/>
@@ -29908,7 +29908,7 @@
           <a:p>
             <a:pPr>
               <a:lnSpc>
-                <a:spcPct val="100000"/>
+                <a:spcPct val="90000"/>
               </a:lnSpc>
               <a:defRPr sz="1100">
                 <a:solidFill>
@@ -29931,7 +29931,7 @@
         <p:spPr>
           <a:xfrm>
             <a:off x="594360" y="4297679"/>
-            <a:ext cx="274320" cy="548640"/>
+            <a:ext cx="274320" cy="594359"/>
           </a:xfrm>
           <a:prstGeom prst="rect">
             <a:avLst/>
@@ -29966,7 +29966,7 @@
         <p:spPr>
           <a:xfrm>
             <a:off x="868680" y="4297679"/>
-            <a:ext cx="2194560" cy="548640"/>
+            <a:ext cx="2194560" cy="594359"/>
           </a:xfrm>
           <a:prstGeom prst="rect">
             <a:avLst/>
@@ -29981,7 +29981,7 @@
           <a:p>
             <a:pPr>
               <a:lnSpc>
-                <a:spcPct val="100000"/>
+                <a:spcPct val="90000"/>
               </a:lnSpc>
               <a:defRPr sz="1100">
                 <a:solidFill>
@@ -30004,7 +30004,7 @@
         <p:spPr>
           <a:xfrm>
             <a:off x="594360" y="4937760"/>
-            <a:ext cx="274320" cy="548640"/>
+            <a:ext cx="274320" cy="594359"/>
           </a:xfrm>
           <a:prstGeom prst="rect">
             <a:avLst/>
@@ -30039,7 +30039,7 @@
         <p:spPr>
           <a:xfrm>
             <a:off x="868680" y="4937760"/>
-            <a:ext cx="2194560" cy="548640"/>
+            <a:ext cx="2194560" cy="594359"/>
           </a:xfrm>
           <a:prstGeom prst="rect">
             <a:avLst/>
@@ -30054,7 +30054,7 @@
           <a:p>
             <a:pPr>
               <a:lnSpc>
-                <a:spcPct val="100000"/>
+                <a:spcPct val="90000"/>
               </a:lnSpc>
               <a:defRPr sz="1100">
                 <a:solidFill>
@@ -30157,7 +30157,7 @@
         <p:spPr>
           <a:xfrm>
             <a:off x="3520440" y="1737360"/>
-            <a:ext cx="274320" cy="548640"/>
+            <a:ext cx="274320" cy="594359"/>
           </a:xfrm>
           <a:prstGeom prst="rect">
             <a:avLst/>
@@ -30192,7 +30192,7 @@
         <p:spPr>
           <a:xfrm>
             <a:off x="3794760" y="1737360"/>
-            <a:ext cx="2194560" cy="548640"/>
+            <a:ext cx="2194560" cy="594359"/>
           </a:xfrm>
           <a:prstGeom prst="rect">
             <a:avLst/>
@@ -30207,7 +30207,7 @@
           <a:p>
             <a:pPr>
               <a:lnSpc>
-                <a:spcPct val="100000"/>
+                <a:spcPct val="90000"/>
               </a:lnSpc>
               <a:defRPr sz="1100">
                 <a:solidFill>
@@ -30230,7 +30230,7 @@
         <p:spPr>
           <a:xfrm>
             <a:off x="3520440" y="2377439"/>
-            <a:ext cx="274320" cy="548640"/>
+            <a:ext cx="274320" cy="594359"/>
           </a:xfrm>
           <a:prstGeom prst="rect">
             <a:avLst/>
@@ -30265,7 +30265,7 @@
         <p:spPr>
           <a:xfrm>
             <a:off x="3794760" y="2377439"/>
-            <a:ext cx="2194560" cy="548640"/>
+            <a:ext cx="2194560" cy="594359"/>
           </a:xfrm>
           <a:prstGeom prst="rect">
             <a:avLst/>
@@ -30280,7 +30280,7 @@
           <a:p>
             <a:pPr>
               <a:lnSpc>
-                <a:spcPct val="100000"/>
+                <a:spcPct val="90000"/>
               </a:lnSpc>
               <a:defRPr sz="1100">
                 <a:solidFill>
@@ -30303,7 +30303,7 @@
         <p:spPr>
           <a:xfrm>
             <a:off x="3520440" y="3017520"/>
-            <a:ext cx="274320" cy="548640"/>
+            <a:ext cx="274320" cy="594359"/>
           </a:xfrm>
           <a:prstGeom prst="rect">
             <a:avLst/>
@@ -30338,7 +30338,7 @@
         <p:spPr>
           <a:xfrm>
             <a:off x="3794760" y="3017520"/>
-            <a:ext cx="2194560" cy="548640"/>
+            <a:ext cx="2194560" cy="594359"/>
           </a:xfrm>
           <a:prstGeom prst="rect">
             <a:avLst/>
@@ -30353,7 +30353,7 @@
           <a:p>
             <a:pPr>
               <a:lnSpc>
-                <a:spcPct val="100000"/>
+                <a:spcPct val="90000"/>
               </a:lnSpc>
               <a:defRPr sz="1100">
                 <a:solidFill>
@@ -30376,7 +30376,7 @@
         <p:spPr>
           <a:xfrm>
             <a:off x="3520440" y="3657599"/>
-            <a:ext cx="274320" cy="548640"/>
+            <a:ext cx="274320" cy="594359"/>
           </a:xfrm>
           <a:prstGeom prst="rect">
             <a:avLst/>
@@ -30411,7 +30411,7 @@
         <p:spPr>
           <a:xfrm>
             <a:off x="3794760" y="3657599"/>
-            <a:ext cx="2194560" cy="548640"/>
+            <a:ext cx="2194560" cy="594359"/>
           </a:xfrm>
           <a:prstGeom prst="rect">
             <a:avLst/>
@@ -30426,7 +30426,7 @@
           <a:p>
             <a:pPr>
               <a:lnSpc>
-                <a:spcPct val="100000"/>
+                <a:spcPct val="90000"/>
               </a:lnSpc>
               <a:defRPr sz="1100">
                 <a:solidFill>
@@ -30449,7 +30449,7 @@
         <p:spPr>
           <a:xfrm>
             <a:off x="3520440" y="4297679"/>
-            <a:ext cx="274320" cy="548640"/>
+            <a:ext cx="274320" cy="594359"/>
           </a:xfrm>
           <a:prstGeom prst="rect">
             <a:avLst/>
@@ -30484,7 +30484,7 @@
         <p:spPr>
           <a:xfrm>
             <a:off x="3794760" y="4297679"/>
-            <a:ext cx="2194560" cy="548640"/>
+            <a:ext cx="2194560" cy="594359"/>
           </a:xfrm>
           <a:prstGeom prst="rect">
             <a:avLst/>
@@ -30499,7 +30499,7 @@
           <a:p>
             <a:pPr>
               <a:lnSpc>
-                <a:spcPct val="100000"/>
+                <a:spcPct val="90000"/>
               </a:lnSpc>
               <a:defRPr sz="1100">
                 <a:solidFill>
@@ -30522,7 +30522,7 @@
         <p:spPr>
           <a:xfrm>
             <a:off x="3520440" y="4937760"/>
-            <a:ext cx="274320" cy="548640"/>
+            <a:ext cx="274320" cy="594359"/>
           </a:xfrm>
           <a:prstGeom prst="rect">
             <a:avLst/>
@@ -30557,7 +30557,7 @@
         <p:spPr>
           <a:xfrm>
             <a:off x="3794760" y="4937760"/>
-            <a:ext cx="2194560" cy="548640"/>
+            <a:ext cx="2194560" cy="594359"/>
           </a:xfrm>
           <a:prstGeom prst="rect">
             <a:avLst/>
@@ -30572,7 +30572,7 @@
           <a:p>
             <a:pPr>
               <a:lnSpc>
-                <a:spcPct val="100000"/>
+                <a:spcPct val="90000"/>
               </a:lnSpc>
               <a:defRPr sz="1100">
                 <a:solidFill>
@@ -30675,7 +30675,7 @@
         <p:spPr>
           <a:xfrm>
             <a:off x="6446520" y="1737360"/>
-            <a:ext cx="274320" cy="548640"/>
+            <a:ext cx="274320" cy="594359"/>
           </a:xfrm>
           <a:prstGeom prst="rect">
             <a:avLst/>
@@ -30710,7 +30710,7 @@
         <p:spPr>
           <a:xfrm>
             <a:off x="6720840" y="1737360"/>
-            <a:ext cx="2194560" cy="548640"/>
+            <a:ext cx="2194560" cy="594359"/>
           </a:xfrm>
           <a:prstGeom prst="rect">
             <a:avLst/>
@@ -30725,7 +30725,7 @@
           <a:p>
             <a:pPr>
               <a:lnSpc>
-                <a:spcPct val="100000"/>
+                <a:spcPct val="90000"/>
               </a:lnSpc>
               <a:defRPr sz="1100">
                 <a:solidFill>
@@ -30748,7 +30748,7 @@
         <p:spPr>
           <a:xfrm>
             <a:off x="6446520" y="2377439"/>
-            <a:ext cx="274320" cy="548640"/>
+            <a:ext cx="274320" cy="594359"/>
           </a:xfrm>
           <a:prstGeom prst="rect">
             <a:avLst/>
@@ -30783,7 +30783,7 @@
         <p:spPr>
           <a:xfrm>
             <a:off x="6720840" y="2377439"/>
-            <a:ext cx="2194560" cy="548640"/>
+            <a:ext cx="2194560" cy="594359"/>
           </a:xfrm>
           <a:prstGeom prst="rect">
             <a:avLst/>
@@ -30798,7 +30798,7 @@
           <a:p>
             <a:pPr>
               <a:lnSpc>
-                <a:spcPct val="100000"/>
+                <a:spcPct val="90000"/>
               </a:lnSpc>
               <a:defRPr sz="1100">
                 <a:solidFill>
@@ -30821,7 +30821,7 @@
         <p:spPr>
           <a:xfrm>
             <a:off x="6446520" y="3017520"/>
-            <a:ext cx="274320" cy="548640"/>
+            <a:ext cx="274320" cy="594359"/>
           </a:xfrm>
           <a:prstGeom prst="rect">
             <a:avLst/>
@@ -30856,7 +30856,7 @@
         <p:spPr>
           <a:xfrm>
             <a:off x="6720840" y="3017520"/>
-            <a:ext cx="2194560" cy="548640"/>
+            <a:ext cx="2194560" cy="594359"/>
           </a:xfrm>
           <a:prstGeom prst="rect">
             <a:avLst/>
@@ -30871,7 +30871,7 @@
           <a:p>
             <a:pPr>
               <a:lnSpc>
-                <a:spcPct val="100000"/>
+                <a:spcPct val="90000"/>
               </a:lnSpc>
               <a:defRPr sz="1100">
                 <a:solidFill>
@@ -30894,7 +30894,7 @@
         <p:spPr>
           <a:xfrm>
             <a:off x="6446520" y="3657599"/>
-            <a:ext cx="274320" cy="548640"/>
+            <a:ext cx="274320" cy="594359"/>
           </a:xfrm>
           <a:prstGeom prst="rect">
             <a:avLst/>
@@ -30929,7 +30929,7 @@
         <p:spPr>
           <a:xfrm>
             <a:off x="6720840" y="3657599"/>
-            <a:ext cx="2194560" cy="548640"/>
+            <a:ext cx="2194560" cy="594359"/>
           </a:xfrm>
           <a:prstGeom prst="rect">
             <a:avLst/>
@@ -30944,7 +30944,7 @@
           <a:p>
             <a:pPr>
               <a:lnSpc>
-                <a:spcPct val="100000"/>
+                <a:spcPct val="90000"/>
               </a:lnSpc>
               <a:defRPr sz="1100">
                 <a:solidFill>
@@ -30967,7 +30967,7 @@
         <p:spPr>
           <a:xfrm>
             <a:off x="6446520" y="4297679"/>
-            <a:ext cx="274320" cy="548640"/>
+            <a:ext cx="274320" cy="594359"/>
           </a:xfrm>
           <a:prstGeom prst="rect">
             <a:avLst/>
@@ -31002,7 +31002,7 @@
         <p:spPr>
           <a:xfrm>
             <a:off x="6720840" y="4297679"/>
-            <a:ext cx="2194560" cy="548640"/>
+            <a:ext cx="2194560" cy="594359"/>
           </a:xfrm>
           <a:prstGeom prst="rect">
             <a:avLst/>
@@ -31017,7 +31017,7 @@
           <a:p>
             <a:pPr>
               <a:lnSpc>
-                <a:spcPct val="100000"/>
+                <a:spcPct val="90000"/>
               </a:lnSpc>
               <a:defRPr sz="1100">
                 <a:solidFill>
@@ -31040,7 +31040,7 @@
         <p:spPr>
           <a:xfrm>
             <a:off x="6446520" y="4937760"/>
-            <a:ext cx="274320" cy="548640"/>
+            <a:ext cx="274320" cy="594359"/>
           </a:xfrm>
           <a:prstGeom prst="rect">
             <a:avLst/>
@@ -31075,7 +31075,7 @@
         <p:spPr>
           <a:xfrm>
             <a:off x="6720840" y="4937760"/>
-            <a:ext cx="2194560" cy="548640"/>
+            <a:ext cx="2194560" cy="594359"/>
           </a:xfrm>
           <a:prstGeom prst="rect">
             <a:avLst/>
@@ -31090,7 +31090,7 @@
           <a:p>
             <a:pPr>
               <a:lnSpc>
-                <a:spcPct val="100000"/>
+                <a:spcPct val="90000"/>
               </a:lnSpc>
               <a:defRPr sz="1100">
                 <a:solidFill>
@@ -31289,7 +31289,7 @@
         <p:spPr>
           <a:xfrm>
             <a:off x="594360" y="1737360"/>
-            <a:ext cx="274320" cy="548640"/>
+            <a:ext cx="274320" cy="594359"/>
           </a:xfrm>
           <a:prstGeom prst="rect">
             <a:avLst/>
@@ -31324,7 +31324,7 @@
         <p:spPr>
           <a:xfrm>
             <a:off x="868680" y="1737360"/>
-            <a:ext cx="2194560" cy="548640"/>
+            <a:ext cx="2194560" cy="594359"/>
           </a:xfrm>
           <a:prstGeom prst="rect">
             <a:avLst/>
@@ -31339,7 +31339,7 @@
           <a:p>
             <a:pPr>
               <a:lnSpc>
-                <a:spcPct val="100000"/>
+                <a:spcPct val="90000"/>
               </a:lnSpc>
               <a:defRPr sz="1100">
                 <a:solidFill>
@@ -31362,7 +31362,7 @@
         <p:spPr>
           <a:xfrm>
             <a:off x="594360" y="2377439"/>
-            <a:ext cx="274320" cy="548640"/>
+            <a:ext cx="274320" cy="594359"/>
           </a:xfrm>
           <a:prstGeom prst="rect">
             <a:avLst/>
@@ -31397,7 +31397,7 @@
         <p:spPr>
           <a:xfrm>
             <a:off x="868680" y="2377439"/>
-            <a:ext cx="2194560" cy="548640"/>
+            <a:ext cx="2194560" cy="594359"/>
           </a:xfrm>
           <a:prstGeom prst="rect">
             <a:avLst/>
@@ -31412,7 +31412,7 @@
           <a:p>
             <a:pPr>
               <a:lnSpc>
-                <a:spcPct val="100000"/>
+                <a:spcPct val="90000"/>
               </a:lnSpc>
               <a:defRPr sz="1100">
                 <a:solidFill>
@@ -31435,7 +31435,7 @@
         <p:spPr>
           <a:xfrm>
             <a:off x="594360" y="3017520"/>
-            <a:ext cx="274320" cy="548640"/>
+            <a:ext cx="274320" cy="594359"/>
           </a:xfrm>
           <a:prstGeom prst="rect">
             <a:avLst/>
@@ -31470,7 +31470,7 @@
         <p:spPr>
           <a:xfrm>
             <a:off x="868680" y="3017520"/>
-            <a:ext cx="2194560" cy="548640"/>
+            <a:ext cx="2194560" cy="594359"/>
           </a:xfrm>
           <a:prstGeom prst="rect">
             <a:avLst/>
@@ -31485,7 +31485,7 @@
           <a:p>
             <a:pPr>
               <a:lnSpc>
-                <a:spcPct val="100000"/>
+                <a:spcPct val="90000"/>
               </a:lnSpc>
               <a:defRPr sz="1100">
                 <a:solidFill>
@@ -31508,7 +31508,7 @@
         <p:spPr>
           <a:xfrm>
             <a:off x="594360" y="3657599"/>
-            <a:ext cx="274320" cy="548640"/>
+            <a:ext cx="274320" cy="594359"/>
           </a:xfrm>
           <a:prstGeom prst="rect">
             <a:avLst/>
@@ -31543,7 +31543,7 @@
         <p:spPr>
           <a:xfrm>
             <a:off x="868680" y="3657599"/>
-            <a:ext cx="2194560" cy="548640"/>
+            <a:ext cx="2194560" cy="594359"/>
           </a:xfrm>
           <a:prstGeom prst="rect">
             <a:avLst/>
@@ -31558,7 +31558,7 @@
           <a:p>
             <a:pPr>
               <a:lnSpc>
-                <a:spcPct val="100000"/>
+                <a:spcPct val="90000"/>
               </a:lnSpc>
               <a:defRPr sz="1100">
                 <a:solidFill>
@@ -31581,7 +31581,7 @@
         <p:spPr>
           <a:xfrm>
             <a:off x="594360" y="4297679"/>
-            <a:ext cx="274320" cy="548640"/>
+            <a:ext cx="274320" cy="594359"/>
           </a:xfrm>
           <a:prstGeom prst="rect">
             <a:avLst/>
@@ -31616,7 +31616,7 @@
         <p:spPr>
           <a:xfrm>
             <a:off x="868680" y="4297679"/>
-            <a:ext cx="2194560" cy="548640"/>
+            <a:ext cx="2194560" cy="594359"/>
           </a:xfrm>
           <a:prstGeom prst="rect">
             <a:avLst/>
@@ -31631,7 +31631,7 @@
           <a:p>
             <a:pPr>
               <a:lnSpc>
-                <a:spcPct val="100000"/>
+                <a:spcPct val="90000"/>
               </a:lnSpc>
               <a:defRPr sz="1100">
                 <a:solidFill>
@@ -31654,7 +31654,7 @@
         <p:spPr>
           <a:xfrm>
             <a:off x="594360" y="4937760"/>
-            <a:ext cx="274320" cy="548640"/>
+            <a:ext cx="274320" cy="594359"/>
           </a:xfrm>
           <a:prstGeom prst="rect">
             <a:avLst/>
@@ -31689,7 +31689,7 @@
         <p:spPr>
           <a:xfrm>
             <a:off x="868680" y="4937760"/>
-            <a:ext cx="2194560" cy="548640"/>
+            <a:ext cx="2194560" cy="594359"/>
           </a:xfrm>
           <a:prstGeom prst="rect">
             <a:avLst/>
@@ -31704,7 +31704,7 @@
           <a:p>
             <a:pPr>
               <a:lnSpc>
-                <a:spcPct val="100000"/>
+                <a:spcPct val="90000"/>
               </a:lnSpc>
               <a:defRPr sz="1100">
                 <a:solidFill>
@@ -31807,7 +31807,7 @@
         <p:spPr>
           <a:xfrm>
             <a:off x="3520440" y="1737360"/>
-            <a:ext cx="274320" cy="548640"/>
+            <a:ext cx="274320" cy="594359"/>
           </a:xfrm>
           <a:prstGeom prst="rect">
             <a:avLst/>
@@ -31842,7 +31842,7 @@
         <p:spPr>
           <a:xfrm>
             <a:off x="3794760" y="1737360"/>
-            <a:ext cx="2194560" cy="548640"/>
+            <a:ext cx="2194560" cy="594359"/>
           </a:xfrm>
           <a:prstGeom prst="rect">
             <a:avLst/>
@@ -31857,7 +31857,7 @@
           <a:p>
             <a:pPr>
               <a:lnSpc>
-                <a:spcPct val="100000"/>
+                <a:spcPct val="90000"/>
               </a:lnSpc>
               <a:defRPr sz="1100">
                 <a:solidFill>
@@ -31880,7 +31880,7 @@
         <p:spPr>
           <a:xfrm>
             <a:off x="3520440" y="2377439"/>
-            <a:ext cx="274320" cy="548640"/>
+            <a:ext cx="274320" cy="594359"/>
           </a:xfrm>
           <a:prstGeom prst="rect">
             <a:avLst/>
@@ -31915,7 +31915,7 @@
         <p:spPr>
           <a:xfrm>
             <a:off x="3794760" y="2377439"/>
-            <a:ext cx="2194560" cy="548640"/>
+            <a:ext cx="2194560" cy="594359"/>
           </a:xfrm>
           <a:prstGeom prst="rect">
             <a:avLst/>
@@ -31930,7 +31930,7 @@
           <a:p>
             <a:pPr>
               <a:lnSpc>
-                <a:spcPct val="100000"/>
+                <a:spcPct val="90000"/>
               </a:lnSpc>
               <a:defRPr sz="1100">
                 <a:solidFill>
@@ -31953,7 +31953,7 @@
         <p:spPr>
           <a:xfrm>
             <a:off x="3520440" y="3017520"/>
-            <a:ext cx="274320" cy="548640"/>
+            <a:ext cx="274320" cy="594359"/>
           </a:xfrm>
           <a:prstGeom prst="rect">
             <a:avLst/>
@@ -31988,7 +31988,7 @@
         <p:spPr>
           <a:xfrm>
             <a:off x="3794760" y="3017520"/>
-            <a:ext cx="2194560" cy="548640"/>
+            <a:ext cx="2194560" cy="594359"/>
           </a:xfrm>
           <a:prstGeom prst="rect">
             <a:avLst/>
@@ -32003,7 +32003,7 @@
           <a:p>
             <a:pPr>
               <a:lnSpc>
-                <a:spcPct val="100000"/>
+                <a:spcPct val="90000"/>
               </a:lnSpc>
               <a:defRPr sz="1100">
                 <a:solidFill>
@@ -32026,7 +32026,7 @@
         <p:spPr>
           <a:xfrm>
             <a:off x="3520440" y="3657599"/>
-            <a:ext cx="274320" cy="548640"/>
+            <a:ext cx="274320" cy="594359"/>
           </a:xfrm>
           <a:prstGeom prst="rect">
             <a:avLst/>
@@ -32061,7 +32061,7 @@
         <p:spPr>
           <a:xfrm>
             <a:off x="3794760" y="3657599"/>
-            <a:ext cx="2194560" cy="548640"/>
+            <a:ext cx="2194560" cy="594359"/>
           </a:xfrm>
           <a:prstGeom prst="rect">
             <a:avLst/>
@@ -32076,7 +32076,7 @@
           <a:p>
             <a:pPr>
               <a:lnSpc>
-                <a:spcPct val="100000"/>
+                <a:spcPct val="90000"/>
               </a:lnSpc>
               <a:defRPr sz="1100">
                 <a:solidFill>
@@ -32099,7 +32099,7 @@
         <p:spPr>
           <a:xfrm>
             <a:off x="3520440" y="4297679"/>
-            <a:ext cx="274320" cy="548640"/>
+            <a:ext cx="274320" cy="594359"/>
           </a:xfrm>
           <a:prstGeom prst="rect">
             <a:avLst/>
@@ -32134,7 +32134,7 @@
         <p:spPr>
           <a:xfrm>
             <a:off x="3794760" y="4297679"/>
-            <a:ext cx="2194560" cy="548640"/>
+            <a:ext cx="2194560" cy="594359"/>
           </a:xfrm>
           <a:prstGeom prst="rect">
             <a:avLst/>
@@ -32149,7 +32149,7 @@
           <a:p>
             <a:pPr>
               <a:lnSpc>
-                <a:spcPct val="100000"/>
+                <a:spcPct val="90000"/>
               </a:lnSpc>
               <a:defRPr sz="1100">
                 <a:solidFill>
@@ -32172,7 +32172,7 @@
         <p:spPr>
           <a:xfrm>
             <a:off x="3520440" y="4937760"/>
-            <a:ext cx="274320" cy="548640"/>
+            <a:ext cx="274320" cy="594359"/>
           </a:xfrm>
           <a:prstGeom prst="rect">
             <a:avLst/>
@@ -32207,7 +32207,7 @@
         <p:spPr>
           <a:xfrm>
             <a:off x="3794760" y="4937760"/>
-            <a:ext cx="2194560" cy="548640"/>
+            <a:ext cx="2194560" cy="594359"/>
           </a:xfrm>
           <a:prstGeom prst="rect">
             <a:avLst/>
@@ -32222,7 +32222,7 @@
           <a:p>
             <a:pPr>
               <a:lnSpc>
-                <a:spcPct val="100000"/>
+                <a:spcPct val="90000"/>
               </a:lnSpc>
               <a:defRPr sz="1100">
                 <a:solidFill>
@@ -32325,7 +32325,7 @@
         <p:spPr>
           <a:xfrm>
             <a:off x="6446520" y="1737360"/>
-            <a:ext cx="274320" cy="548640"/>
+            <a:ext cx="274320" cy="594359"/>
           </a:xfrm>
           <a:prstGeom prst="rect">
             <a:avLst/>
@@ -32360,7 +32360,7 @@
         <p:spPr>
           <a:xfrm>
             <a:off x="6720840" y="1737360"/>
-            <a:ext cx="2194560" cy="548640"/>
+            <a:ext cx="2194560" cy="594359"/>
           </a:xfrm>
           <a:prstGeom prst="rect">
             <a:avLst/>
@@ -32375,7 +32375,7 @@
           <a:p>
             <a:pPr>
               <a:lnSpc>
-                <a:spcPct val="100000"/>
+                <a:spcPct val="90000"/>
               </a:lnSpc>
               <a:defRPr sz="1100">
                 <a:solidFill>
@@ -32398,7 +32398,7 @@
         <p:spPr>
           <a:xfrm>
             <a:off x="6446520" y="2377439"/>
-            <a:ext cx="274320" cy="548640"/>
+            <a:ext cx="274320" cy="594359"/>
           </a:xfrm>
           <a:prstGeom prst="rect">
             <a:avLst/>
@@ -32433,7 +32433,7 @@
         <p:spPr>
           <a:xfrm>
             <a:off x="6720840" y="2377439"/>
-            <a:ext cx="2194560" cy="548640"/>
+            <a:ext cx="2194560" cy="594359"/>
           </a:xfrm>
           <a:prstGeom prst="rect">
             <a:avLst/>
@@ -32448,7 +32448,7 @@
           <a:p>
             <a:pPr>
               <a:lnSpc>
-                <a:spcPct val="100000"/>
+                <a:spcPct val="90000"/>
               </a:lnSpc>
               <a:defRPr sz="1100">
                 <a:solidFill>
@@ -32471,7 +32471,7 @@
         <p:spPr>
           <a:xfrm>
             <a:off x="6446520" y="3017520"/>
-            <a:ext cx="274320" cy="548640"/>
+            <a:ext cx="274320" cy="594359"/>
           </a:xfrm>
           <a:prstGeom prst="rect">
             <a:avLst/>
@@ -32506,7 +32506,7 @@
         <p:spPr>
           <a:xfrm>
             <a:off x="6720840" y="3017520"/>
-            <a:ext cx="2194560" cy="548640"/>
+            <a:ext cx="2194560" cy="594359"/>
           </a:xfrm>
           <a:prstGeom prst="rect">
             <a:avLst/>
@@ -32521,7 +32521,7 @@
           <a:p>
             <a:pPr>
               <a:lnSpc>
-                <a:spcPct val="100000"/>
+                <a:spcPct val="90000"/>
               </a:lnSpc>
               <a:defRPr sz="1100">
                 <a:solidFill>
@@ -32544,7 +32544,7 @@
         <p:spPr>
           <a:xfrm>
             <a:off x="6446520" y="3657599"/>
-            <a:ext cx="274320" cy="548640"/>
+            <a:ext cx="274320" cy="594359"/>
           </a:xfrm>
           <a:prstGeom prst="rect">
             <a:avLst/>
@@ -32579,7 +32579,7 @@
         <p:spPr>
           <a:xfrm>
             <a:off x="6720840" y="3657599"/>
-            <a:ext cx="2194560" cy="548640"/>
+            <a:ext cx="2194560" cy="594359"/>
           </a:xfrm>
           <a:prstGeom prst="rect">
             <a:avLst/>
@@ -32594,7 +32594,7 @@
           <a:p>
             <a:pPr>
               <a:lnSpc>
-                <a:spcPct val="100000"/>
+                <a:spcPct val="90000"/>
               </a:lnSpc>
               <a:defRPr sz="1100">
                 <a:solidFill>
@@ -32617,7 +32617,7 @@
         <p:spPr>
           <a:xfrm>
             <a:off x="6446520" y="4297679"/>
-            <a:ext cx="274320" cy="548640"/>
+            <a:ext cx="274320" cy="594359"/>
           </a:xfrm>
           <a:prstGeom prst="rect">
             <a:avLst/>
@@ -32652,7 +32652,7 @@
         <p:spPr>
           <a:xfrm>
             <a:off x="6720840" y="4297679"/>
-            <a:ext cx="2194560" cy="548640"/>
+            <a:ext cx="2194560" cy="594359"/>
           </a:xfrm>
           <a:prstGeom prst="rect">
             <a:avLst/>
@@ -32667,7 +32667,7 @@
           <a:p>
             <a:pPr>
               <a:lnSpc>
-                <a:spcPct val="100000"/>
+                <a:spcPct val="90000"/>
               </a:lnSpc>
               <a:defRPr sz="1100">
                 <a:solidFill>
@@ -32690,7 +32690,7 @@
         <p:spPr>
           <a:xfrm>
             <a:off x="6446520" y="4937760"/>
-            <a:ext cx="274320" cy="548640"/>
+            <a:ext cx="274320" cy="594359"/>
           </a:xfrm>
           <a:prstGeom prst="rect">
             <a:avLst/>
@@ -32725,7 +32725,7 @@
         <p:spPr>
           <a:xfrm>
             <a:off x="6720840" y="4937760"/>
-            <a:ext cx="2194560" cy="548640"/>
+            <a:ext cx="2194560" cy="594359"/>
           </a:xfrm>
           <a:prstGeom prst="rect">
             <a:avLst/>
@@ -32740,7 +32740,7 @@
           <a:p>
             <a:pPr>
               <a:lnSpc>
-                <a:spcPct val="100000"/>
+                <a:spcPct val="90000"/>
               </a:lnSpc>
               <a:defRPr sz="1100">
                 <a:solidFill>
@@ -32939,7 +32939,7 @@
         <p:spPr>
           <a:xfrm>
             <a:off x="594360" y="1737360"/>
-            <a:ext cx="274320" cy="548640"/>
+            <a:ext cx="274320" cy="594359"/>
           </a:xfrm>
           <a:prstGeom prst="rect">
             <a:avLst/>
@@ -32974,7 +32974,7 @@
         <p:spPr>
           <a:xfrm>
             <a:off x="868680" y="1737360"/>
-            <a:ext cx="2194560" cy="548640"/>
+            <a:ext cx="2194560" cy="594359"/>
           </a:xfrm>
           <a:prstGeom prst="rect">
             <a:avLst/>
@@ -32989,7 +32989,7 @@
           <a:p>
             <a:pPr>
               <a:lnSpc>
-                <a:spcPct val="100000"/>
+                <a:spcPct val="90000"/>
               </a:lnSpc>
               <a:defRPr sz="1100">
                 <a:solidFill>
@@ -33012,7 +33012,7 @@
         <p:spPr>
           <a:xfrm>
             <a:off x="594360" y="2377439"/>
-            <a:ext cx="274320" cy="548640"/>
+            <a:ext cx="274320" cy="594359"/>
           </a:xfrm>
           <a:prstGeom prst="rect">
             <a:avLst/>
@@ -33047,7 +33047,7 @@
         <p:spPr>
           <a:xfrm>
             <a:off x="868680" y="2377439"/>
-            <a:ext cx="2194560" cy="548640"/>
+            <a:ext cx="2194560" cy="594359"/>
           </a:xfrm>
           <a:prstGeom prst="rect">
             <a:avLst/>
@@ -33062,7 +33062,7 @@
           <a:p>
             <a:pPr>
               <a:lnSpc>
-                <a:spcPct val="100000"/>
+                <a:spcPct val="90000"/>
               </a:lnSpc>
               <a:defRPr sz="1100">
                 <a:solidFill>
@@ -33085,7 +33085,7 @@
         <p:spPr>
           <a:xfrm>
             <a:off x="594360" y="3017520"/>
-            <a:ext cx="274320" cy="548640"/>
+            <a:ext cx="274320" cy="594359"/>
           </a:xfrm>
           <a:prstGeom prst="rect">
             <a:avLst/>
@@ -33120,7 +33120,7 @@
         <p:spPr>
           <a:xfrm>
             <a:off x="868680" y="3017520"/>
-            <a:ext cx="2194560" cy="548640"/>
+            <a:ext cx="2194560" cy="594359"/>
           </a:xfrm>
           <a:prstGeom prst="rect">
             <a:avLst/>
@@ -33135,7 +33135,7 @@
           <a:p>
             <a:pPr>
               <a:lnSpc>
-                <a:spcPct val="100000"/>
+                <a:spcPct val="90000"/>
               </a:lnSpc>
               <a:defRPr sz="1100">
                 <a:solidFill>
@@ -33158,7 +33158,7 @@
         <p:spPr>
           <a:xfrm>
             <a:off x="594360" y="3657599"/>
-            <a:ext cx="274320" cy="548640"/>
+            <a:ext cx="274320" cy="594359"/>
           </a:xfrm>
           <a:prstGeom prst="rect">
             <a:avLst/>
@@ -33193,7 +33193,7 @@
         <p:spPr>
           <a:xfrm>
             <a:off x="868680" y="3657599"/>
-            <a:ext cx="2194560" cy="548640"/>
+            <a:ext cx="2194560" cy="594359"/>
           </a:xfrm>
           <a:prstGeom prst="rect">
             <a:avLst/>
@@ -33208,7 +33208,7 @@
           <a:p>
             <a:pPr>
               <a:lnSpc>
-                <a:spcPct val="100000"/>
+                <a:spcPct val="90000"/>
               </a:lnSpc>
               <a:defRPr sz="1100">
                 <a:solidFill>
@@ -33231,7 +33231,7 @@
         <p:spPr>
           <a:xfrm>
             <a:off x="594360" y="4297679"/>
-            <a:ext cx="274320" cy="548640"/>
+            <a:ext cx="274320" cy="594359"/>
           </a:xfrm>
           <a:prstGeom prst="rect">
             <a:avLst/>
@@ -33266,7 +33266,7 @@
         <p:spPr>
           <a:xfrm>
             <a:off x="868680" y="4297679"/>
-            <a:ext cx="2194560" cy="548640"/>
+            <a:ext cx="2194560" cy="594359"/>
           </a:xfrm>
           <a:prstGeom prst="rect">
             <a:avLst/>
@@ -33281,7 +33281,7 @@
           <a:p>
             <a:pPr>
               <a:lnSpc>
-                <a:spcPct val="100000"/>
+                <a:spcPct val="90000"/>
               </a:lnSpc>
               <a:defRPr sz="1100">
                 <a:solidFill>
@@ -33304,7 +33304,7 @@
         <p:spPr>
           <a:xfrm>
             <a:off x="594360" y="4937760"/>
-            <a:ext cx="274320" cy="548640"/>
+            <a:ext cx="274320" cy="594359"/>
           </a:xfrm>
           <a:prstGeom prst="rect">
             <a:avLst/>
@@ -33339,7 +33339,7 @@
         <p:spPr>
           <a:xfrm>
             <a:off x="868680" y="4937760"/>
-            <a:ext cx="2194560" cy="548640"/>
+            <a:ext cx="2194560" cy="594359"/>
           </a:xfrm>
           <a:prstGeom prst="rect">
             <a:avLst/>
@@ -33354,7 +33354,7 @@
           <a:p>
             <a:pPr>
               <a:lnSpc>
-                <a:spcPct val="100000"/>
+                <a:spcPct val="90000"/>
               </a:lnSpc>
               <a:defRPr sz="1100">
                 <a:solidFill>
@@ -33457,7 +33457,7 @@
         <p:spPr>
           <a:xfrm>
             <a:off x="3520440" y="1737360"/>
-            <a:ext cx="274320" cy="548640"/>
+            <a:ext cx="274320" cy="594359"/>
           </a:xfrm>
           <a:prstGeom prst="rect">
             <a:avLst/>
@@ -33492,7 +33492,7 @@
         <p:spPr>
           <a:xfrm>
             <a:off x="3794760" y="1737360"/>
-            <a:ext cx="2194560" cy="548640"/>
+            <a:ext cx="2194560" cy="594359"/>
           </a:xfrm>
           <a:prstGeom prst="rect">
             <a:avLst/>
@@ -33507,7 +33507,7 @@
           <a:p>
             <a:pPr>
               <a:lnSpc>
-                <a:spcPct val="100000"/>
+                <a:spcPct val="90000"/>
               </a:lnSpc>
               <a:defRPr sz="1100">
                 <a:solidFill>
@@ -33530,7 +33530,7 @@
         <p:spPr>
           <a:xfrm>
             <a:off x="3520440" y="2377439"/>
-            <a:ext cx="274320" cy="548640"/>
+            <a:ext cx="274320" cy="594359"/>
           </a:xfrm>
           <a:prstGeom prst="rect">
             <a:avLst/>
@@ -33565,7 +33565,7 @@
         <p:spPr>
           <a:xfrm>
             <a:off x="3794760" y="2377439"/>
-            <a:ext cx="2194560" cy="548640"/>
+            <a:ext cx="2194560" cy="594359"/>
           </a:xfrm>
           <a:prstGeom prst="rect">
             <a:avLst/>
@@ -33580,7 +33580,7 @@
           <a:p>
             <a:pPr>
               <a:lnSpc>
-                <a:spcPct val="100000"/>
+                <a:spcPct val="90000"/>
               </a:lnSpc>
               <a:defRPr sz="1100">
                 <a:solidFill>
@@ -33603,7 +33603,7 @@
         <p:spPr>
           <a:xfrm>
             <a:off x="3520440" y="3017520"/>
-            <a:ext cx="274320" cy="548640"/>
+            <a:ext cx="274320" cy="594359"/>
           </a:xfrm>
           <a:prstGeom prst="rect">
             <a:avLst/>
@@ -33638,7 +33638,7 @@
         <p:spPr>
           <a:xfrm>
             <a:off x="3794760" y="3017520"/>
-            <a:ext cx="2194560" cy="548640"/>
+            <a:ext cx="2194560" cy="594359"/>
           </a:xfrm>
           <a:prstGeom prst="rect">
             <a:avLst/>
@@ -33653,7 +33653,7 @@
           <a:p>
             <a:pPr>
               <a:lnSpc>
-                <a:spcPct val="100000"/>
+                <a:spcPct val="90000"/>
               </a:lnSpc>
               <a:defRPr sz="1100">
                 <a:solidFill>
@@ -33676,7 +33676,7 @@
         <p:spPr>
           <a:xfrm>
             <a:off x="3520440" y="3657599"/>
-            <a:ext cx="274320" cy="548640"/>
+            <a:ext cx="274320" cy="594359"/>
           </a:xfrm>
           <a:prstGeom prst="rect">
             <a:avLst/>
@@ -33711,7 +33711,7 @@
         <p:spPr>
           <a:xfrm>
             <a:off x="3794760" y="3657599"/>
-            <a:ext cx="2194560" cy="548640"/>
+            <a:ext cx="2194560" cy="594359"/>
           </a:xfrm>
           <a:prstGeom prst="rect">
             <a:avLst/>
@@ -33726,7 +33726,7 @@
           <a:p>
             <a:pPr>
               <a:lnSpc>
-                <a:spcPct val="100000"/>
+                <a:spcPct val="90000"/>
               </a:lnSpc>
               <a:defRPr sz="1100">
                 <a:solidFill>
@@ -33749,7 +33749,7 @@
         <p:spPr>
           <a:xfrm>
             <a:off x="3520440" y="4297679"/>
-            <a:ext cx="274320" cy="548640"/>
+            <a:ext cx="274320" cy="594359"/>
           </a:xfrm>
           <a:prstGeom prst="rect">
             <a:avLst/>
@@ -33784,7 +33784,7 @@
         <p:spPr>
           <a:xfrm>
             <a:off x="3794760" y="4297679"/>
-            <a:ext cx="2194560" cy="548640"/>
+            <a:ext cx="2194560" cy="594359"/>
           </a:xfrm>
           <a:prstGeom prst="rect">
             <a:avLst/>
@@ -33799,7 +33799,7 @@
           <a:p>
             <a:pPr>
               <a:lnSpc>
-                <a:spcPct val="100000"/>
+                <a:spcPct val="90000"/>
               </a:lnSpc>
               <a:defRPr sz="1100">
                 <a:solidFill>
@@ -33822,7 +33822,7 @@
         <p:spPr>
           <a:xfrm>
             <a:off x="3520440" y="4937760"/>
-            <a:ext cx="274320" cy="548640"/>
+            <a:ext cx="274320" cy="594359"/>
           </a:xfrm>
           <a:prstGeom prst="rect">
             <a:avLst/>
@@ -33857,7 +33857,7 @@
         <p:spPr>
           <a:xfrm>
             <a:off x="3794760" y="4937760"/>
-            <a:ext cx="2194560" cy="548640"/>
+            <a:ext cx="2194560" cy="594359"/>
           </a:xfrm>
           <a:prstGeom prst="rect">
             <a:avLst/>
@@ -33872,7 +33872,7 @@
           <a:p>
             <a:pPr>
               <a:lnSpc>
-                <a:spcPct val="100000"/>
+                <a:spcPct val="90000"/>
               </a:lnSpc>
               <a:defRPr sz="1100">
                 <a:solidFill>
@@ -33975,7 +33975,7 @@
         <p:spPr>
           <a:xfrm>
             <a:off x="6446520" y="1737360"/>
-            <a:ext cx="274320" cy="548640"/>
+            <a:ext cx="274320" cy="594359"/>
           </a:xfrm>
           <a:prstGeom prst="rect">
             <a:avLst/>
@@ -34010,7 +34010,7 @@
         <p:spPr>
           <a:xfrm>
             <a:off x="6720840" y="1737360"/>
-            <a:ext cx="2194560" cy="548640"/>
+            <a:ext cx="2194560" cy="594359"/>
           </a:xfrm>
           <a:prstGeom prst="rect">
             <a:avLst/>
@@ -34025,7 +34025,7 @@
           <a:p>
             <a:pPr>
               <a:lnSpc>
-                <a:spcPct val="100000"/>
+                <a:spcPct val="90000"/>
               </a:lnSpc>
               <a:defRPr sz="1100">
                 <a:solidFill>
@@ -34048,7 +34048,7 @@
         <p:spPr>
           <a:xfrm>
             <a:off x="6446520" y="2377439"/>
-            <a:ext cx="274320" cy="548640"/>
+            <a:ext cx="274320" cy="594359"/>
           </a:xfrm>
           <a:prstGeom prst="rect">
             <a:avLst/>
@@ -34083,7 +34083,7 @@
         <p:spPr>
           <a:xfrm>
             <a:off x="6720840" y="2377439"/>
-            <a:ext cx="2194560" cy="548640"/>
+            <a:ext cx="2194560" cy="594359"/>
           </a:xfrm>
           <a:prstGeom prst="rect">
             <a:avLst/>
@@ -34098,7 +34098,7 @@
           <a:p>
             <a:pPr>
               <a:lnSpc>
-                <a:spcPct val="100000"/>
+                <a:spcPct val="90000"/>
               </a:lnSpc>
               <a:defRPr sz="1100">
                 <a:solidFill>
@@ -34121,7 +34121,7 @@
         <p:spPr>
           <a:xfrm>
             <a:off x="6446520" y="3017520"/>
-            <a:ext cx="274320" cy="548640"/>
+            <a:ext cx="274320" cy="594359"/>
           </a:xfrm>
           <a:prstGeom prst="rect">
             <a:avLst/>
@@ -34156,7 +34156,7 @@
         <p:spPr>
           <a:xfrm>
             <a:off x="6720840" y="3017520"/>
-            <a:ext cx="2194560" cy="548640"/>
+            <a:ext cx="2194560" cy="594359"/>
           </a:xfrm>
           <a:prstGeom prst="rect">
             <a:avLst/>
@@ -34171,7 +34171,7 @@
           <a:p>
             <a:pPr>
               <a:lnSpc>
-                <a:spcPct val="100000"/>
+                <a:spcPct val="90000"/>
               </a:lnSpc>
               <a:defRPr sz="1100">
                 <a:solidFill>
@@ -34194,7 +34194,7 @@
         <p:spPr>
           <a:xfrm>
             <a:off x="6446520" y="3657599"/>
-            <a:ext cx="274320" cy="548640"/>
+            <a:ext cx="274320" cy="594359"/>
           </a:xfrm>
           <a:prstGeom prst="rect">
             <a:avLst/>
@@ -34229,7 +34229,7 @@
         <p:spPr>
           <a:xfrm>
             <a:off x="6720840" y="3657599"/>
-            <a:ext cx="2194560" cy="548640"/>
+            <a:ext cx="2194560" cy="594359"/>
           </a:xfrm>
           <a:prstGeom prst="rect">
             <a:avLst/>
@@ -34244,7 +34244,7 @@
           <a:p>
             <a:pPr>
               <a:lnSpc>
-                <a:spcPct val="100000"/>
+                <a:spcPct val="90000"/>
               </a:lnSpc>
               <a:defRPr sz="1100">
                 <a:solidFill>
@@ -34267,7 +34267,7 @@
         <p:spPr>
           <a:xfrm>
             <a:off x="6446520" y="4297679"/>
-            <a:ext cx="274320" cy="548640"/>
+            <a:ext cx="274320" cy="594359"/>
           </a:xfrm>
           <a:prstGeom prst="rect">
             <a:avLst/>
@@ -34302,7 +34302,7 @@
         <p:spPr>
           <a:xfrm>
             <a:off x="6720840" y="4297679"/>
-            <a:ext cx="2194560" cy="548640"/>
+            <a:ext cx="2194560" cy="594359"/>
           </a:xfrm>
           <a:prstGeom prst="rect">
             <a:avLst/>
@@ -34317,7 +34317,7 @@
           <a:p>
             <a:pPr>
               <a:lnSpc>
-                <a:spcPct val="100000"/>
+                <a:spcPct val="90000"/>
               </a:lnSpc>
               <a:defRPr sz="1100">
                 <a:solidFill>
@@ -34340,7 +34340,7 @@
         <p:spPr>
           <a:xfrm>
             <a:off x="6446520" y="4937760"/>
-            <a:ext cx="274320" cy="548640"/>
+            <a:ext cx="274320" cy="594359"/>
           </a:xfrm>
           <a:prstGeom prst="rect">
             <a:avLst/>
@@ -34375,7 +34375,7 @@
         <p:spPr>
           <a:xfrm>
             <a:off x="6720840" y="4937760"/>
-            <a:ext cx="2194560" cy="548640"/>
+            <a:ext cx="2194560" cy="594359"/>
           </a:xfrm>
           <a:prstGeom prst="rect">
             <a:avLst/>
@@ -34390,7 +34390,7 @@
           <a:p>
             <a:pPr>
               <a:lnSpc>
-                <a:spcPct val="100000"/>
+                <a:spcPct val="90000"/>
               </a:lnSpc>
               <a:defRPr sz="1100">
                 <a:solidFill>
@@ -34589,7 +34589,7 @@
         <p:spPr>
           <a:xfrm>
             <a:off x="594360" y="1737360"/>
-            <a:ext cx="274320" cy="548640"/>
+            <a:ext cx="274320" cy="594359"/>
           </a:xfrm>
           <a:prstGeom prst="rect">
             <a:avLst/>
@@ -34624,7 +34624,7 @@
         <p:spPr>
           <a:xfrm>
             <a:off x="868680" y="1737360"/>
-            <a:ext cx="2194560" cy="548640"/>
+            <a:ext cx="2194560" cy="594359"/>
           </a:xfrm>
           <a:prstGeom prst="rect">
             <a:avLst/>
@@ -34639,7 +34639,7 @@
           <a:p>
             <a:pPr>
               <a:lnSpc>
-                <a:spcPct val="100000"/>
+                <a:spcPct val="90000"/>
               </a:lnSpc>
               <a:defRPr sz="1100">
                 <a:solidFill>
@@ -34662,7 +34662,7 @@
         <p:spPr>
           <a:xfrm>
             <a:off x="594360" y="2377439"/>
-            <a:ext cx="274320" cy="548640"/>
+            <a:ext cx="274320" cy="594359"/>
           </a:xfrm>
           <a:prstGeom prst="rect">
             <a:avLst/>
@@ -34697,7 +34697,7 @@
         <p:spPr>
           <a:xfrm>
             <a:off x="868680" y="2377439"/>
-            <a:ext cx="2194560" cy="548640"/>
+            <a:ext cx="2194560" cy="594359"/>
           </a:xfrm>
           <a:prstGeom prst="rect">
             <a:avLst/>
@@ -34712,7 +34712,7 @@
           <a:p>
             <a:pPr>
               <a:lnSpc>
-                <a:spcPct val="100000"/>
+                <a:spcPct val="90000"/>
               </a:lnSpc>
               <a:defRPr sz="1100">
                 <a:solidFill>
@@ -34735,7 +34735,7 @@
         <p:spPr>
           <a:xfrm>
             <a:off x="594360" y="3017520"/>
-            <a:ext cx="274320" cy="548640"/>
+            <a:ext cx="274320" cy="594359"/>
           </a:xfrm>
           <a:prstGeom prst="rect">
             <a:avLst/>
@@ -34770,7 +34770,7 @@
         <p:spPr>
           <a:xfrm>
             <a:off x="868680" y="3017520"/>
-            <a:ext cx="2194560" cy="548640"/>
+            <a:ext cx="2194560" cy="594359"/>
           </a:xfrm>
           <a:prstGeom prst="rect">
             <a:avLst/>
@@ -34785,7 +34785,7 @@
           <a:p>
             <a:pPr>
               <a:lnSpc>
-                <a:spcPct val="100000"/>
+                <a:spcPct val="90000"/>
               </a:lnSpc>
               <a:defRPr sz="1100">
                 <a:solidFill>
@@ -34808,7 +34808,7 @@
         <p:spPr>
           <a:xfrm>
             <a:off x="594360" y="3657599"/>
-            <a:ext cx="274320" cy="548640"/>
+            <a:ext cx="274320" cy="594359"/>
           </a:xfrm>
           <a:prstGeom prst="rect">
             <a:avLst/>
@@ -34843,7 +34843,7 @@
         <p:spPr>
           <a:xfrm>
             <a:off x="868680" y="3657599"/>
-            <a:ext cx="2194560" cy="548640"/>
+            <a:ext cx="2194560" cy="594359"/>
           </a:xfrm>
           <a:prstGeom prst="rect">
             <a:avLst/>
@@ -34858,7 +34858,7 @@
           <a:p>
             <a:pPr>
               <a:lnSpc>
-                <a:spcPct val="100000"/>
+                <a:spcPct val="90000"/>
               </a:lnSpc>
               <a:defRPr sz="1100">
                 <a:solidFill>
@@ -34881,7 +34881,7 @@
         <p:spPr>
           <a:xfrm>
             <a:off x="594360" y="4297679"/>
-            <a:ext cx="274320" cy="548640"/>
+            <a:ext cx="274320" cy="594359"/>
           </a:xfrm>
           <a:prstGeom prst="rect">
             <a:avLst/>
@@ -34916,7 +34916,7 @@
         <p:spPr>
           <a:xfrm>
             <a:off x="868680" y="4297679"/>
-            <a:ext cx="2194560" cy="548640"/>
+            <a:ext cx="2194560" cy="594359"/>
           </a:xfrm>
           <a:prstGeom prst="rect">
             <a:avLst/>
@@ -34931,7 +34931,7 @@
           <a:p>
             <a:pPr>
               <a:lnSpc>
-                <a:spcPct val="100000"/>
+                <a:spcPct val="90000"/>
               </a:lnSpc>
               <a:defRPr sz="1100">
                 <a:solidFill>
@@ -34954,7 +34954,7 @@
         <p:spPr>
           <a:xfrm>
             <a:off x="594360" y="4937760"/>
-            <a:ext cx="274320" cy="548640"/>
+            <a:ext cx="274320" cy="594359"/>
           </a:xfrm>
           <a:prstGeom prst="rect">
             <a:avLst/>
@@ -34989,7 +34989,7 @@
         <p:spPr>
           <a:xfrm>
             <a:off x="868680" y="4937760"/>
-            <a:ext cx="2194560" cy="548640"/>
+            <a:ext cx="2194560" cy="594359"/>
           </a:xfrm>
           <a:prstGeom prst="rect">
             <a:avLst/>
@@ -35004,7 +35004,7 @@
           <a:p>
             <a:pPr>
               <a:lnSpc>
-                <a:spcPct val="100000"/>
+                <a:spcPct val="90000"/>
               </a:lnSpc>
               <a:defRPr sz="1100">
                 <a:solidFill>
@@ -35107,7 +35107,7 @@
         <p:spPr>
           <a:xfrm>
             <a:off x="3520440" y="1737360"/>
-            <a:ext cx="274320" cy="548640"/>
+            <a:ext cx="274320" cy="594359"/>
           </a:xfrm>
           <a:prstGeom prst="rect">
             <a:avLst/>
@@ -35142,7 +35142,7 @@
         <p:spPr>
           <a:xfrm>
             <a:off x="3794760" y="1737360"/>
-            <a:ext cx="2194560" cy="548640"/>
+            <a:ext cx="2194560" cy="594359"/>
           </a:xfrm>
           <a:prstGeom prst="rect">
             <a:avLst/>
@@ -35157,7 +35157,7 @@
           <a:p>
             <a:pPr>
               <a:lnSpc>
-                <a:spcPct val="100000"/>
+                <a:spcPct val="90000"/>
               </a:lnSpc>
               <a:defRPr sz="1100">
                 <a:solidFill>
@@ -35180,7 +35180,7 @@
         <p:spPr>
           <a:xfrm>
             <a:off x="3520440" y="2377439"/>
-            <a:ext cx="274320" cy="548640"/>
+            <a:ext cx="274320" cy="594359"/>
           </a:xfrm>
           <a:prstGeom prst="rect">
             <a:avLst/>
@@ -35215,7 +35215,7 @@
         <p:spPr>
           <a:xfrm>
             <a:off x="3794760" y="2377439"/>
-            <a:ext cx="2194560" cy="548640"/>
+            <a:ext cx="2194560" cy="594359"/>
           </a:xfrm>
           <a:prstGeom prst="rect">
             <a:avLst/>
@@ -35230,7 +35230,7 @@
           <a:p>
             <a:pPr>
               <a:lnSpc>
-                <a:spcPct val="100000"/>
+                <a:spcPct val="90000"/>
               </a:lnSpc>
               <a:defRPr sz="1100">
                 <a:solidFill>
@@ -35253,7 +35253,7 @@
         <p:spPr>
           <a:xfrm>
             <a:off x="3520440" y="3017520"/>
-            <a:ext cx="274320" cy="548640"/>
+            <a:ext cx="274320" cy="594359"/>
           </a:xfrm>
           <a:prstGeom prst="rect">
             <a:avLst/>
@@ -35288,7 +35288,7 @@
         <p:spPr>
           <a:xfrm>
             <a:off x="3794760" y="3017520"/>
-            <a:ext cx="2194560" cy="548640"/>
+            <a:ext cx="2194560" cy="594359"/>
           </a:xfrm>
           <a:prstGeom prst="rect">
             <a:avLst/>
@@ -35303,7 +35303,7 @@
           <a:p>
             <a:pPr>
               <a:lnSpc>
-                <a:spcPct val="100000"/>
+                <a:spcPct val="90000"/>
               </a:lnSpc>
               <a:defRPr sz="1100">
                 <a:solidFill>
@@ -35326,7 +35326,7 @@
         <p:spPr>
           <a:xfrm>
             <a:off x="3520440" y="3657599"/>
-            <a:ext cx="274320" cy="548640"/>
+            <a:ext cx="274320" cy="594359"/>
           </a:xfrm>
           <a:prstGeom prst="rect">
             <a:avLst/>
@@ -35361,7 +35361,7 @@
         <p:spPr>
           <a:xfrm>
             <a:off x="3794760" y="3657599"/>
-            <a:ext cx="2194560" cy="548640"/>
+            <a:ext cx="2194560" cy="594359"/>
           </a:xfrm>
           <a:prstGeom prst="rect">
             <a:avLst/>
@@ -35376,7 +35376,7 @@
           <a:p>
             <a:pPr>
               <a:lnSpc>
-                <a:spcPct val="100000"/>
+                <a:spcPct val="90000"/>
               </a:lnSpc>
               <a:defRPr sz="1100">
                 <a:solidFill>
@@ -35399,7 +35399,7 @@
         <p:spPr>
           <a:xfrm>
             <a:off x="3520440" y="4297679"/>
-            <a:ext cx="274320" cy="548640"/>
+            <a:ext cx="274320" cy="594359"/>
           </a:xfrm>
           <a:prstGeom prst="rect">
             <a:avLst/>
@@ -35434,7 +35434,7 @@
         <p:spPr>
           <a:xfrm>
             <a:off x="3794760" y="4297679"/>
-            <a:ext cx="2194560" cy="548640"/>
+            <a:ext cx="2194560" cy="594359"/>
           </a:xfrm>
           <a:prstGeom prst="rect">
             <a:avLst/>
@@ -35449,7 +35449,7 @@
           <a:p>
             <a:pPr>
               <a:lnSpc>
-                <a:spcPct val="100000"/>
+                <a:spcPct val="90000"/>
               </a:lnSpc>
               <a:defRPr sz="1100">
                 <a:solidFill>
@@ -35472,7 +35472,7 @@
         <p:spPr>
           <a:xfrm>
             <a:off x="3520440" y="4937760"/>
-            <a:ext cx="274320" cy="548640"/>
+            <a:ext cx="274320" cy="594359"/>
           </a:xfrm>
           <a:prstGeom prst="rect">
             <a:avLst/>
@@ -35507,7 +35507,7 @@
         <p:spPr>
           <a:xfrm>
             <a:off x="3794760" y="4937760"/>
-            <a:ext cx="2194560" cy="548640"/>
+            <a:ext cx="2194560" cy="594359"/>
           </a:xfrm>
           <a:prstGeom prst="rect">
             <a:avLst/>
@@ -35522,7 +35522,7 @@
           <a:p>
             <a:pPr>
               <a:lnSpc>
-                <a:spcPct val="100000"/>
+                <a:spcPct val="90000"/>
               </a:lnSpc>
               <a:defRPr sz="1100">
                 <a:solidFill>
@@ -35625,7 +35625,7 @@
         <p:spPr>
           <a:xfrm>
             <a:off x="6446520" y="1737360"/>
-            <a:ext cx="274320" cy="548640"/>
+            <a:ext cx="274320" cy="594359"/>
           </a:xfrm>
           <a:prstGeom prst="rect">
             <a:avLst/>
@@ -35660,7 +35660,7 @@
         <p:spPr>
           <a:xfrm>
             <a:off x="6720840" y="1737360"/>
-            <a:ext cx="2194560" cy="548640"/>
+            <a:ext cx="2194560" cy="594359"/>
           </a:xfrm>
           <a:prstGeom prst="rect">
             <a:avLst/>
@@ -35675,7 +35675,7 @@
           <a:p>
             <a:pPr>
               <a:lnSpc>
-                <a:spcPct val="100000"/>
+                <a:spcPct val="90000"/>
               </a:lnSpc>
               <a:defRPr sz="1100">
                 <a:solidFill>
@@ -35698,7 +35698,7 @@
         <p:spPr>
           <a:xfrm>
             <a:off x="6446520" y="2377439"/>
-            <a:ext cx="274320" cy="548640"/>
+            <a:ext cx="274320" cy="594359"/>
           </a:xfrm>
           <a:prstGeom prst="rect">
             <a:avLst/>
@@ -35733,7 +35733,7 @@
         <p:spPr>
           <a:xfrm>
             <a:off x="6720840" y="2377439"/>
-            <a:ext cx="2194560" cy="548640"/>
+            <a:ext cx="2194560" cy="594359"/>
           </a:xfrm>
           <a:prstGeom prst="rect">
             <a:avLst/>
@@ -35748,7 +35748,7 @@
           <a:p>
             <a:pPr>
               <a:lnSpc>
-                <a:spcPct val="100000"/>
+                <a:spcPct val="90000"/>
               </a:lnSpc>
               <a:defRPr sz="1100">
                 <a:solidFill>
@@ -35771,7 +35771,7 @@
         <p:spPr>
           <a:xfrm>
             <a:off x="6446520" y="3017520"/>
-            <a:ext cx="274320" cy="548640"/>
+            <a:ext cx="274320" cy="594359"/>
           </a:xfrm>
           <a:prstGeom prst="rect">
             <a:avLst/>
@@ -35806,7 +35806,7 @@
         <p:spPr>
           <a:xfrm>
             <a:off x="6720840" y="3017520"/>
-            <a:ext cx="2194560" cy="548640"/>
+            <a:ext cx="2194560" cy="594359"/>
           </a:xfrm>
           <a:prstGeom prst="rect">
             <a:avLst/>
@@ -35821,7 +35821,7 @@
           <a:p>
             <a:pPr>
               <a:lnSpc>
-                <a:spcPct val="100000"/>
+                <a:spcPct val="90000"/>
               </a:lnSpc>
               <a:defRPr sz="1100">
                 <a:solidFill>
@@ -35844,7 +35844,7 @@
         <p:spPr>
           <a:xfrm>
             <a:off x="6446520" y="3657599"/>
-            <a:ext cx="274320" cy="548640"/>
+            <a:ext cx="274320" cy="594359"/>
           </a:xfrm>
           <a:prstGeom prst="rect">
             <a:avLst/>
@@ -35879,7 +35879,7 @@
         <p:spPr>
           <a:xfrm>
             <a:off x="6720840" y="3657599"/>
-            <a:ext cx="2194560" cy="548640"/>
+            <a:ext cx="2194560" cy="594359"/>
           </a:xfrm>
           <a:prstGeom prst="rect">
             <a:avLst/>
@@ -35894,7 +35894,7 @@
           <a:p>
             <a:pPr>
               <a:lnSpc>
-                <a:spcPct val="100000"/>
+                <a:spcPct val="90000"/>
               </a:lnSpc>
               <a:defRPr sz="1100">
                 <a:solidFill>
@@ -35917,7 +35917,7 @@
         <p:spPr>
           <a:xfrm>
             <a:off x="6446520" y="4297679"/>
-            <a:ext cx="274320" cy="548640"/>
+            <a:ext cx="274320" cy="594359"/>
           </a:xfrm>
           <a:prstGeom prst="rect">
             <a:avLst/>
@@ -35952,7 +35952,7 @@
         <p:spPr>
           <a:xfrm>
             <a:off x="6720840" y="4297679"/>
-            <a:ext cx="2194560" cy="548640"/>
+            <a:ext cx="2194560" cy="594359"/>
           </a:xfrm>
           <a:prstGeom prst="rect">
             <a:avLst/>
@@ -35967,7 +35967,7 @@
           <a:p>
             <a:pPr>
               <a:lnSpc>
-                <a:spcPct val="100000"/>
+                <a:spcPct val="90000"/>
               </a:lnSpc>
               <a:defRPr sz="1100">
                 <a:solidFill>
@@ -35990,7 +35990,7 @@
         <p:spPr>
           <a:xfrm>
             <a:off x="6446520" y="4937760"/>
-            <a:ext cx="274320" cy="548640"/>
+            <a:ext cx="274320" cy="594359"/>
           </a:xfrm>
           <a:prstGeom prst="rect">
             <a:avLst/>
@@ -36025,7 +36025,7 @@
         <p:spPr>
           <a:xfrm>
             <a:off x="6720840" y="4937760"/>
-            <a:ext cx="2194560" cy="548640"/>
+            <a:ext cx="2194560" cy="594359"/>
           </a:xfrm>
           <a:prstGeom prst="rect">
             <a:avLst/>
@@ -36040,7 +36040,7 @@
           <a:p>
             <a:pPr>
               <a:lnSpc>
-                <a:spcPct val="100000"/>
+                <a:spcPct val="90000"/>
               </a:lnSpc>
               <a:defRPr sz="1100">
                 <a:solidFill>
